--- a/data/courses/FBE_2026/slides/FBE_2026_02_Block2_Indices_Null_Models_and_Extinctions.pptx
+++ b/data/courses/FBE_2026/slides/FBE_2026_02_Block2_Indices_Null_Models_and_Extinctions.pptx
@@ -4,6 +4,9 @@
   <p:sldMasterIdLst>
     <p:sldMasterId id="2147483648" r:id="rId1"/>
   </p:sldMasterIdLst>
+  <p:notesMasterIdLst>
+    <p:notesMasterId r:id="rId15"/>
+  </p:notesMasterIdLst>
   <p:sldIdLst>
     <p:sldId id="256" r:id="rId2"/>
     <p:sldId id="257" r:id="rId3"/>
@@ -14,15 +17,11 @@
     <p:sldId id="262" r:id="rId8"/>
     <p:sldId id="263" r:id="rId9"/>
     <p:sldId id="264" r:id="rId10"/>
-    <p:sldId id="265" r:id="rId11"/>
-    <p:sldId id="266" r:id="rId12"/>
-    <p:sldId id="267" r:id="rId13"/>
-    <p:sldId id="268" r:id="rId14"/>
-    <p:sldId id="269" r:id="rId15"/>
+    <p:sldId id="266" r:id="rId11"/>
+    <p:sldId id="267" r:id="rId12"/>
+    <p:sldId id="268" r:id="rId13"/>
+    <p:sldId id="269" r:id="rId14"/>
   </p:sldIdLst>
-  <p:notesMasterIdLst>
-    <p:notesMasterId r:id="rId16"/>
-  </p:notesMasterIdLst>
   <p:sldSz cx="12192000" cy="6858000"/>
   <p:notesSz cx="6858000" cy="12192000"/>
   <p:defaultTextStyle>
@@ -117,13 +116,20 @@
       </a:defRPr>
     </a:lvl9pPr>
   </p:defaultTextStyle>
+  <p:extLst>
+    <p:ext uri="{EFAFB233-063F-42B5-8137-9DF3F51BA10A}">
+      <p15:sldGuideLst xmlns:p15="http://schemas.microsoft.com/office/powerpoint/2012/main"/>
+    </p:ext>
+  </p:extLst>
 </p:presentation>
 </file>
 
 <file path=ppt/charts/chart1.xml><?xml version="1.0" encoding="utf-8"?>
-<c:chartSpace xmlns:c="http://schemas.openxmlformats.org/drawingml/2006/chart" xmlns:a="http://schemas.openxmlformats.org/drawingml/2006/main" xmlns:r="http://schemas.openxmlformats.org/officeDocument/2006/relationships">
+<c:chartSpace xmlns:c="http://schemas.openxmlformats.org/drawingml/2006/chart" xmlns:a="http://schemas.openxmlformats.org/drawingml/2006/main" xmlns:r="http://schemas.openxmlformats.org/officeDocument/2006/relationships" xmlns:c16r2="http://schemas.microsoft.com/office/drawing/2015/06/chart">
   <c:date1904 val="0"/>
+  <c:lang val="fr-FR"/>
   <c:roundedCorners val="1"/>
+  <c:style val="2"/>
   <c:chart>
     <c:title>
       <c:tx>
@@ -140,7 +146,7 @@
               </a:defRPr>
             </a:pPr>
             <a:r>
-              <a:rPr sz="1200" b="0" i="0" u="none" strike="noStrike">
+              <a:rPr lang="fr-FR" sz="1200" b="0" i="0" u="none" strike="noStrike">
                 <a:solidFill>
                   <a:srgbClr val="0B3C5D"/>
                 </a:solidFill>
@@ -151,7 +157,6 @@
           </a:p>
         </c:rich>
       </c:tx>
-      <c:layout/>
       <c:overlay val="0"/>
     </c:title>
     <c:autoTitleDeleted val="0"/>
@@ -175,9 +180,6 @@
             </c:strRef>
           </c:tx>
           <c:spPr>
-            <a:solidFill>
-              <a:srgbClr val="D9822B"/>
-            </a:solidFill>
             <a:ln>
               <a:noFill/>
             </a:ln>
@@ -264,19 +266,19 @@
                 <c:formatCode>General</c:formatCode>
                 <c:ptCount val="16"/>
                 <c:pt idx="0">
-                  <c:v>0.258</c:v>
+                  <c:v>0.25800000000000001</c:v>
                 </c:pt>
                 <c:pt idx="1">
-                  <c:v>0.266</c:v>
+                  <c:v>0.26600000000000001</c:v>
                 </c:pt>
                 <c:pt idx="2">
                   <c:v>0.311</c:v>
                 </c:pt>
                 <c:pt idx="3">
-                  <c:v>0.303</c:v>
+                  <c:v>0.30299999999999999</c:v>
                 </c:pt>
                 <c:pt idx="4">
-                  <c:v>0.29</c:v>
+                  <c:v>0.28999999999999998</c:v>
                 </c:pt>
                 <c:pt idx="5">
                   <c:v>0.371</c:v>
@@ -285,28 +287,28 @@
                   <c:v>0.34</c:v>
                 </c:pt>
                 <c:pt idx="7">
-                  <c:v>0.344</c:v>
+                  <c:v>0.34399999999999997</c:v>
                 </c:pt>
                 <c:pt idx="8">
-                  <c:v>0.393</c:v>
+                  <c:v>0.39300000000000002</c:v>
                 </c:pt>
                 <c:pt idx="9">
-                  <c:v>0.404</c:v>
+                  <c:v>0.40400000000000003</c:v>
                 </c:pt>
                 <c:pt idx="10">
-                  <c:v>0.463</c:v>
+                  <c:v>0.46300000000000002</c:v>
                 </c:pt>
                 <c:pt idx="11">
                   <c:v>0.49</c:v>
                 </c:pt>
                 <c:pt idx="12">
-                  <c:v>0.448</c:v>
+                  <c:v>0.44800000000000001</c:v>
                 </c:pt>
                 <c:pt idx="13">
-                  <c:v>0.519</c:v>
+                  <c:v>0.51900000000000002</c:v>
                 </c:pt>
                 <c:pt idx="14">
-                  <c:v>0.536</c:v>
+                  <c:v>0.53600000000000003</c:v>
                 </c:pt>
                 <c:pt idx="15">
                   <c:v>0.505</c:v>
@@ -315,23 +317,13 @@
             </c:numRef>
           </c:yVal>
           <c:smooth val="0"/>
+          <c:extLst>
+            <c:ext xmlns:c16="http://schemas.microsoft.com/office/drawing/2014/chart" uri="{C3380CC4-5D6E-409C-BE32-E72D297353CC}">
+              <c16:uniqueId val="{00000000-9817-5643-AB8B-CB2CC1472B56}"/>
+            </c:ext>
+          </c:extLst>
         </c:ser>
         <c:dLbls>
-          <c:numFmt formatCode="General" sourceLinked="0"/>
-          <c:txPr>
-            <a:bodyPr/>
-            <a:lstStyle/>
-            <a:p>
-              <a:pPr>
-                <a:defRPr b="0" i="0" strike="noStrike" sz="1200" u="none">
-                  <a:solidFill>
-                    <a:srgbClr val="000000"/>
-                  </a:solidFill>
-                  <a:latin typeface="Arial"/>
-                </a:defRPr>
-              </a:pPr>
-            </a:p>
-          </c:txPr>
           <c:showLegendKey val="0"/>
           <c:showVal val="0"/>
           <c:showCatName val="0"/>
@@ -364,7 +356,7 @@
                   </a:defRPr>
                 </a:pPr>
                 <a:r>
-                  <a:rPr b="0" i="0" u="none" strike="noStrike">
+                  <a:rPr lang="fr-FR" b="0" i="0" u="none" strike="noStrike">
                     <a:solidFill>
                       <a:srgbClr val="6B6B6B"/>
                     </a:solidFill>
@@ -375,7 +367,6 @@
               </a:p>
             </c:rich>
           </c:tx>
-          <c:layout/>
           <c:overlay val="0"/>
         </c:title>
         <c:numFmt formatCode="General" sourceLinked="1"/>
@@ -408,9 +399,7 @@
         </c:txPr>
         <c:crossAx val="2094734552"/>
         <c:crosses val="autoZero"/>
-        <c:auto val="1"/>
-        <c:lblAlgn val="ctr"/>
-        <c:noMultiLvlLbl val="1"/>
+        <c:crossBetween val="midCat"/>
       </c:valAx>
       <c:valAx>
         <c:axId val="2094734552"/>
@@ -445,7 +434,7 @@
                   </a:defRPr>
                 </a:pPr>
                 <a:r>
-                  <a:rPr b="0" i="0" u="none" strike="noStrike">
+                  <a:rPr lang="fr-FR" b="0" i="0" u="none" strike="noStrike">
                     <a:solidFill>
                       <a:srgbClr val="6B6B6B"/>
                     </a:solidFill>
@@ -456,7 +445,6 @@
               </a:p>
             </c:rich>
           </c:tx>
-          <c:layout/>
           <c:overlay val="0"/>
         </c:title>
         <c:numFmt formatCode="General" sourceLinked="0"/>
@@ -517,9 +505,11 @@
 </file>
 
 <file path=ppt/charts/chart2.xml><?xml version="1.0" encoding="utf-8"?>
-<c:chartSpace xmlns:c="http://schemas.openxmlformats.org/drawingml/2006/chart" xmlns:a="http://schemas.openxmlformats.org/drawingml/2006/main" xmlns:r="http://schemas.openxmlformats.org/officeDocument/2006/relationships">
+<c:chartSpace xmlns:c="http://schemas.openxmlformats.org/drawingml/2006/chart" xmlns:a="http://schemas.openxmlformats.org/drawingml/2006/main" xmlns:r="http://schemas.openxmlformats.org/officeDocument/2006/relationships" xmlns:c16r2="http://schemas.microsoft.com/office/drawing/2015/06/chart">
   <c:date1904 val="0"/>
+  <c:lang val="fr-FR"/>
   <c:roundedCorners val="1"/>
+  <c:style val="2"/>
   <c:chart>
     <c:title>
       <c:tx>
@@ -536,7 +526,7 @@
               </a:defRPr>
             </a:pPr>
             <a:r>
-              <a:rPr sz="1200" b="0" i="0" u="none" strike="noStrike">
+              <a:rPr lang="fr-FR" sz="1200" b="0" i="0" u="none" strike="noStrike">
                 <a:solidFill>
                   <a:srgbClr val="0B3C5D"/>
                 </a:solidFill>
@@ -547,7 +537,6 @@
           </a:p>
         </c:rich>
       </c:tx>
-      <c:layout/>
       <c:overlay val="0"/>
     </c:title>
     <c:autoTitleDeleted val="0"/>
@@ -571,9 +560,6 @@
             </c:strRef>
           </c:tx>
           <c:spPr>
-            <a:solidFill>
-              <a:srgbClr val="1D6F9E"/>
-            </a:solidFill>
             <a:ln>
               <a:noFill/>
             </a:ln>
@@ -660,74 +646,64 @@
                 <c:formatCode>General</c:formatCode>
                 <c:ptCount val="16"/>
                 <c:pt idx="0">
-                  <c:v>0.286</c:v>
+                  <c:v>0.28599999999999998</c:v>
                 </c:pt>
                 <c:pt idx="1">
-                  <c:v>0.284</c:v>
+                  <c:v>0.28399999999999997</c:v>
                 </c:pt>
                 <c:pt idx="2">
                   <c:v>0.308</c:v>
                 </c:pt>
                 <c:pt idx="3">
-                  <c:v>0.338</c:v>
+                  <c:v>0.33800000000000002</c:v>
                 </c:pt>
                 <c:pt idx="4">
-                  <c:v>0.267</c:v>
+                  <c:v>0.26700000000000002</c:v>
                 </c:pt>
                 <c:pt idx="5">
-                  <c:v>0.272</c:v>
+                  <c:v>0.27200000000000002</c:v>
                 </c:pt>
                 <c:pt idx="6">
-                  <c:v>0.267</c:v>
+                  <c:v>0.26700000000000002</c:v>
                 </c:pt>
                 <c:pt idx="7">
-                  <c:v>0.299</c:v>
+                  <c:v>0.29899999999999999</c:v>
                 </c:pt>
                 <c:pt idx="8">
-                  <c:v>0.268</c:v>
+                  <c:v>0.26800000000000002</c:v>
                 </c:pt>
                 <c:pt idx="9">
-                  <c:v>0.267</c:v>
+                  <c:v>0.26700000000000002</c:v>
                 </c:pt>
                 <c:pt idx="10">
-                  <c:v>0.333</c:v>
+                  <c:v>0.33300000000000002</c:v>
                 </c:pt>
                 <c:pt idx="11">
-                  <c:v>0.331</c:v>
+                  <c:v>0.33100000000000002</c:v>
                 </c:pt>
                 <c:pt idx="12">
-                  <c:v>0.291</c:v>
+                  <c:v>0.29099999999999998</c:v>
                 </c:pt>
                 <c:pt idx="13">
-                  <c:v>0.323</c:v>
+                  <c:v>0.32300000000000001</c:v>
                 </c:pt>
                 <c:pt idx="14">
-                  <c:v>0.334</c:v>
+                  <c:v>0.33400000000000002</c:v>
                 </c:pt>
                 <c:pt idx="15">
-                  <c:v>0.293</c:v>
+                  <c:v>0.29299999999999998</c:v>
                 </c:pt>
               </c:numCache>
             </c:numRef>
           </c:yVal>
           <c:smooth val="0"/>
+          <c:extLst>
+            <c:ext xmlns:c16="http://schemas.microsoft.com/office/drawing/2014/chart" uri="{C3380CC4-5D6E-409C-BE32-E72D297353CC}">
+              <c16:uniqueId val="{00000000-6B5D-DC4A-8C9B-3E9D9ADC4E0C}"/>
+            </c:ext>
+          </c:extLst>
         </c:ser>
         <c:dLbls>
-          <c:numFmt formatCode="General" sourceLinked="0"/>
-          <c:txPr>
-            <a:bodyPr/>
-            <a:lstStyle/>
-            <a:p>
-              <a:pPr>
-                <a:defRPr b="0" i="0" strike="noStrike" sz="1200" u="none">
-                  <a:solidFill>
-                    <a:srgbClr val="000000"/>
-                  </a:solidFill>
-                  <a:latin typeface="Arial"/>
-                </a:defRPr>
-              </a:pPr>
-            </a:p>
-          </c:txPr>
           <c:showLegendKey val="0"/>
           <c:showVal val="0"/>
           <c:showCatName val="0"/>
@@ -760,7 +736,7 @@
                   </a:defRPr>
                 </a:pPr>
                 <a:r>
-                  <a:rPr b="0" i="0" u="none" strike="noStrike">
+                  <a:rPr lang="fr-FR" b="0" i="0" u="none" strike="noStrike">
                     <a:solidFill>
                       <a:srgbClr val="6B6B6B"/>
                     </a:solidFill>
@@ -771,7 +747,6 @@
               </a:p>
             </c:rich>
           </c:tx>
-          <c:layout/>
           <c:overlay val="0"/>
         </c:title>
         <c:numFmt formatCode="General" sourceLinked="1"/>
@@ -804,9 +779,7 @@
         </c:txPr>
         <c:crossAx val="2094734552"/>
         <c:crosses val="autoZero"/>
-        <c:auto val="1"/>
-        <c:lblAlgn val="ctr"/>
-        <c:noMultiLvlLbl val="1"/>
+        <c:crossBetween val="midCat"/>
       </c:valAx>
       <c:valAx>
         <c:axId val="2094734552"/>
@@ -843,7 +816,7 @@
                   </a:defRPr>
                 </a:pPr>
                 <a:r>
-                  <a:rPr b="0" i="0" u="none" strike="noStrike">
+                  <a:rPr lang="fr-FR" b="0" i="0" u="none" strike="noStrike">
                     <a:solidFill>
                       <a:srgbClr val="6B6B6B"/>
                     </a:solidFill>
@@ -854,7 +827,6 @@
               </a:p>
             </c:rich>
           </c:tx>
-          <c:layout/>
           <c:overlay val="0"/>
         </c:title>
         <c:numFmt formatCode="General" sourceLinked="0"/>
@@ -915,9 +887,11 @@
 </file>
 
 <file path=ppt/charts/chart3.xml><?xml version="1.0" encoding="utf-8"?>
-<c:chartSpace xmlns:c="http://schemas.openxmlformats.org/drawingml/2006/chart" xmlns:a="http://schemas.openxmlformats.org/drawingml/2006/main" xmlns:r="http://schemas.openxmlformats.org/officeDocument/2006/relationships">
+<c:chartSpace xmlns:c="http://schemas.openxmlformats.org/drawingml/2006/chart" xmlns:a="http://schemas.openxmlformats.org/drawingml/2006/main" xmlns:r="http://schemas.openxmlformats.org/officeDocument/2006/relationships" xmlns:c16r2="http://schemas.microsoft.com/office/drawing/2015/06/chart">
   <c:date1904 val="0"/>
+  <c:lang val="fr-FR"/>
   <c:roundedCorners val="1"/>
+  <c:style val="2"/>
   <c:chart>
     <c:title>
       <c:tx>
@@ -934,7 +908,7 @@
               </a:defRPr>
             </a:pPr>
             <a:r>
-              <a:rPr sz="1200" b="0" i="0" u="none" strike="noStrike">
+              <a:rPr lang="fr-FR" sz="1200" b="0" i="0" u="none" strike="noStrike">
                 <a:solidFill>
                   <a:srgbClr val="0B3C5D"/>
                 </a:solidFill>
@@ -945,7 +919,6 @@
           </a:p>
         </c:rich>
       </c:tx>
-      <c:layout/>
       <c:overlay val="0"/>
     </c:title>
     <c:autoTitleDeleted val="0"/>
@@ -976,72 +949,46 @@
             <a:effectLst/>
           </c:spPr>
           <c:invertIfNegative val="0"/>
-          <c:dLbls>
-            <c:numFmt formatCode="#,##0" sourceLinked="0"/>
-            <c:txPr>
-              <a:bodyPr/>
-              <a:lstStyle/>
-              <a:p>
-                <a:pPr>
-                  <a:defRPr b="0" i="0" strike="noStrike" sz="1200" u="none">
-                    <a:solidFill>
-                      <a:srgbClr val="000000"/>
-                    </a:solidFill>
-                    <a:latin typeface="Arial"/>
-                  </a:defRPr>
-                </a:pPr>
-              </a:p>
-            </c:txPr>
-            <c:showLegendKey val="0"/>
-            <c:showVal val="0"/>
-            <c:showCatName val="0"/>
-            <c:showSerName val="0"/>
-            <c:showPercent val="0"/>
-            <c:showBubbleSize val="0"/>
-            <c:showLeaderLines val="0"/>
-          </c:dLbls>
           <c:cat>
-            <c:multiLvlStrRef>
+            <c:strRef>
               <c:f>Sheet1!$A$2:$A$12</c:f>
-              <c:multiLvlStrCache>
+              <c:strCache>
                 <c:ptCount val="11"/>
-                <c:lvl>
-                  <c:pt idx="0">
-                    <c:v>0.20</c:v>
-                  </c:pt>
-                  <c:pt idx="1">
-                    <c:v>0.24</c:v>
-                  </c:pt>
-                  <c:pt idx="2">
-                    <c:v>0.28</c:v>
-                  </c:pt>
-                  <c:pt idx="3">
-                    <c:v>0.32</c:v>
-                  </c:pt>
-                  <c:pt idx="4">
-                    <c:v>0.36</c:v>
-                  </c:pt>
-                  <c:pt idx="5">
-                    <c:v>0.40</c:v>
-                  </c:pt>
-                  <c:pt idx="6">
-                    <c:v>0.44</c:v>
-                  </c:pt>
-                  <c:pt idx="7">
-                    <c:v>0.48</c:v>
-                  </c:pt>
-                  <c:pt idx="8">
-                    <c:v>0.52</c:v>
-                  </c:pt>
-                  <c:pt idx="9">
-                    <c:v>0.56</c:v>
-                  </c:pt>
-                  <c:pt idx="10">
-                    <c:v>0.60</c:v>
-                  </c:pt>
-                </c:lvl>
-              </c:multiLvlStrCache>
-            </c:multiLvlStrRef>
+                <c:pt idx="0">
+                  <c:v>0.20</c:v>
+                </c:pt>
+                <c:pt idx="1">
+                  <c:v>0.24</c:v>
+                </c:pt>
+                <c:pt idx="2">
+                  <c:v>0.28</c:v>
+                </c:pt>
+                <c:pt idx="3">
+                  <c:v>0.32</c:v>
+                </c:pt>
+                <c:pt idx="4">
+                  <c:v>0.36</c:v>
+                </c:pt>
+                <c:pt idx="5">
+                  <c:v>0.40</c:v>
+                </c:pt>
+                <c:pt idx="6">
+                  <c:v>0.44</c:v>
+                </c:pt>
+                <c:pt idx="7">
+                  <c:v>0.48</c:v>
+                </c:pt>
+                <c:pt idx="8">
+                  <c:v>0.52</c:v>
+                </c:pt>
+                <c:pt idx="9">
+                  <c:v>0.56</c:v>
+                </c:pt>
+                <c:pt idx="10">
+                  <c:v>0.60</c:v>
+                </c:pt>
+              </c:strCache>
+            </c:strRef>
           </c:cat>
           <c:val>
             <c:numRef>
@@ -1085,36 +1032,23 @@
               </c:numCache>
             </c:numRef>
           </c:val>
+          <c:extLst>
+            <c:ext xmlns:c16="http://schemas.microsoft.com/office/drawing/2014/chart" uri="{C3380CC4-5D6E-409C-BE32-E72D297353CC}">
+              <c16:uniqueId val="{00000000-B485-8240-8B95-8E3F24AB7F4E}"/>
+            </c:ext>
+          </c:extLst>
         </c:ser>
         <c:dLbls>
-          <c:numFmt formatCode="#,##0" sourceLinked="0"/>
-          <c:txPr>
-            <a:bodyPr/>
-            <a:lstStyle/>
-            <a:p>
-              <a:pPr>
-                <a:defRPr b="0" i="0" strike="noStrike" sz="1200" u="none">
-                  <a:solidFill>
-                    <a:srgbClr val="000000"/>
-                  </a:solidFill>
-                  <a:latin typeface="Arial"/>
-                </a:defRPr>
-              </a:pPr>
-            </a:p>
-          </c:txPr>
           <c:showLegendKey val="0"/>
           <c:showVal val="0"/>
           <c:showCatName val="0"/>
           <c:showSerName val="0"/>
           <c:showPercent val="0"/>
           <c:showBubbleSize val="0"/>
-          <c:showLeaderLines val="0"/>
         </c:dLbls>
         <c:gapWidth val="10"/>
-        <c:overlap val="0"/>
         <c:axId val="2094734554"/>
         <c:axId val="2094734552"/>
-        <c:axId val="2094734556"/>
       </c:barChart>
       <c:catAx>
         <c:axId val="2094734554"/>
@@ -1138,7 +1072,7 @@
                   </a:defRPr>
                 </a:pPr>
                 <a:r>
-                  <a:rPr b="0" i="0" u="none" strike="noStrike">
+                  <a:rPr lang="fr-FR" b="0" i="0" u="none" strike="noStrike">
                     <a:solidFill>
                       <a:srgbClr val="6B6B6B"/>
                     </a:solidFill>
@@ -1149,7 +1083,6 @@
               </a:p>
             </c:rich>
           </c:tx>
-          <c:layout/>
           <c:overlay val="0"/>
         </c:title>
         <c:numFmt formatCode="General" sourceLinked="1"/>
@@ -1184,6 +1117,7 @@
         <c:crosses val="autoZero"/>
         <c:auto val="1"/>
         <c:lblAlgn val="ctr"/>
+        <c:lblOffset val="100"/>
         <c:noMultiLvlLbl val="1"/>
       </c:catAx>
       <c:valAx>
@@ -1219,7 +1153,7 @@
                   </a:defRPr>
                 </a:pPr>
                 <a:r>
-                  <a:rPr b="0" i="0" u="none" strike="noStrike">
+                  <a:rPr lang="fr-FR" b="0" i="0" u="none" strike="noStrike">
                     <a:solidFill>
                       <a:srgbClr val="6B6B6B"/>
                     </a:solidFill>
@@ -1230,7 +1164,6 @@
               </a:p>
             </c:rich>
           </c:tx>
-          <c:layout/>
           <c:overlay val="0"/>
         </c:title>
         <c:numFmt formatCode="General" sourceLinked="0"/>
@@ -1275,6 +1208,7 @@
     </c:plotArea>
     <c:plotVisOnly val="1"/>
     <c:dispBlanksAs val="span"/>
+    <c:showDLblsOverMax val="1"/>
   </c:chart>
   <c:spPr>
     <a:noFill/>
@@ -1290,9 +1224,18 @@
 </file>
 
 <file path=ppt/charts/chart4.xml><?xml version="1.0" encoding="utf-8"?>
-<c:chartSpace xmlns:c="http://schemas.openxmlformats.org/drawingml/2006/chart" xmlns:a="http://schemas.openxmlformats.org/drawingml/2006/main" xmlns:r="http://schemas.openxmlformats.org/officeDocument/2006/relationships">
+<c:chartSpace xmlns:c="http://schemas.openxmlformats.org/drawingml/2006/chart" xmlns:a="http://schemas.openxmlformats.org/drawingml/2006/main" xmlns:r="http://schemas.openxmlformats.org/officeDocument/2006/relationships" xmlns:c16r2="http://schemas.microsoft.com/office/drawing/2015/06/chart">
   <c:date1904 val="0"/>
+  <c:lang val="fr-FR"/>
   <c:roundedCorners val="1"/>
+  <mc:AlternateContent xmlns:mc="http://schemas.openxmlformats.org/markup-compatibility/2006">
+    <mc:Choice xmlns:c14="http://schemas.microsoft.com/office/drawing/2007/8/2/chart" Requires="c14">
+      <c14:style val="102"/>
+    </mc:Choice>
+    <mc:Fallback>
+      <c:style val="2"/>
+    </mc:Fallback>
+  </mc:AlternateContent>
   <c:chart>
     <c:title>
       <c:tx>
@@ -1309,7 +1252,344 @@
               </a:defRPr>
             </a:pPr>
             <a:r>
-              <a:rPr sz="1200" b="0" i="0" u="none" strike="noStrike">
+              <a:rPr lang="fr-FR" sz="1200" b="0" i="0" u="none" strike="noStrike">
+                <a:solidFill>
+                  <a:srgbClr val="0B3C5D"/>
+                </a:solidFill>
+                <a:latin typeface="Arial"/>
+              </a:rPr>
+              <a:t>Null distribution of FRic for one site (illustrative)</a:t>
+            </a:r>
+          </a:p>
+        </c:rich>
+      </c:tx>
+      <c:overlay val="0"/>
+    </c:title>
+    <c:autoTitleDeleted val="0"/>
+    <c:plotArea>
+      <c:layout/>
+      <c:barChart>
+        <c:barDir val="col"/>
+        <c:grouping val="clustered"/>
+        <c:varyColors val="0"/>
+        <c:ser>
+          <c:idx val="0"/>
+          <c:order val="0"/>
+          <c:tx>
+            <c:strRef>
+              <c:f>Sheet1!$B$1</c:f>
+              <c:strCache>
+                <c:ptCount val="1"/>
+                <c:pt idx="0">
+                  <c:v>null values (199 permutations)</c:v>
+                </c:pt>
+              </c:strCache>
+            </c:strRef>
+          </c:tx>
+          <c:spPr>
+            <a:solidFill>
+              <a:srgbClr val="B8C4CE"/>
+            </a:solidFill>
+            <a:effectLst/>
+          </c:spPr>
+          <c:invertIfNegative val="0"/>
+          <c:cat>
+            <c:strRef>
+              <c:f>Sheet1!$A$2:$A$12</c:f>
+              <c:strCache>
+                <c:ptCount val="11"/>
+                <c:pt idx="0">
+                  <c:v>0.20</c:v>
+                </c:pt>
+                <c:pt idx="1">
+                  <c:v>0.24</c:v>
+                </c:pt>
+                <c:pt idx="2">
+                  <c:v>0.28</c:v>
+                </c:pt>
+                <c:pt idx="3">
+                  <c:v>0.32</c:v>
+                </c:pt>
+                <c:pt idx="4">
+                  <c:v>0.36</c:v>
+                </c:pt>
+                <c:pt idx="5">
+                  <c:v>0.40</c:v>
+                </c:pt>
+                <c:pt idx="6">
+                  <c:v>0.44</c:v>
+                </c:pt>
+                <c:pt idx="7">
+                  <c:v>0.48</c:v>
+                </c:pt>
+                <c:pt idx="8">
+                  <c:v>0.52</c:v>
+                </c:pt>
+                <c:pt idx="9">
+                  <c:v>0.56</c:v>
+                </c:pt>
+                <c:pt idx="10">
+                  <c:v>0.60</c:v>
+                </c:pt>
+              </c:strCache>
+            </c:strRef>
+          </c:cat>
+          <c:val>
+            <c:numRef>
+              <c:f>Sheet1!$B$2:$B$12</c:f>
+              <c:numCache>
+                <c:formatCode>General</c:formatCode>
+                <c:ptCount val="11"/>
+                <c:pt idx="0">
+                  <c:v>1</c:v>
+                </c:pt>
+                <c:pt idx="1">
+                  <c:v>4</c:v>
+                </c:pt>
+                <c:pt idx="2">
+                  <c:v>12</c:v>
+                </c:pt>
+                <c:pt idx="3">
+                  <c:v>28</c:v>
+                </c:pt>
+                <c:pt idx="4">
+                  <c:v>45</c:v>
+                </c:pt>
+                <c:pt idx="5">
+                  <c:v>50</c:v>
+                </c:pt>
+                <c:pt idx="6">
+                  <c:v>32</c:v>
+                </c:pt>
+                <c:pt idx="7">
+                  <c:v>16</c:v>
+                </c:pt>
+                <c:pt idx="8">
+                  <c:v>7</c:v>
+                </c:pt>
+                <c:pt idx="9">
+                  <c:v>3</c:v>
+                </c:pt>
+                <c:pt idx="10">
+                  <c:v>1</c:v>
+                </c:pt>
+              </c:numCache>
+            </c:numRef>
+          </c:val>
+          <c:extLst>
+            <c:ext xmlns:c16="http://schemas.microsoft.com/office/drawing/2014/chart" uri="{C3380CC4-5D6E-409C-BE32-E72D297353CC}">
+              <c16:uniqueId val="{00000000-D10D-3E4F-9D8B-051933DC313E}"/>
+            </c:ext>
+          </c:extLst>
+        </c:ser>
+        <c:dLbls>
+          <c:showLegendKey val="0"/>
+          <c:showVal val="0"/>
+          <c:showCatName val="0"/>
+          <c:showSerName val="0"/>
+          <c:showPercent val="0"/>
+          <c:showBubbleSize val="0"/>
+        </c:dLbls>
+        <c:gapWidth val="10"/>
+        <c:axId val="2094734554"/>
+        <c:axId val="2094734552"/>
+      </c:barChart>
+      <c:catAx>
+        <c:axId val="2094734554"/>
+        <c:scaling>
+          <c:orientation val="minMax"/>
+        </c:scaling>
+        <c:delete val="0"/>
+        <c:axPos val="b"/>
+        <c:title>
+          <c:tx>
+            <c:rich>
+              <a:bodyPr/>
+              <a:lstStyle/>
+              <a:p>
+                <a:pPr>
+                  <a:defRPr b="0" i="0" u="none" strike="noStrike">
+                    <a:solidFill>
+                      <a:srgbClr val="6B6B6B"/>
+                    </a:solidFill>
+                    <a:latin typeface="Arial"/>
+                  </a:defRPr>
+                </a:pPr>
+                <a:r>
+                  <a:rPr lang="fr-FR" b="0" i="0" u="none" strike="noStrike">
+                    <a:solidFill>
+                      <a:srgbClr val="6B6B6B"/>
+                    </a:solidFill>
+                    <a:latin typeface="Arial"/>
+                  </a:rPr>
+                  <a:t>FRic under the null model</a:t>
+                </a:r>
+              </a:p>
+            </c:rich>
+          </c:tx>
+          <c:overlay val="0"/>
+        </c:title>
+        <c:numFmt formatCode="General" sourceLinked="1"/>
+        <c:majorTickMark val="out"/>
+        <c:minorTickMark val="none"/>
+        <c:tickLblPos val="low"/>
+        <c:spPr>
+          <a:ln w="12700" cap="flat">
+            <a:solidFill>
+              <a:srgbClr val="888888"/>
+            </a:solidFill>
+            <a:prstDash val="solid"/>
+            <a:round/>
+          </a:ln>
+        </c:spPr>
+        <c:txPr>
+          <a:bodyPr/>
+          <a:lstStyle/>
+          <a:p>
+            <a:pPr>
+              <a:defRPr sz="1000" b="0" i="0" u="none" strike="noStrike">
+                <a:solidFill>
+                  <a:srgbClr val="6B6B6B"/>
+                </a:solidFill>
+                <a:latin typeface="Arial"/>
+              </a:defRPr>
+            </a:pPr>
+            <a:endParaRPr lang="en-US"/>
+          </a:p>
+        </c:txPr>
+        <c:crossAx val="2094734552"/>
+        <c:crosses val="autoZero"/>
+        <c:auto val="1"/>
+        <c:lblAlgn val="ctr"/>
+        <c:lblOffset val="100"/>
+        <c:noMultiLvlLbl val="1"/>
+      </c:catAx>
+      <c:valAx>
+        <c:axId val="2094734552"/>
+        <c:scaling>
+          <c:orientation val="minMax"/>
+        </c:scaling>
+        <c:delete val="0"/>
+        <c:axPos val="l"/>
+        <c:majorGridlines>
+          <c:spPr>
+            <a:ln w="6350" cap="flat">
+              <a:solidFill>
+                <a:srgbClr val="E5E7EB"/>
+              </a:solidFill>
+              <a:prstDash val="solid"/>
+              <a:round/>
+            </a:ln>
+          </c:spPr>
+        </c:majorGridlines>
+        <c:title>
+          <c:tx>
+            <c:rich>
+              <a:bodyPr/>
+              <a:lstStyle/>
+              <a:p>
+                <a:pPr>
+                  <a:defRPr b="0" i="0" u="none" strike="noStrike">
+                    <a:solidFill>
+                      <a:srgbClr val="6B6B6B"/>
+                    </a:solidFill>
+                    <a:latin typeface="Arial"/>
+                  </a:defRPr>
+                </a:pPr>
+                <a:r>
+                  <a:rPr lang="fr-FR" b="0" i="0" u="none" strike="noStrike">
+                    <a:solidFill>
+                      <a:srgbClr val="6B6B6B"/>
+                    </a:solidFill>
+                    <a:latin typeface="Arial"/>
+                  </a:rPr>
+                  <a:t>Count</a:t>
+                </a:r>
+              </a:p>
+            </c:rich>
+          </c:tx>
+          <c:overlay val="0"/>
+        </c:title>
+        <c:numFmt formatCode="General" sourceLinked="0"/>
+        <c:majorTickMark val="out"/>
+        <c:minorTickMark val="none"/>
+        <c:tickLblPos val="nextTo"/>
+        <c:spPr>
+          <a:ln w="12700" cap="flat">
+            <a:solidFill>
+              <a:srgbClr val="888888"/>
+            </a:solidFill>
+            <a:prstDash val="solid"/>
+            <a:round/>
+          </a:ln>
+        </c:spPr>
+        <c:txPr>
+          <a:bodyPr/>
+          <a:lstStyle/>
+          <a:p>
+            <a:pPr>
+              <a:defRPr sz="1000" b="0" i="0" u="none" strike="noStrike">
+                <a:solidFill>
+                  <a:srgbClr val="6B6B6B"/>
+                </a:solidFill>
+                <a:latin typeface="Arial"/>
+              </a:defRPr>
+            </a:pPr>
+            <a:endParaRPr lang="en-US"/>
+          </a:p>
+        </c:txPr>
+        <c:crossAx val="2094734554"/>
+        <c:crosses val="autoZero"/>
+        <c:crossBetween val="between"/>
+      </c:valAx>
+      <c:spPr>
+        <a:noFill/>
+        <a:ln>
+          <a:noFill/>
+        </a:ln>
+        <a:effectLst/>
+      </c:spPr>
+    </c:plotArea>
+    <c:plotVisOnly val="1"/>
+    <c:dispBlanksAs val="span"/>
+    <c:showDLblsOverMax val="1"/>
+  </c:chart>
+  <c:spPr>
+    <a:noFill/>
+    <a:ln>
+      <a:noFill/>
+    </a:ln>
+    <a:effectLst/>
+  </c:spPr>
+  <c:externalData r:id="rId1">
+    <c:autoUpdate val="0"/>
+  </c:externalData>
+</c:chartSpace>
+</file>
+
+<file path=ppt/charts/chart5.xml><?xml version="1.0" encoding="utf-8"?>
+<c:chartSpace xmlns:c="http://schemas.openxmlformats.org/drawingml/2006/chart" xmlns:a="http://schemas.openxmlformats.org/drawingml/2006/main" xmlns:r="http://schemas.openxmlformats.org/officeDocument/2006/relationships" xmlns:c16r2="http://schemas.microsoft.com/office/drawing/2015/06/chart">
+  <c:date1904 val="0"/>
+  <c:lang val="fr-FR"/>
+  <c:roundedCorners val="1"/>
+  <c:style val="2"/>
+  <c:chart>
+    <c:title>
+      <c:tx>
+        <c:rich>
+          <a:bodyPr/>
+          <a:lstStyle/>
+          <a:p>
+            <a:pPr>
+              <a:defRPr sz="1200" b="0" i="0" u="none" strike="noStrike">
+                <a:solidFill>
+                  <a:srgbClr val="0B3C5D"/>
+                </a:solidFill>
+                <a:latin typeface="Arial"/>
+              </a:defRPr>
+            </a:pPr>
+            <a:r>
+              <a:rPr lang="fr-FR" sz="1200" b="0" i="0" u="none" strike="noStrike">
                 <a:solidFill>
                   <a:srgbClr val="0B3C5D"/>
                 </a:solidFill>
@@ -1320,13 +1600,13 @@
           </a:p>
         </c:rich>
       </c:tx>
-      <c:layout/>
       <c:overlay val="0"/>
     </c:title>
     <c:autoTitleDeleted val="0"/>
     <c:plotArea>
       <c:layout/>
       <c:lineChart>
+        <c:grouping val="standard"/>
         <c:varyColors val="0"/>
         <c:ser>
           <c:idx val="0"/>
@@ -1343,9 +1623,6 @@
             </c:strRef>
           </c:tx>
           <c:spPr>
-            <a:solidFill>
-              <a:srgbClr val="8A9BA8"/>
-            </a:solidFill>
             <a:ln w="31750" cap="flat">
               <a:solidFill>
                 <a:srgbClr val="8A9BA8"/>
@@ -1355,90 +1632,49 @@
             </a:ln>
             <a:effectLst/>
           </c:spPr>
-          <c:invertIfNegative val="0"/>
-          <c:dLbls>
-            <c:numFmt formatCode="#,##0" sourceLinked="0"/>
-            <c:txPr>
-              <a:bodyPr/>
-              <a:lstStyle/>
-              <a:p>
-                <a:pPr>
-                  <a:defRPr b="0" i="0" strike="noStrike" sz="1200" u="none">
-                    <a:solidFill>
-                      <a:srgbClr val="000000"/>
-                    </a:solidFill>
-                    <a:latin typeface="Arial"/>
-                  </a:defRPr>
-                </a:pPr>
-              </a:p>
-            </c:txPr>
-            <c:showLegendKey val="0"/>
-            <c:showVal val="0"/>
-            <c:showCatName val="0"/>
-            <c:showSerName val="0"/>
-            <c:showPercent val="0"/>
-            <c:showBubbleSize val="0"/>
-            <c:showLeaderLines val="0"/>
-          </c:dLbls>
           <c:marker>
             <c:symbol val="none"/>
-            <c:size val="6"/>
-            <c:spPr>
-              <a:solidFill>
-                <a:srgbClr val="8A9BA8"/>
-              </a:solidFill>
-              <a:ln w="9525" cap="flat">
-                <a:solidFill>
-                  <a:srgbClr val="8A9BA8"/>
-                </a:solidFill>
-                <a:prstDash val="solid"/>
-                <a:round/>
-              </a:ln>
-              <a:effectLst/>
-            </c:spPr>
           </c:marker>
           <c:cat>
-            <c:multiLvlStrRef>
+            <c:strRef>
               <c:f>Sheet1!$A$2:$A$12</c:f>
-              <c:multiLvlStrCache>
+              <c:strCache>
                 <c:ptCount val="11"/>
-                <c:lvl>
-                  <c:pt idx="0">
-                    <c:v>0</c:v>
-                  </c:pt>
-                  <c:pt idx="1">
-                    <c:v>10</c:v>
-                  </c:pt>
-                  <c:pt idx="2">
-                    <c:v>20</c:v>
-                  </c:pt>
-                  <c:pt idx="3">
-                    <c:v>30</c:v>
-                  </c:pt>
-                  <c:pt idx="4">
-                    <c:v>40</c:v>
-                  </c:pt>
-                  <c:pt idx="5">
-                    <c:v>50</c:v>
-                  </c:pt>
-                  <c:pt idx="6">
-                    <c:v>60</c:v>
-                  </c:pt>
-                  <c:pt idx="7">
-                    <c:v>70</c:v>
-                  </c:pt>
-                  <c:pt idx="8">
-                    <c:v>80</c:v>
-                  </c:pt>
-                  <c:pt idx="9">
-                    <c:v>90</c:v>
-                  </c:pt>
-                  <c:pt idx="10">
-                    <c:v>100</c:v>
-                  </c:pt>
-                </c:lvl>
-              </c:multiLvlStrCache>
-            </c:multiLvlStrRef>
+                <c:pt idx="0">
+                  <c:v>0</c:v>
+                </c:pt>
+                <c:pt idx="1">
+                  <c:v>10</c:v>
+                </c:pt>
+                <c:pt idx="2">
+                  <c:v>20</c:v>
+                </c:pt>
+                <c:pt idx="3">
+                  <c:v>30</c:v>
+                </c:pt>
+                <c:pt idx="4">
+                  <c:v>40</c:v>
+                </c:pt>
+                <c:pt idx="5">
+                  <c:v>50</c:v>
+                </c:pt>
+                <c:pt idx="6">
+                  <c:v>60</c:v>
+                </c:pt>
+                <c:pt idx="7">
+                  <c:v>70</c:v>
+                </c:pt>
+                <c:pt idx="8">
+                  <c:v>80</c:v>
+                </c:pt>
+                <c:pt idx="9">
+                  <c:v>90</c:v>
+                </c:pt>
+                <c:pt idx="10">
+                  <c:v>100</c:v>
+                </c:pt>
+              </c:strCache>
+            </c:strRef>
           </c:cat>
           <c:val>
             <c:numRef>
@@ -1483,6 +1719,11 @@
             </c:numRef>
           </c:val>
           <c:smooth val="0"/>
+          <c:extLst>
+            <c:ext xmlns:c16="http://schemas.microsoft.com/office/drawing/2014/chart" uri="{C3380CC4-5D6E-409C-BE32-E72D297353CC}">
+              <c16:uniqueId val="{00000000-6A78-E741-81F9-E956C8E26F18}"/>
+            </c:ext>
+          </c:extLst>
         </c:ser>
         <c:ser>
           <c:idx val="1"/>
@@ -1499,9 +1740,6 @@
             </c:strRef>
           </c:tx>
           <c:spPr>
-            <a:solidFill>
-              <a:srgbClr val="B23A48"/>
-            </a:solidFill>
             <a:ln w="31750" cap="flat">
               <a:solidFill>
                 <a:srgbClr val="B23A48"/>
@@ -1511,90 +1749,49 @@
             </a:ln>
             <a:effectLst/>
           </c:spPr>
-          <c:invertIfNegative val="0"/>
-          <c:dLbls>
-            <c:numFmt formatCode="#,##0" sourceLinked="0"/>
-            <c:txPr>
-              <a:bodyPr/>
-              <a:lstStyle/>
-              <a:p>
-                <a:pPr>
-                  <a:defRPr b="0" i="0" strike="noStrike" sz="1200" u="none">
-                    <a:solidFill>
-                      <a:srgbClr val="000000"/>
-                    </a:solidFill>
-                    <a:latin typeface="Arial"/>
-                  </a:defRPr>
-                </a:pPr>
-              </a:p>
-            </c:txPr>
-            <c:showLegendKey val="0"/>
-            <c:showVal val="0"/>
-            <c:showCatName val="0"/>
-            <c:showSerName val="0"/>
-            <c:showPercent val="0"/>
-            <c:showBubbleSize val="0"/>
-            <c:showLeaderLines val="0"/>
-          </c:dLbls>
           <c:marker>
             <c:symbol val="none"/>
-            <c:size val="6"/>
-            <c:spPr>
-              <a:solidFill>
-                <a:srgbClr val="B23A48"/>
-              </a:solidFill>
-              <a:ln w="9525" cap="flat">
-                <a:solidFill>
-                  <a:srgbClr val="B23A48"/>
-                </a:solidFill>
-                <a:prstDash val="solid"/>
-                <a:round/>
-              </a:ln>
-              <a:effectLst/>
-            </c:spPr>
           </c:marker>
           <c:cat>
-            <c:multiLvlStrRef>
+            <c:strRef>
               <c:f>Sheet1!$A$2:$A$12</c:f>
-              <c:multiLvlStrCache>
+              <c:strCache>
                 <c:ptCount val="11"/>
-                <c:lvl>
-                  <c:pt idx="0">
-                    <c:v>0</c:v>
-                  </c:pt>
-                  <c:pt idx="1">
-                    <c:v>10</c:v>
-                  </c:pt>
-                  <c:pt idx="2">
-                    <c:v>20</c:v>
-                  </c:pt>
-                  <c:pt idx="3">
-                    <c:v>30</c:v>
-                  </c:pt>
-                  <c:pt idx="4">
-                    <c:v>40</c:v>
-                  </c:pt>
-                  <c:pt idx="5">
-                    <c:v>50</c:v>
-                  </c:pt>
-                  <c:pt idx="6">
-                    <c:v>60</c:v>
-                  </c:pt>
-                  <c:pt idx="7">
-                    <c:v>70</c:v>
-                  </c:pt>
-                  <c:pt idx="8">
-                    <c:v>80</c:v>
-                  </c:pt>
-                  <c:pt idx="9">
-                    <c:v>90</c:v>
-                  </c:pt>
-                  <c:pt idx="10">
-                    <c:v>100</c:v>
-                  </c:pt>
-                </c:lvl>
-              </c:multiLvlStrCache>
-            </c:multiLvlStrRef>
+                <c:pt idx="0">
+                  <c:v>0</c:v>
+                </c:pt>
+                <c:pt idx="1">
+                  <c:v>10</c:v>
+                </c:pt>
+                <c:pt idx="2">
+                  <c:v>20</c:v>
+                </c:pt>
+                <c:pt idx="3">
+                  <c:v>30</c:v>
+                </c:pt>
+                <c:pt idx="4">
+                  <c:v>40</c:v>
+                </c:pt>
+                <c:pt idx="5">
+                  <c:v>50</c:v>
+                </c:pt>
+                <c:pt idx="6">
+                  <c:v>60</c:v>
+                </c:pt>
+                <c:pt idx="7">
+                  <c:v>70</c:v>
+                </c:pt>
+                <c:pt idx="8">
+                  <c:v>80</c:v>
+                </c:pt>
+                <c:pt idx="9">
+                  <c:v>90</c:v>
+                </c:pt>
+                <c:pt idx="10">
+                  <c:v>100</c:v>
+                </c:pt>
+              </c:strCache>
+            </c:strRef>
           </c:cat>
           <c:val>
             <c:numRef>
@@ -1627,7 +1824,7 @@
                   <c:v>0.36</c:v>
                 </c:pt>
                 <c:pt idx="8">
-                  <c:v>0.28</c:v>
+                  <c:v>0.28000000000000003</c:v>
                 </c:pt>
                 <c:pt idx="9">
                   <c:v>0.17</c:v>
@@ -1639,6 +1836,11 @@
             </c:numRef>
           </c:val>
           <c:smooth val="0"/>
+          <c:extLst>
+            <c:ext xmlns:c16="http://schemas.microsoft.com/office/drawing/2014/chart" uri="{C3380CC4-5D6E-409C-BE32-E72D297353CC}">
+              <c16:uniqueId val="{00000001-6A78-E741-81F9-E956C8E26F18}"/>
+            </c:ext>
+          </c:extLst>
         </c:ser>
         <c:ser>
           <c:idx val="2"/>
@@ -1655,9 +1857,6 @@
             </c:strRef>
           </c:tx>
           <c:spPr>
-            <a:solidFill>
-              <a:srgbClr val="D9822B"/>
-            </a:solidFill>
             <a:ln w="31750" cap="flat">
               <a:solidFill>
                 <a:srgbClr val="D9822B"/>
@@ -1667,90 +1866,49 @@
             </a:ln>
             <a:effectLst/>
           </c:spPr>
-          <c:invertIfNegative val="0"/>
-          <c:dLbls>
-            <c:numFmt formatCode="#,##0" sourceLinked="0"/>
-            <c:txPr>
-              <a:bodyPr/>
-              <a:lstStyle/>
-              <a:p>
-                <a:pPr>
-                  <a:defRPr b="0" i="0" strike="noStrike" sz="1200" u="none">
-                    <a:solidFill>
-                      <a:srgbClr val="000000"/>
-                    </a:solidFill>
-                    <a:latin typeface="Arial"/>
-                  </a:defRPr>
-                </a:pPr>
-              </a:p>
-            </c:txPr>
-            <c:showLegendKey val="0"/>
-            <c:showVal val="0"/>
-            <c:showCatName val="0"/>
-            <c:showSerName val="0"/>
-            <c:showPercent val="0"/>
-            <c:showBubbleSize val="0"/>
-            <c:showLeaderLines val="0"/>
-          </c:dLbls>
           <c:marker>
             <c:symbol val="none"/>
-            <c:size val="6"/>
-            <c:spPr>
-              <a:solidFill>
-                <a:srgbClr val="D9822B"/>
-              </a:solidFill>
-              <a:ln w="9525" cap="flat">
-                <a:solidFill>
-                  <a:srgbClr val="D9822B"/>
-                </a:solidFill>
-                <a:prstDash val="solid"/>
-                <a:round/>
-              </a:ln>
-              <a:effectLst/>
-            </c:spPr>
           </c:marker>
           <c:cat>
-            <c:multiLvlStrRef>
+            <c:strRef>
               <c:f>Sheet1!$A$2:$A$12</c:f>
-              <c:multiLvlStrCache>
+              <c:strCache>
                 <c:ptCount val="11"/>
-                <c:lvl>
-                  <c:pt idx="0">
-                    <c:v>0</c:v>
-                  </c:pt>
-                  <c:pt idx="1">
-                    <c:v>10</c:v>
-                  </c:pt>
-                  <c:pt idx="2">
-                    <c:v>20</c:v>
-                  </c:pt>
-                  <c:pt idx="3">
-                    <c:v>30</c:v>
-                  </c:pt>
-                  <c:pt idx="4">
-                    <c:v>40</c:v>
-                  </c:pt>
-                  <c:pt idx="5">
-                    <c:v>50</c:v>
-                  </c:pt>
-                  <c:pt idx="6">
-                    <c:v>60</c:v>
-                  </c:pt>
-                  <c:pt idx="7">
-                    <c:v>70</c:v>
-                  </c:pt>
-                  <c:pt idx="8">
-                    <c:v>80</c:v>
-                  </c:pt>
-                  <c:pt idx="9">
-                    <c:v>90</c:v>
-                  </c:pt>
-                  <c:pt idx="10">
-                    <c:v>100</c:v>
-                  </c:pt>
-                </c:lvl>
-              </c:multiLvlStrCache>
-            </c:multiLvlStrRef>
+                <c:pt idx="0">
+                  <c:v>0</c:v>
+                </c:pt>
+                <c:pt idx="1">
+                  <c:v>10</c:v>
+                </c:pt>
+                <c:pt idx="2">
+                  <c:v>20</c:v>
+                </c:pt>
+                <c:pt idx="3">
+                  <c:v>30</c:v>
+                </c:pt>
+                <c:pt idx="4">
+                  <c:v>40</c:v>
+                </c:pt>
+                <c:pt idx="5">
+                  <c:v>50</c:v>
+                </c:pt>
+                <c:pt idx="6">
+                  <c:v>60</c:v>
+                </c:pt>
+                <c:pt idx="7">
+                  <c:v>70</c:v>
+                </c:pt>
+                <c:pt idx="8">
+                  <c:v>80</c:v>
+                </c:pt>
+                <c:pt idx="9">
+                  <c:v>90</c:v>
+                </c:pt>
+                <c:pt idx="10">
+                  <c:v>100</c:v>
+                </c:pt>
+              </c:strCache>
+            </c:strRef>
           </c:cat>
           <c:val>
             <c:numRef>
@@ -1795,35 +1953,23 @@
             </c:numRef>
           </c:val>
           <c:smooth val="0"/>
+          <c:extLst>
+            <c:ext xmlns:c16="http://schemas.microsoft.com/office/drawing/2014/chart" uri="{C3380CC4-5D6E-409C-BE32-E72D297353CC}">
+              <c16:uniqueId val="{00000002-6A78-E741-81F9-E956C8E26F18}"/>
+            </c:ext>
+          </c:extLst>
         </c:ser>
         <c:dLbls>
-          <c:numFmt formatCode="#,##0" sourceLinked="0"/>
-          <c:txPr>
-            <a:bodyPr/>
-            <a:lstStyle/>
-            <a:p>
-              <a:pPr>
-                <a:defRPr b="0" i="0" strike="noStrike" sz="1200" u="none">
-                  <a:solidFill>
-                    <a:srgbClr val="000000"/>
-                  </a:solidFill>
-                  <a:latin typeface="Arial"/>
-                </a:defRPr>
-              </a:pPr>
-            </a:p>
-          </c:txPr>
           <c:showLegendKey val="0"/>
           <c:showVal val="0"/>
           <c:showCatName val="0"/>
           <c:showSerName val="0"/>
           <c:showPercent val="0"/>
           <c:showBubbleSize val="0"/>
-          <c:showLeaderLines val="0"/>
         </c:dLbls>
-        <c:marker val="1"/>
+        <c:smooth val="0"/>
         <c:axId val="2094734554"/>
         <c:axId val="2094734552"/>
-        <c:axId val="2094734556"/>
       </c:lineChart>
       <c:catAx>
         <c:axId val="2094734554"/>
@@ -1847,7 +1993,7 @@
                   </a:defRPr>
                 </a:pPr>
                 <a:r>
-                  <a:rPr b="0" i="0" u="none" strike="noStrike">
+                  <a:rPr lang="fr-FR" b="0" i="0" u="none" strike="noStrike">
                     <a:solidFill>
                       <a:srgbClr val="6B6B6B"/>
                     </a:solidFill>
@@ -1858,7 +2004,6 @@
               </a:p>
             </c:rich>
           </c:tx>
-          <c:layout/>
           <c:overlay val="0"/>
         </c:title>
         <c:numFmt formatCode="General" sourceLinked="1"/>
@@ -1893,6 +2038,7 @@
         <c:crosses val="autoZero"/>
         <c:auto val="1"/>
         <c:lblAlgn val="ctr"/>
+        <c:lblOffset val="100"/>
         <c:noMultiLvlLbl val="1"/>
       </c:catAx>
       <c:valAx>
@@ -1928,7 +2074,7 @@
                   </a:defRPr>
                 </a:pPr>
                 <a:r>
-                  <a:rPr b="0" i="0" u="none" strike="noStrike">
+                  <a:rPr lang="fr-FR" b="0" i="0" u="none" strike="noStrike">
                     <a:solidFill>
                       <a:srgbClr val="6B6B6B"/>
                     </a:solidFill>
@@ -1939,7 +2085,6 @@
               </a:p>
             </c:rich>
           </c:tx>
-          <c:layout/>
           <c:overlay val="0"/>
         </c:title>
         <c:numFmt formatCode="General" sourceLinked="0"/>
@@ -1990,7 +2135,7 @@
         <a:lstStyle/>
         <a:p>
           <a:pPr>
-            <a:defRPr sz="1000">      </a:defRPr>
+            <a:defRPr sz="1000"/>
           </a:pPr>
           <a:endParaRPr lang="en-US"/>
         </a:p>
@@ -1998,6 +2143,7 @@
     </c:legend>
     <c:plotVisOnly val="1"/>
     <c:dispBlanksAs val="span"/>
+    <c:showDLblsOverMax val="1"/>
   </c:chart>
   <c:spPr>
     <a:noFill/>
@@ -2034,234 +2180,10 @@
           <a:chExt cx="0" cy="0"/>
         </a:xfrm>
       </p:grpSpPr>
-      <p:sp>
-        <p:nvSpPr>
-          <p:cNvPr id="2" name="Header Placeholder 1"/>
-          <p:cNvSpPr>
-            <a:spLocks noGrp="1"/>
-          </p:cNvSpPr>
-          <p:nvPr>
-            <p:ph type="hdr" sz="quarter"/>
-          </p:nvPr>
-        </p:nvSpPr>
-        <p:spPr>
-          <a:xfrm>
-            <a:off x="0" y="0"/>
-            <a:ext cx="2971800" cy="458788"/>
-          </a:xfrm>
-          <a:prstGeom prst="rect">
-            <a:avLst/>
-          </a:prstGeom>
-        </p:spPr>
-        <p:txBody>
-          <a:bodyPr vert="horz" lIns="91440" tIns="45720" rIns="91440" bIns="45720" rtlCol="0"/>
-          <a:lstStyle>
-            <a:lvl1pPr algn="l">
-              <a:defRPr sz="1200"/>
-            </a:lvl1pPr>
-          </a:lstStyle>
-          <a:p>
-            <a:endParaRPr lang="en-US"/>
-          </a:p>
-        </p:txBody>
-      </p:sp>
-      <p:sp>
-        <p:nvSpPr>
-          <p:cNvPr id="3" name="Date Placeholder 2"/>
-          <p:cNvSpPr>
-            <a:spLocks noGrp="1"/>
-          </p:cNvSpPr>
-          <p:nvPr>
-            <p:ph type="dt" idx="1"/>
-          </p:nvPr>
-        </p:nvSpPr>
-        <p:spPr>
-          <a:xfrm>
-            <a:off x="3884613" y="0"/>
-            <a:ext cx="2971800" cy="458788"/>
-          </a:xfrm>
-          <a:prstGeom prst="rect">
-            <a:avLst/>
-          </a:prstGeom>
-        </p:spPr>
-        <p:txBody>
-          <a:bodyPr vert="horz" lIns="91440" tIns="45720" rIns="91440" bIns="45720" rtlCol="0"/>
-          <a:lstStyle>
-            <a:lvl1pPr algn="r">
-              <a:defRPr sz="1200"/>
-            </a:lvl1pPr>
-          </a:lstStyle>
-          <a:p>
-            <a:fld id="{5282F153-3F37-0F45-9E97-73ACFA13230C}" type="datetimeFigureOut">
-              <a:rPr lang="en-US"/>
-              <a:t>7/23/19</a:t>
-            </a:fld>
-            <a:endParaRPr lang="en-US"/>
-          </a:p>
-        </p:txBody>
-      </p:sp>
-      <p:sp>
-        <p:nvSpPr>
-          <p:cNvPr id="4" name="Slide Image Placeholder 3"/>
-          <p:cNvSpPr>
-            <a:spLocks noGrp="1" noRot="1" noChangeAspect="1"/>
-          </p:cNvSpPr>
-          <p:nvPr>
-            <p:ph type="sldImg" idx="2"/>
-          </p:nvPr>
-        </p:nvSpPr>
-        <p:spPr>
-          <a:xfrm>
-            <a:off x="685800" y="1143000"/>
-            <a:ext cx="5486400" cy="3086100"/>
-          </a:xfrm>
-          <a:prstGeom prst="rect">
-            <a:avLst/>
-          </a:prstGeom>
-          <a:noFill/>
-          <a:ln w="12700">
-            <a:solidFill>
-              <a:prstClr val="black"/>
-            </a:solidFill>
-          </a:ln>
-        </p:spPr>
-        <p:txBody>
-          <a:bodyPr vert="horz" lIns="91440" tIns="45720" rIns="91440" bIns="45720" rtlCol="0" anchor="ctr"/>
-          <a:lstStyle/>
-          <a:p>
-            <a:endParaRPr lang="en-US"/>
-          </a:p>
-        </p:txBody>
-      </p:sp>
-      <p:sp>
-        <p:nvSpPr>
-          <p:cNvPr id="5" name="Notes Placeholder 4"/>
-          <p:cNvSpPr>
-            <a:spLocks noGrp="1"/>
-          </p:cNvSpPr>
-          <p:nvPr>
-            <p:ph type="body" sz="quarter" idx="3"/>
-          </p:nvPr>
-        </p:nvSpPr>
-        <p:spPr>
-          <a:xfrm>
-            <a:off x="685800" y="4400550"/>
-            <a:ext cx="5486400" cy="3600450"/>
-          </a:xfrm>
-          <a:prstGeom prst="rect">
-            <a:avLst/>
-          </a:prstGeom>
-        </p:spPr>
-        <p:txBody>
-          <a:bodyPr vert="horz" lIns="91440" tIns="45720" rIns="91440" bIns="45720" rtlCol="0"/>
-          <a:lstStyle/>
-          <a:p>
-            <a:pPr lvl="0"/>
-            <a:r>
-              <a:rPr lang="en-US"/>
-              <a:t>Click to edit Master text styles</a:t>
-            </a:r>
-          </a:p>
-          <a:p>
-            <a:pPr lvl="1"/>
-            <a:r>
-              <a:rPr lang="en-US"/>
-              <a:t>Second level</a:t>
-            </a:r>
-          </a:p>
-          <a:p>
-            <a:pPr lvl="2"/>
-            <a:r>
-              <a:rPr lang="en-US"/>
-              <a:t>Third level</a:t>
-            </a:r>
-          </a:p>
-          <a:p>
-            <a:pPr lvl="3"/>
-            <a:r>
-              <a:rPr lang="en-US"/>
-              <a:t>Fourth level</a:t>
-            </a:r>
-          </a:p>
-          <a:p>
-            <a:pPr lvl="4"/>
-            <a:r>
-              <a:rPr lang="en-US"/>
-              <a:t>Fifth level</a:t>
-            </a:r>
-          </a:p>
-        </p:txBody>
-      </p:sp>
-      <p:sp>
-        <p:nvSpPr>
-          <p:cNvPr id="6" name="Footer Placeholder 5"/>
-          <p:cNvSpPr>
-            <a:spLocks noGrp="1"/>
-          </p:cNvSpPr>
-          <p:nvPr>
-            <p:ph type="ftr" sz="quarter" idx="4"/>
-          </p:nvPr>
-        </p:nvSpPr>
-        <p:spPr>
-          <a:xfrm>
-            <a:off x="0" y="8685213"/>
-            <a:ext cx="2971800" cy="458787"/>
-          </a:xfrm>
-          <a:prstGeom prst="rect">
-            <a:avLst/>
-          </a:prstGeom>
-        </p:spPr>
-        <p:txBody>
-          <a:bodyPr vert="horz" lIns="91440" tIns="45720" rIns="91440" bIns="45720" rtlCol="0" anchor="b"/>
-          <a:lstStyle>
-            <a:lvl1pPr algn="l">
-              <a:defRPr sz="1200"/>
-            </a:lvl1pPr>
-          </a:lstStyle>
-          <a:p>
-            <a:endParaRPr lang="en-US"/>
-          </a:p>
-        </p:txBody>
-      </p:sp>
-      <p:sp>
-        <p:nvSpPr>
-          <p:cNvPr id="7" name="Slide Number Placeholder 6"/>
-          <p:cNvSpPr>
-            <a:spLocks noGrp="1"/>
-          </p:cNvSpPr>
-          <p:nvPr>
-            <p:ph type="sldNum" sz="quarter" idx="5"/>
-          </p:nvPr>
-        </p:nvSpPr>
-        <p:spPr>
-          <a:xfrm>
-            <a:off x="3884613" y="8685213"/>
-            <a:ext cx="2971800" cy="458787"/>
-          </a:xfrm>
-          <a:prstGeom prst="rect">
-            <a:avLst/>
-          </a:prstGeom>
-        </p:spPr>
-        <p:txBody>
-          <a:bodyPr vert="horz" lIns="91440" tIns="45720" rIns="91440" bIns="45720" rtlCol="0" anchor="b"/>
-          <a:lstStyle>
-            <a:lvl1pPr algn="r">
-              <a:defRPr sz="1200"/>
-            </a:lvl1pPr>
-          </a:lstStyle>
-          <a:p>
-            <a:fld id="{CE5E9CC1-C706-0F49-92D6-E571CC5EEA8F}" type="slidenum">
-              <a:rPr lang="en-US"/>
-              <a:t>‹#›</a:t>
-            </a:fld>
-            <a:endParaRPr lang="en-US"/>
-          </a:p>
-        </p:txBody>
-      </p:sp>
     </p:spTree>
     <p:extLst>
       <p:ext uri="{BB962C8B-B14F-4D97-AF65-F5344CB8AC3E}">
-        <p14:creationId xmlns:p14="http://schemas.microsoft.com/office/powerpoint/2010/main" val="1024086991"/>
+        <p14:creationId xmlns:p14="http://schemas.microsoft.com/office/powerpoint/2010/main" val="3625438864"/>
       </p:ext>
     </p:extLst>
   </p:cSld>
@@ -2405,10 +2327,6 @@
           <a:bodyPr/>
           <a:lstStyle/>
           <a:p>
-            <a:r>
-              <a:rPr lang="en-US" dirty="0"/>
-              <a:t/>
-            </a:r>
             <a:endParaRPr lang="en-US" dirty="0"/>
           </a:p>
         </p:txBody>
@@ -2493,12 +2411,6 @@
           <a:bodyPr/>
           <a:lstStyle/>
           <a:p>
-            <a:r>
-              <a:rPr lang="en-US" dirty="0"/>
-              <a:t>We now turn to the question that motivates my own research and, I hope, part of yours: what happens to the functional structure when species disappear?
-The starting point is a result by David Mouillot and colleagues in 2013, for three very different systems — coral reef fishes, tropical trees, alpine plants. They grouped species into functional entities — unique combinations of trait categories — and asked which entities are supported by rare species only. The answer was striking: a large fraction of the functional entities, and in particular the most distinct ones, are represented by one or a few rare species. In other words, functional redundancy is concentrated in the centre of the space, among the common generalists, and the periphery — the unusual functions — is held by rare species that are exactly those most likely to be lost.
-The consequence is that species loss is not functionally neutral: losing a random species usually removes little functional diversity, but losing the rare, unique species removes a lot. Which brings us back to the two rivers of slide 2, and to the question of what our threatened species actually contribute.</a:t>
-            </a:r>
             <a:endParaRPr lang="en-US" dirty="0"/>
           </a:p>
         </p:txBody>
@@ -2583,11 +2495,6 @@
           <a:bodyPr/>
           <a:lstStyle/>
           <a:p>
-            <a:r>
-              <a:rPr lang="en-US" dirty="0"/>
-              <a:t>To make this operational, Pimiento and colleagues proposed in 2020 the FUSE metric: Functionally Unique, Specialised and Endangered. For each species you combine functional uniqueness — the distance to the nearest neighbour we saw in Block 1 — functional specialisation — the distance to the centre of the space — and the extinction risk from the IUCN Red List category, converted into a probability. Species that score high on all three are those whose loss would remove a unique function and is likely to happen. In their marine megafauna example, the top FUSE species were things like the green sea turtle, the giant manta, the whale shark and the dugong: large, unusual, threatened.
-The logic is a prioritisation logic: with limited conservation resources, which species protect the most functional diversity per unit of effort? It is directly transferable to freshwater fishes, and it is one of the analyses I would like you to be able to run after this course: you already have all the ingredients.</a:t>
-            </a:r>
             <a:endParaRPr lang="en-US" dirty="0"/>
           </a:p>
         </p:txBody>
@@ -2672,13 +2579,6 @@
           <a:bodyPr/>
           <a:lstStyle/>
           <a:p>
-            <a:r>
-              <a:rPr lang="en-US" dirty="0"/>
-              <a:t>The most direct way to ask "what will we lose?" is to simulate it. You take a community, you remove species one at a time according to a scenario — at random, or in order of extinction risk, or of rarity — and you recompute the functional indices after each removal. You obtain an extinction curve, and you compare the scenario of interest with the random scenario: if removing the threatened species first erodes FRic faster than removing species at random, the threatened species are functionally non-redundant.
-We did this at the global scale for vertebrates in 2021, in Nature Communications, with Carlos Carmona, Meelis Pärtel and colleagues. The result was idiosyncratic — that is the word in the title. For some groups and regions, the loss of threatened species would remove a disproportionate share of functional diversity, because the threatened species are the large, specialised ones at the edge of the space; in other regions, functional diversity would barely change, because the threatened species have functional equivalents among the non-threatened ones. And, importantly, the response differed among facets — richness, dispersion, uniqueness — which is one more reason not to summarise "functional diversity" by a single number. For freshwater fishes, the large-bodied migratory species — the giant catfishes of the Mekong and the Amazon, the sturgeons — are precisely those at the periphery of the space and at the top of the threat categories.
---- INSTRUCTOR NOTE ---
-Second interactive moment: ask the room to predict, for the fish of their own region, whether the "most threatened first" curve would drop faster than the random curve, and why. 2–3 minutes.</a:t>
-            </a:r>
             <a:endParaRPr lang="en-US" dirty="0"/>
           </a:p>
         </p:txBody>
@@ -2763,11 +2663,6 @@
           <a:bodyPr/>
           <a:lstStyle/>
           <a:p>
-            <a:r>
-              <a:rPr lang="en-US" dirty="0"/>
-              <a:t>Let me close the block by walking the road map once more, with the decisions attached to each step, because this is what you will have to do on Thursday and in your own projects.
-You choose traits from the question and justify each one. You standardise, choose a distance, build a space, choose and report a number of axes, and check its quality. You place communities in it and choose the indices from the question: CWM for the dominant strategy; FRic for the range; FDis or Rao for the spread. You build a null model that keeps what you do not want to test and randomises what you do; you compute SES and check that it is free of the richness confound. You interpret a departure from randomness as consistent with a process, not as proof of it, and you test the sensitivity of the conclusion to the choices above. And, if the question is about conservation, you ask which species hold the unique functions and what happens to the space when they are gone.</a:t>
-            </a:r>
             <a:endParaRPr lang="en-US" dirty="0"/>
           </a:p>
         </p:txBody>
@@ -2790,94 +2685,6 @@
             <a:fld id="{F7021451-1387-4CA6-816F-3879F97B5CBC}" type="slidenum">
               <a:rPr lang="en-US"/>
               <a:t>13</a:t>
-            </a:fld>
-            <a:endParaRPr lang="en-US"/>
-          </a:p>
-        </p:txBody>
-      </p:sp>
-    </p:spTree>
-    <p:extLst>
-      <p:ext uri="{BB962C8B-B14F-4D97-AF65-F5344CB8AC3E}">
-        <p14:creationId xmlns:p14="http://schemas.microsoft.com/office/powerpoint/2010/main" val="1024086991"/>
-      </p:ext>
-    </p:extLst>
-  </p:cSld>
-  <p:clrMapOvr>
-    <a:masterClrMapping/>
-  </p:clrMapOvr>
-</p:notes>
-</file>
-
-<file path=ppt/notesSlides/notesSlide14.xml><?xml version="1.0" encoding="utf-8"?>
-<p:notes xmlns:a="http://schemas.openxmlformats.org/drawingml/2006/main" xmlns:r="http://schemas.openxmlformats.org/officeDocument/2006/relationships" xmlns:p="http://schemas.openxmlformats.org/presentationml/2006/main">
-  <p:cSld>
-    <p:spTree>
-      <p:nvGrpSpPr>
-        <p:cNvPr id="1" name=""/>
-        <p:cNvGrpSpPr/>
-        <p:nvPr/>
-      </p:nvGrpSpPr>
-      <p:grpSpPr>
-        <a:xfrm>
-          <a:off x="0" y="0"/>
-          <a:ext cx="0" cy="0"/>
-          <a:chOff x="0" y="0"/>
-          <a:chExt cx="0" cy="0"/>
-        </a:xfrm>
-      </p:grpSpPr>
-      <p:sp>
-        <p:nvSpPr>
-          <p:cNvPr id="2" name="Slide Image Placeholder 1"/>
-          <p:cNvSpPr>
-            <a:spLocks noGrp="1" noRot="1" noChangeAspect="1"/>
-          </p:cNvSpPr>
-          <p:nvPr>
-            <p:ph type="sldImg"/>
-          </p:nvPr>
-        </p:nvSpPr>
-        <p:spPr/>
-      </p:sp>
-      <p:sp>
-        <p:nvSpPr>
-          <p:cNvPr id="3" name="Notes Placeholder 2"/>
-          <p:cNvSpPr>
-            <a:spLocks noGrp="1"/>
-          </p:cNvSpPr>
-          <p:nvPr>
-            <p:ph type="body" idx="1"/>
-          </p:nvPr>
-        </p:nvSpPr>
-        <p:spPr/>
-        <p:txBody>
-          <a:bodyPr/>
-          <a:lstStyle/>
-          <a:p>
-            <a:r>
-              <a:rPr lang="en-US" dirty="0"/>
-              <a:t>In short: an observed index has no meaning without an expectation; the null model provides it by randomising the link between species and traits while keeping richness and abundances; the SES tells you how far the observation is from that expectation, free of the richness confound; clustering and overdispersion are consistent with filtering and limiting similarity, respectively, but the mechanism must be argued. And, finally, functional diversity is held disproportionately by rare and threatened species, which is why measuring it — and simulating its loss — matters for conservation.</a:t>
-            </a:r>
-            <a:endParaRPr lang="en-US" dirty="0"/>
-          </a:p>
-        </p:txBody>
-      </p:sp>
-      <p:sp>
-        <p:nvSpPr>
-          <p:cNvPr id="4" name="Slide Number Placeholder 3"/>
-          <p:cNvSpPr>
-            <a:spLocks noGrp="1"/>
-          </p:cNvSpPr>
-          <p:nvPr>
-            <p:ph type="sldNum" sz="quarter" idx="10"/>
-          </p:nvPr>
-        </p:nvSpPr>
-        <p:spPr/>
-        <p:txBody>
-          <a:bodyPr/>
-          <a:lstStyle/>
-          <a:p>
-            <a:fld id="{F7021451-1387-4CA6-816F-3879F97B5CBC}" type="slidenum">
-              <a:rPr lang="en-US"/>
-              <a:t>14</a:t>
             </a:fld>
             <a:endParaRPr lang="en-US"/>
           </a:p>
@@ -2940,12 +2747,6 @@
           <a:bodyPr/>
           <a:lstStyle/>
           <a:p>
-            <a:r>
-              <a:rPr lang="en-US" dirty="0"/>
-              <a:t>Welcome back. We now have a functional space in which every species is a point. The second step is to place communities in it. A community, for us, is a row of a sites-by-species matrix — for each river basin, the abundance or presence of each species — and, combined with the species coordinates, it becomes a cloud of points, possibly weighted by abundance. I will summarise this cloud with two kinds of numbers, and I will be brief because the exercise sheets and the background notes contain the details.
-The first kind describes the position of the community: its abundance-weighted centre of gravity. On a single trait this is the community-weighted mean, CWM, the sum over species of relative abundance times trait value. It answers "what is the dominant strategy here?" and rests on Grime's mass-ratio hypothesis: ecosystem processes are driven mainly by the traits of the dominant species. CWM body length shifting along a temperature gradient — a Bergmann-like pattern that Group B will test — is the classic fish example.
-The second kind describes the dispersion of the community: how much of the space it fills, how regularly, how far from its centre. That is what people call functional diversity, and it captures the other mechanism of the biodiversity–functioning debate: complementarity, the idea that species differing in traits use resources differently. Two communities can have the same CWM body length and be completely different — one with all species around twenty centimetres, one mixing five-centimetre and sixty-centimetre species — and only dispersion indices see it.</a:t>
-            </a:r>
             <a:endParaRPr lang="en-US" dirty="0"/>
           </a:p>
         </p:txBody>
@@ -3030,13 +2831,6 @@
           <a:bodyPr/>
           <a:lstStyle/>
           <a:p>
-            <a:r>
-              <a:rPr lang="en-US" dirty="0"/>
-              <a:t>Here is the whole family in one table, and I want you to remember the logic rather than the formulas.
-Functional richness, FRic, is the volume of the convex hull of the species present, usually divided by the volume of the whole pool so that it lies between zero and one. It ignores abundances, it is extremely sensitive to extreme species — one unusual species can double the volume — and it increases mechanically with species richness. Functional evenness, FEve, is the regularity with which abundance is distributed along the minimum spanning tree linking the species; functional divergence, FDiv, the degree to which abundant species sit at the periphery rather than at the centre. These three are the components proposed by Mason and colleagues in 2005 and made multidimensional by Villéger, Mason and Mouillot in 2008.
-Functional dispersion, FDis, from Laliberté and Legendre, is the abundance-weighted mean distance of species to the community centroid; Rao's quadratic entropy is the abundance-weighted mean pairwise distance. Both summarise the spread of the community, both are nearly independent of species richness, both accept any distance matrix and need no hull — which is why FDis is the workhorse of the field.
-All of this is computed by one function, dbFD in the FD package: Gower distance, correction, PCoA, a number of axes m that you choose and whose quality you check with qual.FRic, then all indices. The one message: there is no single "functional diversity". Choose the index from the question, before looking at the results — CWM for the dominant strategy, FRic for the range, FDis or Rao for the spread — and test whether your conclusion survives a change of axes, of traits, of pool.</a:t>
-            </a:r>
             <a:endParaRPr lang="en-US" dirty="0"/>
           </a:p>
         </p:txBody>
@@ -3121,10 +2915,6 @@
           <a:bodyPr/>
           <a:lstStyle/>
           <a:p>
-            <a:r>
-              <a:rPr lang="en-US" dirty="0"/>
-              <a:t>Before we go further, one property of FRic that motivates the rest of the block. Plot FRic against species richness across basins and you obtain a steep positive relationship. This is not an ecological result: more points make a larger hull even if the points are placed at random. So when a paper says "species-rich rivers are also functionally diverse", your first reaction should be "of course they are; are they more functionally diverse than expected for their richness?" FDis, by construction, is much less affected. But for any index the question is the same: is the observed value different from what chance would produce? That is the question of null models, and it is where we go now.</a:t>
-            </a:r>
             <a:endParaRPr lang="en-US" dirty="0"/>
           </a:p>
         </p:txBody>
@@ -3209,10 +2999,6 @@
           <a:bodyPr/>
           <a:lstStyle/>
           <a:p>
-            <a:r>
-              <a:rPr lang="en-US" dirty="0"/>
-              <a:t>We now have communities described by numbers. The last step is inference: is the functional structure we observe the signature of an ecological process, or is it what we would get by drawing species at random? A community with FRic equal to 0.42 tells us nothing by itself. Only the comparison with an expectation gives it a meaning. This is the logic of null models, and it is what I would like you to master by the end of this afternoon, because it is the part that students find most abstract and it is the heart of Group C's exercise.</a:t>
-            </a:r>
             <a:endParaRPr lang="en-US" dirty="0"/>
           </a:p>
         </p:txBody>
@@ -3297,13 +3083,6 @@
           <a:bodyPr/>
           <a:lstStyle/>
           <a:p>
-            <a:r>
-              <a:rPr lang="en-US" dirty="0"/>
-              <a:t>Community ecology recognises two classes of deterministic processes that leave opposite signatures in trait space.
-Environmental filtering: the abiotic conditions of a site — temperature, oxygen, current, salinity — allow only species with a certain range of trait values to persist. The local community is then a subset of the regional pool concentrated in one region of the space: species are more similar to each other than a random draw. The functional signature is clustering: lower FRic or FDis than expected.
-Limiting similarity, the idea that goes back to MacArthur and Levins in 1967: species that are too similar compete too strongly and cannot coexist, so the community is made of species that are more different from each other than a random draw. The functional signature is overdispersion: higher FRic or FDis than expected, and more regular spacing.
-Weiher and Keddy formalised this in 1995 as the two "assembly rules", and it has been the framework of hundreds of studies. Keep in mind, though, that the mapping between pattern and process is not one-to-one — competition can also produce clustering if the best competitors share the same traits — and that a pattern indistinguishable from random does not mean that nothing is happening; it can mean that filtering and competition act on the same traits in opposite directions and cancel out. A null model detects a departure from randomness; the mechanism is an interpretation you must argue for.</a:t>
-            </a:r>
             <a:endParaRPr lang="en-US" dirty="0"/>
           </a:p>
         </p:txBody>
@@ -3388,12 +3167,6 @@
           <a:bodyPr/>
           <a:lstStyle/>
           <a:p>
-            <a:r>
-              <a:rPr lang="en-US" dirty="0"/>
-              <a:t>A null model is a procedure that generates communities under a hypothesis of no process, while keeping everything that we do not want to test. The design choice is which properties to keep.
-The model you will use on Thursday is the simplest and one of the most common: you keep the community matrix exactly as it is — same sites, same species richness, same abundances — and you shuffle the rows of the trait table, so that each species receives the traits of another species drawn at random from the pool. This breaks the link between species identity and traits while preserving richness and the abundance structure. It tests the hypothesis that "the traits of the species present are a random sample of the traits of the pool". Nine hundred and ninety-nine iterations are standard; one hundred and ninety-nine are enough for a practical.
-There are other models. The independent-swap algorithm shuffles the presence matrix while keeping the row sums — richness per site — and the column sums — frequency of each species — fixed; it tests a different hypothesis and is more conservative when some species are very common. Whichever you choose, the null model must be described in one sentence in the methods, because the result depends on it.</a:t>
-            </a:r>
             <a:endParaRPr lang="en-US" dirty="0"/>
           </a:p>
         </p:txBody>
@@ -3478,13 +3251,6 @@
           <a:bodyPr/>
           <a:lstStyle/>
           <a:p>
-            <a:r>
-              <a:rPr lang="en-US" dirty="0"/>
-              <a:t>Once you have the null distribution — say one hundred and ninety-nine values of FRic for a given site — you compare the observed value to it with the standardised effect size: SES equals the observed value minus the mean of the null values, divided by their standard deviation. It is a z-score. An SES of minus two point five means that the observed FRic is two and a half standard deviations below what random assemblages produce: strong clustering. Plus two means overdispersion. The conventional thresholds of plus or minus 1.96 correspond to a two-sided test at five per cent under a normal approximation; you can also compute a proper permutation p-value as the fraction of null values as extreme as the observed one, which is what the exercise does.
-The great virtue of the SES is that it removes the richness confound: for a given site, the null values are computed with the same number of species as the observation, so the SES tells you whether the community is more or less diverse than a random community of the same richness. This is the answer to the question I have been raising since slide 23.
---- INSTRUCTOR NOTE ---
-This is the first interactive moment of Block 2. Show the histogram, ask: "The observed value is here. Is the community clustered or overdispersed?" Then: "If I had shuffled the abundances too, would the null distribution be wider or narrower?" (Wider; the SES would be smaller in absolute value.)</a:t>
-            </a:r>
             <a:endParaRPr lang="en-US" dirty="0"/>
           </a:p>
         </p:txBody>
@@ -3569,11 +3335,6 @@
           <a:bodyPr/>
           <a:lstStyle/>
           <a:p>
-            <a:r>
-              <a:rPr lang="en-US" dirty="0"/>
-              <a:t>Here is what a result looks like. Boxplots of SES-FRic for the basins of several realms. In this realm, most basins are below minus 1.96: assemblages are functionally clustered — a signature consistent with environmental filtering, or with a strong dispersal filter that only let certain lineages in. In this one, values scatter around zero: no detectable departure from randomness, which, as I said, does not mean that nothing is happening. And here, a few basins above plus 1.96: overdispersion, consistent with limiting similarity or with the coexistence of lineages of very different origin.
-Two further things to check when you read such a figure. First, is the SES itself still correlated with species richness? It should not be; if it is, your null model has not removed the confound. Second, does the pattern depend on the index? FRic is driven by extreme species; FDis by the whole distribution. Group C will compute both SES-FRic and SES-FDis and I expect the two to disagree for some basins — that disagreement is informative: it tells you whether the departure from randomness comes from a few extreme species or from the bulk of the community.</a:t>
-            </a:r>
             <a:endParaRPr lang="en-US" dirty="0"/>
           </a:p>
         </p:txBody>
@@ -3647,6 +3408,11 @@
 <file path=ppt/slideMasters/slideMaster1.xml><?xml version="1.0" encoding="utf-8"?>
 <p:sldMaster xmlns:a="http://schemas.openxmlformats.org/drawingml/2006/main" xmlns:r="http://schemas.openxmlformats.org/officeDocument/2006/relationships" xmlns:p="http://schemas.openxmlformats.org/presentationml/2006/main">
   <p:cSld>
+    <p:bg>
+      <p:bgRef idx="1001">
+        <a:schemeClr val="bg1"/>
+      </p:bgRef>
+    </p:bg>
     <p:spTree>
       <p:nvGrpSpPr>
         <p:cNvPr id="1" name=""/>
@@ -3929,6 +3695,7 @@
         <a:solidFill>
           <a:srgbClr val="0B3C5D"/>
         </a:solidFill>
+        <a:effectLst/>
       </p:bgPr>
     </p:bg>
     <p:spTree>
@@ -3966,7 +3733,7 @@
           <a:bodyPr wrap="square" lIns="0" tIns="0" rIns="0" bIns="0" rtlCol="0" anchor="b"/>
           <a:lstStyle/>
           <a:p>
-            <a:pPr indent="0" marL="0">
+            <a:pPr marL="0" indent="0">
               <a:buNone/>
             </a:pPr>
             <a:r>
@@ -4005,7 +3772,7 @@
           <a:bodyPr wrap="square" lIns="0" tIns="0" rIns="0" bIns="0" rtlCol="0" anchor="t"/>
           <a:lstStyle/>
           <a:p>
-            <a:pPr indent="0" marL="0">
+            <a:pPr marL="0" indent="0">
               <a:buNone/>
             </a:pPr>
             <a:r>
@@ -4044,7 +3811,7 @@
           <a:bodyPr wrap="square" lIns="0" tIns="0" rIns="0" bIns="0" rtlCol="0" anchor="ctr"/>
           <a:lstStyle/>
           <a:p>
-            <a:pPr indent="0" marL="0">
+            <a:pPr marL="0" indent="0">
               <a:buNone/>
             </a:pPr>
             <a:r>
@@ -4072,12 +3839,13 @@
 
 <file path=ppt/slides/slide10.xml><?xml version="1.0" encoding="utf-8"?>
 <p:sld xmlns:a="http://schemas.openxmlformats.org/drawingml/2006/main" xmlns:r="http://schemas.openxmlformats.org/officeDocument/2006/relationships" xmlns:p="http://schemas.openxmlformats.org/presentationml/2006/main">
-  <p:cSld name="Slide 10">
+  <p:cSld name="Slide 11">
     <p:bg>
       <p:bgPr>
         <a:solidFill>
           <a:srgbClr val="FFFFFF"/>
         </a:solidFill>
+        <a:effectLst/>
       </p:bgPr>
     </p:bg>
     <p:spTree>
@@ -4115,11 +3883,11 @@
           <a:bodyPr wrap="square" lIns="0" tIns="0" rIns="0" bIns="0" rtlCol="0" anchor="ctr"/>
           <a:lstStyle/>
           <a:p>
-            <a:pPr indent="0" marL="0">
+            <a:pPr marL="0" indent="0">
               <a:buNone/>
             </a:pPr>
             <a:r>
-              <a:rPr lang="en-US" sz="2600" b="1" dirty="0">
+              <a:rPr lang="en-US" sz="3000" b="1" dirty="0">
                 <a:solidFill>
                   <a:srgbClr val="0B3C5D"/>
                 </a:solidFill>
@@ -4127,9 +3895,9 @@
                 <a:ea typeface="Cambria" pitchFamily="34" charset="-122"/>
                 <a:cs typeface="Cambria" pitchFamily="34" charset="-120"/>
               </a:rPr>
-              <a:t>Functional consequences of extinctions: why rare species matter</a:t>
+              <a:t>Quantifying vulnerability: FUSE</a:t>
             </a:r>
-            <a:endParaRPr lang="en-US" sz="2600" dirty="0"/>
+            <a:endParaRPr lang="en-US" sz="3000" dirty="0"/>
           </a:p>
         </p:txBody>
       </p:sp>
@@ -4154,7 +3922,7 @@
           <a:bodyPr wrap="square" lIns="0" tIns="0" rIns="0" bIns="0" rtlCol="0" anchor="ctr"/>
           <a:lstStyle/>
           <a:p>
-            <a:pPr indent="0" marL="0">
+            <a:pPr marL="0" indent="0">
               <a:buNone/>
             </a:pPr>
             <a:r>
@@ -4193,343 +3961,7 @@
           <a:bodyPr wrap="square" lIns="0" tIns="0" rIns="0" bIns="0" rtlCol="0" anchor="ctr"/>
           <a:lstStyle/>
           <a:p>
-            <a:pPr algn="r" indent="0" marL="0">
-              <a:buNone/>
-            </a:pPr>
-            <a:r>
-              <a:rPr lang="en-US" sz="1000" dirty="0">
-                <a:solidFill>
-                  <a:srgbClr val="6B6B6B"/>
-                </a:solidFill>
-                <a:latin typeface="Calibri" pitchFamily="34" charset="0"/>
-                <a:ea typeface="Calibri" pitchFamily="34" charset="-122"/>
-                <a:cs typeface="Calibri" pitchFamily="34" charset="-120"/>
-              </a:rPr>
-              <a:t>29</a:t>
-            </a:r>
-            <a:endParaRPr lang="en-US" sz="1000" dirty="0"/>
-          </a:p>
-        </p:txBody>
-      </p:sp>
-      <p:sp>
-        <p:nvSpPr>
-          <p:cNvPr id="5" name="Shape 3"/>
-          <p:cNvSpPr/>
-          <p:nvPr/>
-        </p:nvSpPr>
-        <p:spPr>
-          <a:xfrm>
-            <a:off x="548640" y="1371600"/>
-            <a:ext cx="6035040" cy="4297680"/>
-          </a:xfrm>
-          <a:prstGeom prst="rect">
-            <a:avLst/>
-          </a:prstGeom>
-          <a:solidFill>
-            <a:srgbClr val="F3F4F6"/>
-          </a:solidFill>
-          <a:ln w="12700">
-            <a:solidFill>
-              <a:srgbClr val="BBBBBB"/>
-            </a:solidFill>
-            <a:prstDash val="dash"/>
-          </a:ln>
-        </p:spPr>
-      </p:sp>
-      <p:sp>
-        <p:nvSpPr>
-          <p:cNvPr id="6" name="Text 4"/>
-          <p:cNvSpPr txBox="1"/>
-          <p:nvPr/>
-        </p:nvSpPr>
-        <p:spPr>
-          <a:xfrm>
-            <a:off x="731520" y="1371600"/>
-            <a:ext cx="5669280" cy="4297680"/>
-          </a:xfrm>
-          <a:prstGeom prst="rect">
-            <a:avLst/>
-          </a:prstGeom>
-          <a:noFill/>
-          <a:ln/>
-        </p:spPr>
-        <p:txBody>
-          <a:bodyPr wrap="square" rtlCol="0" anchor="ctr"/>
-          <a:lstStyle/>
-          <a:p>
-            <a:pPr algn="ctr" indent="0" marL="0">
-              <a:buNone/>
-            </a:pPr>
-            <a:r>
-              <a:rPr lang="en-US" sz="1200" i="1" dirty="0">
-                <a:solidFill>
-                  <a:srgbClr val="6B6B6B"/>
-                </a:solidFill>
-                <a:latin typeface="Calibri" pitchFamily="34" charset="0"/>
-                <a:ea typeface="Calibri" pitchFamily="34" charset="-122"/>
-                <a:cs typeface="Calibri" pitchFamily="34" charset="-120"/>
-              </a:rPr>
-              <a:t>[Figure to insert]</a:t>
-            </a:r>
-            <a:endParaRPr lang="en-US" sz="1200" dirty="0"/>
-          </a:p>
-          <a:p>
-            <a:pPr algn="ctr" indent="0" marL="0">
-              <a:buNone/>
-            </a:pPr>
-            <a:r>
-              <a:rPr lang="en-US" sz="1200" i="1" dirty="0">
-                <a:solidFill>
-                  <a:srgbClr val="6B6B6B"/>
-                </a:solidFill>
-                <a:latin typeface="Calibri" pitchFamily="34" charset="0"/>
-                <a:ea typeface="Calibri" pitchFamily="34" charset="-122"/>
-                <a:cs typeface="Calibri" pitchFamily="34" charset="-120"/>
-              </a:rPr>
-              <a:t>Mouillot et al. (2013) PLoS Biology — functional entities supported by rare species only, in coral reef fishes, tropical trees and alpine plants</a:t>
-            </a:r>
-            <a:endParaRPr lang="en-US" sz="1200" dirty="0"/>
-          </a:p>
-        </p:txBody>
-      </p:sp>
-      <p:sp>
-        <p:nvSpPr>
-          <p:cNvPr id="7" name="Text 5"/>
-          <p:cNvSpPr txBox="1"/>
-          <p:nvPr/>
-        </p:nvSpPr>
-        <p:spPr>
-          <a:xfrm>
-            <a:off x="6858000" y="1371600"/>
-            <a:ext cx="4782312" cy="4480560"/>
-          </a:xfrm>
-          <a:prstGeom prst="rect">
-            <a:avLst/>
-          </a:prstGeom>
-          <a:noFill/>
-          <a:ln/>
-        </p:spPr>
-        <p:txBody>
-          <a:bodyPr wrap="square" lIns="50800" tIns="50800" rIns="50800" bIns="50800" rtlCol="0" anchor="t"/>
-          <a:lstStyle/>
-          <a:p>
-            <a:pPr marL="342900" indent="-342900">
-              <a:spcAft>
-                <a:spcPts val="600"/>
-              </a:spcAft>
-              <a:buSzPct val="100000"/>
-              <a:buChar char="•"/>
-            </a:pPr>
-            <a:r>
-              <a:rPr lang="en-US" sz="1500" dirty="0">
-                <a:solidFill>
-                  <a:srgbClr val="222222"/>
-                </a:solidFill>
-                <a:latin typeface="Calibri" pitchFamily="34" charset="0"/>
-                <a:ea typeface="Calibri" pitchFamily="34" charset="-122"/>
-                <a:cs typeface="Calibri" pitchFamily="34" charset="-120"/>
-              </a:rPr>
-              <a:t>Functional entities = unique combinations of trait categories</a:t>
-            </a:r>
-            <a:endParaRPr lang="en-US" sz="1500" dirty="0"/>
-          </a:p>
-          <a:p>
-            <a:pPr marL="342900" indent="-342900">
-              <a:spcAft>
-                <a:spcPts val="600"/>
-              </a:spcAft>
-              <a:buSzPct val="100000"/>
-              <a:buChar char="•"/>
-            </a:pPr>
-            <a:r>
-              <a:rPr lang="en-US" sz="1500" dirty="0">
-                <a:solidFill>
-                  <a:srgbClr val="222222"/>
-                </a:solidFill>
-                <a:latin typeface="Calibri" pitchFamily="34" charset="0"/>
-                <a:ea typeface="Calibri" pitchFamily="34" charset="-122"/>
-                <a:cs typeface="Calibri" pitchFamily="34" charset="-120"/>
-              </a:rPr>
-              <a:t>A large fraction of entities — especially the most distinct — are held by one or a few rare species</a:t>
-            </a:r>
-            <a:endParaRPr lang="en-US" sz="1500" dirty="0"/>
-          </a:p>
-          <a:p>
-            <a:pPr marL="342900" indent="-342900">
-              <a:spcAft>
-                <a:spcPts val="600"/>
-              </a:spcAft>
-              <a:buSzPct val="100000"/>
-              <a:buChar char="•"/>
-            </a:pPr>
-            <a:r>
-              <a:rPr lang="en-US" sz="1500" dirty="0">
-                <a:solidFill>
-                  <a:srgbClr val="222222"/>
-                </a:solidFill>
-                <a:latin typeface="Calibri" pitchFamily="34" charset="0"/>
-                <a:ea typeface="Calibri" pitchFamily="34" charset="-122"/>
-                <a:cs typeface="Calibri" pitchFamily="34" charset="-120"/>
-              </a:rPr>
-              <a:t>Redundancy sits in the generalist core; the periphery is held by rare species, those most likely to be lost</a:t>
-            </a:r>
-            <a:endParaRPr lang="en-US" sz="1500" dirty="0"/>
-          </a:p>
-          <a:p>
-            <a:pPr marL="342900" indent="-342900">
-              <a:spcAft>
-                <a:spcPts val="600"/>
-              </a:spcAft>
-              <a:buSzPct val="100000"/>
-              <a:buChar char="•"/>
-            </a:pPr>
-            <a:r>
-              <a:rPr lang="en-US" sz="1500" dirty="0">
-                <a:solidFill>
-                  <a:srgbClr val="222222"/>
-                </a:solidFill>
-                <a:latin typeface="Calibri" pitchFamily="34" charset="0"/>
-                <a:ea typeface="Calibri" pitchFamily="34" charset="-122"/>
-                <a:cs typeface="Calibri" pitchFamily="34" charset="-120"/>
-              </a:rPr>
-              <a:t>Losing a random species removes little; losing the rare, unique ones removes a lot → back to the two rivers of slide 2</a:t>
-            </a:r>
-            <a:endParaRPr lang="en-US" sz="1500" dirty="0"/>
-          </a:p>
-        </p:txBody>
-      </p:sp>
-    </p:spTree>
-  </p:cSld>
-  <p:clrMapOvr>
-    <a:masterClrMapping/>
-  </p:clrMapOvr>
-</p:sld>
-</file>
-
-<file path=ppt/slides/slide11.xml><?xml version="1.0" encoding="utf-8"?>
-<p:sld xmlns:a="http://schemas.openxmlformats.org/drawingml/2006/main" xmlns:r="http://schemas.openxmlformats.org/officeDocument/2006/relationships" xmlns:p="http://schemas.openxmlformats.org/presentationml/2006/main">
-  <p:cSld name="Slide 11">
-    <p:bg>
-      <p:bgPr>
-        <a:solidFill>
-          <a:srgbClr val="FFFFFF"/>
-        </a:solidFill>
-      </p:bgPr>
-    </p:bg>
-    <p:spTree>
-      <p:nvGrpSpPr>
-        <p:cNvPr id="1" name=""/>
-        <p:cNvGrpSpPr/>
-        <p:nvPr/>
-      </p:nvGrpSpPr>
-      <p:grpSpPr>
-        <a:xfrm>
-          <a:off x="0" y="0"/>
-          <a:ext cx="0" cy="0"/>
-          <a:chOff x="0" y="0"/>
-          <a:chExt cx="0" cy="0"/>
-        </a:xfrm>
-      </p:grpSpPr>
-      <p:sp>
-        <p:nvSpPr>
-          <p:cNvPr id="2" name="Text 0"/>
-          <p:cNvSpPr txBox="1"/>
-          <p:nvPr/>
-        </p:nvSpPr>
-        <p:spPr>
-          <a:xfrm>
-            <a:off x="548640" y="320040"/>
-            <a:ext cx="11091672" cy="822960"/>
-          </a:xfrm>
-          <a:prstGeom prst="rect">
-            <a:avLst/>
-          </a:prstGeom>
-          <a:noFill/>
-          <a:ln/>
-        </p:spPr>
-        <p:txBody>
-          <a:bodyPr wrap="square" lIns="0" tIns="0" rIns="0" bIns="0" rtlCol="0" anchor="ctr"/>
-          <a:lstStyle/>
-          <a:p>
-            <a:pPr indent="0" marL="0">
-              <a:buNone/>
-            </a:pPr>
-            <a:r>
-              <a:rPr lang="en-US" sz="3000" b="1" dirty="0">
-                <a:solidFill>
-                  <a:srgbClr val="0B3C5D"/>
-                </a:solidFill>
-                <a:latin typeface="Cambria" pitchFamily="34" charset="0"/>
-                <a:ea typeface="Cambria" pitchFamily="34" charset="-122"/>
-                <a:cs typeface="Cambria" pitchFamily="34" charset="-120"/>
-              </a:rPr>
-              <a:t>Quantifying vulnerability: FUSE</a:t>
-            </a:r>
-            <a:endParaRPr lang="en-US" sz="3000" dirty="0"/>
-          </a:p>
-        </p:txBody>
-      </p:sp>
-      <p:sp>
-        <p:nvSpPr>
-          <p:cNvPr id="3" name="Text 1"/>
-          <p:cNvSpPr txBox="1"/>
-          <p:nvPr/>
-        </p:nvSpPr>
-        <p:spPr>
-          <a:xfrm>
-            <a:off x="548640" y="6446520"/>
-            <a:ext cx="7315200" cy="274320"/>
-          </a:xfrm>
-          <a:prstGeom prst="rect">
-            <a:avLst/>
-          </a:prstGeom>
-          <a:noFill/>
-          <a:ln/>
-        </p:spPr>
-        <p:txBody>
-          <a:bodyPr wrap="square" lIns="0" tIns="0" rIns="0" bIns="0" rtlCol="0" anchor="ctr"/>
-          <a:lstStyle/>
-          <a:p>
-            <a:pPr indent="0" marL="0">
-              <a:buNone/>
-            </a:pPr>
-            <a:r>
-              <a:rPr lang="en-US" sz="1000" dirty="0">
-                <a:solidFill>
-                  <a:srgbClr val="6B6B6B"/>
-                </a:solidFill>
-                <a:latin typeface="Calibri" pitchFamily="34" charset="0"/>
-                <a:ea typeface="Calibri" pitchFamily="34" charset="-122"/>
-                <a:cs typeface="Calibri" pitchFamily="34" charset="-120"/>
-              </a:rPr>
-              <a:t>Master FBE 2026 · Session 1 · Block 2 · Communities in the space: indices, null models, extinctions</a:t>
-            </a:r>
-            <a:endParaRPr lang="en-US" sz="1000" dirty="0"/>
-          </a:p>
-        </p:txBody>
-      </p:sp>
-      <p:sp>
-        <p:nvSpPr>
-          <p:cNvPr id="4" name="Text 2"/>
-          <p:cNvSpPr txBox="1"/>
-          <p:nvPr/>
-        </p:nvSpPr>
-        <p:spPr>
-          <a:xfrm>
-            <a:off x="10725912" y="6446520"/>
-            <a:ext cx="914400" cy="274320"/>
-          </a:xfrm>
-          <a:prstGeom prst="rect">
-            <a:avLst/>
-          </a:prstGeom>
-          <a:noFill/>
-          <a:ln/>
-        </p:spPr>
-        <p:txBody>
-          <a:bodyPr wrap="square" lIns="0" tIns="0" rIns="0" bIns="0" rtlCol="0" anchor="ctr"/>
-          <a:lstStyle/>
-          <a:p>
-            <a:pPr algn="r" indent="0" marL="0">
+            <a:pPr marL="0" indent="0" algn="r">
               <a:buNone/>
             </a:pPr>
             <a:r>
@@ -4573,6 +4005,13 @@
             <a:prstDash val="solid"/>
           </a:ln>
         </p:spPr>
+        <p:txBody>
+          <a:bodyPr/>
+          <a:lstStyle/>
+          <a:p>
+            <a:endParaRPr lang="en-GB"/>
+          </a:p>
+        </p:txBody>
       </p:sp>
       <p:sp>
         <p:nvSpPr>
@@ -4595,7 +4034,7 @@
           <a:bodyPr wrap="square" lIns="0" tIns="0" rIns="0" bIns="0" rtlCol="0" anchor="ctr"/>
           <a:lstStyle/>
           <a:p>
-            <a:pPr indent="0" marL="0">
+            <a:pPr marL="0" indent="0">
               <a:buNone/>
             </a:pPr>
             <a:r>
@@ -4634,7 +4073,7 @@
           <a:bodyPr wrap="square" lIns="0" tIns="0" rIns="0" bIns="0" rtlCol="0" anchor="ctr"/>
           <a:lstStyle/>
           <a:p>
-            <a:pPr indent="0" marL="0">
+            <a:pPr marL="0" indent="0">
               <a:buNone/>
             </a:pPr>
             <a:r>
@@ -4673,7 +4112,7 @@
           <a:bodyPr wrap="square" lIns="0" tIns="0" rIns="0" bIns="0" rtlCol="0" anchor="ctr"/>
           <a:lstStyle/>
           <a:p>
-            <a:pPr indent="0" marL="0">
+            <a:pPr marL="0" indent="0">
               <a:buNone/>
             </a:pPr>
             <a:r>
@@ -4717,6 +4156,13 @@
             <a:prstDash val="solid"/>
           </a:ln>
         </p:spPr>
+        <p:txBody>
+          <a:bodyPr/>
+          <a:lstStyle/>
+          <a:p>
+            <a:endParaRPr lang="en-GB"/>
+          </a:p>
+        </p:txBody>
       </p:sp>
       <p:sp>
         <p:nvSpPr>
@@ -4739,7 +4185,7 @@
           <a:bodyPr wrap="square" lIns="0" tIns="0" rIns="0" bIns="0" rtlCol="0" anchor="ctr"/>
           <a:lstStyle/>
           <a:p>
-            <a:pPr indent="0" marL="0">
+            <a:pPr marL="0" indent="0">
               <a:buNone/>
             </a:pPr>
             <a:r>
@@ -4778,7 +4224,7 @@
           <a:bodyPr wrap="square" lIns="0" tIns="0" rIns="0" bIns="0" rtlCol="0" anchor="ctr"/>
           <a:lstStyle/>
           <a:p>
-            <a:pPr indent="0" marL="0">
+            <a:pPr marL="0" indent="0">
               <a:buNone/>
             </a:pPr>
             <a:r>
@@ -4817,7 +4263,7 @@
           <a:bodyPr wrap="square" lIns="0" tIns="0" rIns="0" bIns="0" rtlCol="0" anchor="ctr"/>
           <a:lstStyle/>
           <a:p>
-            <a:pPr indent="0" marL="0">
+            <a:pPr marL="0" indent="0">
               <a:buNone/>
             </a:pPr>
             <a:r>
@@ -4861,6 +4307,13 @@
             <a:prstDash val="solid"/>
           </a:ln>
         </p:spPr>
+        <p:txBody>
+          <a:bodyPr/>
+          <a:lstStyle/>
+          <a:p>
+            <a:endParaRPr lang="en-GB"/>
+          </a:p>
+        </p:txBody>
       </p:sp>
       <p:sp>
         <p:nvSpPr>
@@ -4883,7 +4336,7 @@
           <a:bodyPr wrap="square" lIns="0" tIns="0" rIns="0" bIns="0" rtlCol="0" anchor="ctr"/>
           <a:lstStyle/>
           <a:p>
-            <a:pPr indent="0" marL="0">
+            <a:pPr marL="0" indent="0">
               <a:buNone/>
             </a:pPr>
             <a:r>
@@ -4922,7 +4375,7 @@
           <a:bodyPr wrap="square" lIns="0" tIns="0" rIns="0" bIns="0" rtlCol="0" anchor="ctr"/>
           <a:lstStyle/>
           <a:p>
-            <a:pPr indent="0" marL="0">
+            <a:pPr marL="0" indent="0">
               <a:buNone/>
             </a:pPr>
             <a:r>
@@ -4961,7 +4414,7 @@
           <a:bodyPr wrap="square" lIns="0" tIns="0" rIns="0" bIns="0" rtlCol="0" anchor="ctr"/>
           <a:lstStyle/>
           <a:p>
-            <a:pPr indent="0" marL="0">
+            <a:pPr marL="0" indent="0">
               <a:buNone/>
             </a:pPr>
             <a:r>
@@ -5072,7 +4525,7 @@
 </p:sld>
 </file>
 
-<file path=ppt/slides/slide12.xml><?xml version="1.0" encoding="utf-8"?>
+<file path=ppt/slides/slide11.xml><?xml version="1.0" encoding="utf-8"?>
 <p:sld xmlns:a="http://schemas.openxmlformats.org/drawingml/2006/main" xmlns:r="http://schemas.openxmlformats.org/officeDocument/2006/relationships" xmlns:p="http://schemas.openxmlformats.org/presentationml/2006/main">
   <p:cSld name="Slide 12">
     <p:bg>
@@ -5080,6 +4533,7 @@
         <a:solidFill>
           <a:srgbClr val="FFFFFF"/>
         </a:solidFill>
+        <a:effectLst/>
       </p:bgPr>
     </p:bg>
     <p:spTree>
@@ -5117,7 +4571,7 @@
           <a:bodyPr wrap="square" lIns="0" tIns="0" rIns="0" bIns="0" rtlCol="0" anchor="ctr"/>
           <a:lstStyle/>
           <a:p>
-            <a:pPr indent="0" marL="0">
+            <a:pPr marL="0" indent="0">
               <a:buNone/>
             </a:pPr>
             <a:r>
@@ -5156,7 +4610,7 @@
           <a:bodyPr wrap="square" lIns="0" tIns="0" rIns="0" bIns="0" rtlCol="0" anchor="ctr"/>
           <a:lstStyle/>
           <a:p>
-            <a:pPr indent="0" marL="0">
+            <a:pPr marL="0" indent="0">
               <a:buNone/>
             </a:pPr>
             <a:r>
@@ -5195,7 +4649,7 @@
           <a:bodyPr wrap="square" lIns="0" tIns="0" rIns="0" bIns="0" rtlCol="0" anchor="ctr"/>
           <a:lstStyle/>
           <a:p>
-            <a:pPr algn="r" indent="0" marL="0">
+            <a:pPr marL="0" indent="0" algn="r">
               <a:buNone/>
             </a:pPr>
             <a:r>
@@ -5215,7 +4669,7 @@
       </p:sp>
       <p:graphicFrame>
         <p:nvGraphicFramePr>
-          <p:cNvPr id="5" name="Chart 0" descr=""/>
+          <p:cNvPr id="5" name="Chart 0"/>
           <p:cNvGraphicFramePr/>
           <p:nvPr/>
         </p:nvGraphicFramePr>
@@ -5223,9 +4677,9 @@
           <a:off x="548640" y="1371600"/>
           <a:ext cx="6035040" cy="4297680"/>
         </p:xfrm>
-        <a:graphic xmlns:a="http://schemas.openxmlformats.org/drawingml/2006/main">
+        <a:graphic>
           <a:graphicData uri="http://schemas.openxmlformats.org/drawingml/2006/chart">
-            <c:chart xmlns:c="http://schemas.openxmlformats.org/drawingml/2006/chart" r:id="rId1"/>
+            <c:chart xmlns:c="http://schemas.openxmlformats.org/drawingml/2006/chart" xmlns:r="http://schemas.openxmlformats.org/officeDocument/2006/relationships" r:id="rId3"/>
           </a:graphicData>
         </a:graphic>
       </p:graphicFrame>
@@ -5343,7 +4797,7 @@
 </p:sld>
 </file>
 
-<file path=ppt/slides/slide13.xml><?xml version="1.0" encoding="utf-8"?>
+<file path=ppt/slides/slide12.xml><?xml version="1.0" encoding="utf-8"?>
 <p:sld xmlns:a="http://schemas.openxmlformats.org/drawingml/2006/main" xmlns:r="http://schemas.openxmlformats.org/officeDocument/2006/relationships" xmlns:p="http://schemas.openxmlformats.org/presentationml/2006/main">
   <p:cSld name="Slide 13">
     <p:bg>
@@ -5351,6 +4805,7 @@
         <a:solidFill>
           <a:srgbClr val="FFFFFF"/>
         </a:solidFill>
+        <a:effectLst/>
       </p:bgPr>
     </p:bg>
     <p:spTree>
@@ -5388,7 +4843,7 @@
           <a:bodyPr wrap="square" lIns="0" tIns="0" rIns="0" bIns="0" rtlCol="0" anchor="ctr"/>
           <a:lstStyle/>
           <a:p>
-            <a:pPr indent="0" marL="0">
+            <a:pPr marL="0" indent="0">
               <a:buNone/>
             </a:pPr>
             <a:r>
@@ -5427,7 +4882,7 @@
           <a:bodyPr wrap="square" lIns="0" tIns="0" rIns="0" bIns="0" rtlCol="0" anchor="ctr"/>
           <a:lstStyle/>
           <a:p>
-            <a:pPr indent="0" marL="0">
+            <a:pPr marL="0" indent="0">
               <a:buNone/>
             </a:pPr>
             <a:r>
@@ -5466,7 +4921,7 @@
           <a:bodyPr wrap="square" lIns="0" tIns="0" rIns="0" bIns="0" rtlCol="0" anchor="ctr"/>
           <a:lstStyle/>
           <a:p>
-            <a:pPr algn="r" indent="0" marL="0">
+            <a:pPr marL="0" indent="0" algn="r">
               <a:buNone/>
             </a:pPr>
             <a:r>
@@ -5510,6 +4965,13 @@
             <a:prstDash val="solid"/>
           </a:ln>
         </p:spPr>
+        <p:txBody>
+          <a:bodyPr/>
+          <a:lstStyle/>
+          <a:p>
+            <a:endParaRPr lang="en-GB"/>
+          </a:p>
+        </p:txBody>
       </p:sp>
       <p:sp>
         <p:nvSpPr>
@@ -5532,7 +4994,7 @@
           <a:bodyPr wrap="square" lIns="25400" tIns="25400" rIns="25400" bIns="25400" rtlCol="0" anchor="ctr"/>
           <a:lstStyle/>
           <a:p>
-            <a:pPr algn="ctr" indent="0" marL="0">
+            <a:pPr marL="0" indent="0" algn="ctr">
               <a:buNone/>
             </a:pPr>
             <a:r>
@@ -5574,6 +5036,13 @@
             <a:prstDash val="solid"/>
           </a:ln>
         </p:spPr>
+        <p:txBody>
+          <a:bodyPr/>
+          <a:lstStyle/>
+          <a:p>
+            <a:endParaRPr lang="en-GB"/>
+          </a:p>
+        </p:txBody>
       </p:sp>
       <p:sp>
         <p:nvSpPr>
@@ -5601,6 +5070,13 @@
             <a:prstDash val="solid"/>
           </a:ln>
         </p:spPr>
+        <p:txBody>
+          <a:bodyPr/>
+          <a:lstStyle/>
+          <a:p>
+            <a:endParaRPr lang="en-GB"/>
+          </a:p>
+        </p:txBody>
       </p:sp>
       <p:sp>
         <p:nvSpPr>
@@ -5623,7 +5099,7 @@
           <a:bodyPr wrap="square" lIns="25400" tIns="25400" rIns="25400" bIns="25400" rtlCol="0" anchor="ctr"/>
           <a:lstStyle/>
           <a:p>
-            <a:pPr algn="ctr" indent="0" marL="0">
+            <a:pPr marL="0" indent="0" algn="ctr">
               <a:buNone/>
             </a:pPr>
             <a:r>
@@ -5665,6 +5141,13 @@
             <a:prstDash val="solid"/>
           </a:ln>
         </p:spPr>
+        <p:txBody>
+          <a:bodyPr/>
+          <a:lstStyle/>
+          <a:p>
+            <a:endParaRPr lang="en-GB"/>
+          </a:p>
+        </p:txBody>
       </p:sp>
       <p:sp>
         <p:nvSpPr>
@@ -5692,6 +5175,13 @@
             <a:prstDash val="solid"/>
           </a:ln>
         </p:spPr>
+        <p:txBody>
+          <a:bodyPr/>
+          <a:lstStyle/>
+          <a:p>
+            <a:endParaRPr lang="en-GB"/>
+          </a:p>
+        </p:txBody>
       </p:sp>
       <p:sp>
         <p:nvSpPr>
@@ -5714,7 +5204,7 @@
           <a:bodyPr wrap="square" lIns="25400" tIns="25400" rIns="25400" bIns="25400" rtlCol="0" anchor="ctr"/>
           <a:lstStyle/>
           <a:p>
-            <a:pPr algn="ctr" indent="0" marL="0">
+            <a:pPr marL="0" indent="0" algn="ctr">
               <a:buNone/>
             </a:pPr>
             <a:r>
@@ -5731,7 +5221,7 @@
             <a:endParaRPr lang="en-US" sz="1300" dirty="0"/>
           </a:p>
           <a:p>
-            <a:pPr algn="ctr" indent="0" marL="0">
+            <a:pPr marL="0" indent="0" algn="ctr">
               <a:buNone/>
             </a:pPr>
             <a:r>
@@ -5773,6 +5263,13 @@
             <a:prstDash val="solid"/>
           </a:ln>
         </p:spPr>
+        <p:txBody>
+          <a:bodyPr/>
+          <a:lstStyle/>
+          <a:p>
+            <a:endParaRPr lang="en-GB"/>
+          </a:p>
+        </p:txBody>
       </p:sp>
       <p:sp>
         <p:nvSpPr>
@@ -5800,6 +5297,13 @@
             <a:prstDash val="solid"/>
           </a:ln>
         </p:spPr>
+        <p:txBody>
+          <a:bodyPr/>
+          <a:lstStyle/>
+          <a:p>
+            <a:endParaRPr lang="en-GB"/>
+          </a:p>
+        </p:txBody>
       </p:sp>
       <p:sp>
         <p:nvSpPr>
@@ -5822,7 +5326,7 @@
           <a:bodyPr wrap="square" lIns="25400" tIns="25400" rIns="25400" bIns="25400" rtlCol="0" anchor="ctr"/>
           <a:lstStyle/>
           <a:p>
-            <a:pPr algn="ctr" indent="0" marL="0">
+            <a:pPr marL="0" indent="0" algn="ctr">
               <a:buNone/>
             </a:pPr>
             <a:r>
@@ -5839,7 +5343,7 @@
             <a:endParaRPr lang="en-US" sz="1300" dirty="0"/>
           </a:p>
           <a:p>
-            <a:pPr algn="ctr" indent="0" marL="0">
+            <a:pPr marL="0" indent="0" algn="ctr">
               <a:buNone/>
             </a:pPr>
             <a:r>
@@ -5883,6 +5387,13 @@
             <a:prstDash val="solid"/>
           </a:ln>
         </p:spPr>
+        <p:txBody>
+          <a:bodyPr/>
+          <a:lstStyle/>
+          <a:p>
+            <a:endParaRPr lang="en-GB"/>
+          </a:p>
+        </p:txBody>
       </p:sp>
       <p:sp>
         <p:nvSpPr>
@@ -5905,7 +5416,7 @@
           <a:bodyPr wrap="square" lIns="0" tIns="0" rIns="0" bIns="0" rtlCol="0" anchor="t"/>
           <a:lstStyle/>
           <a:p>
-            <a:pPr indent="0" marL="0">
+            <a:pPr marL="0" indent="0">
               <a:buNone/>
             </a:pPr>
             <a:r>
@@ -5949,6 +5460,13 @@
             <a:prstDash val="solid"/>
           </a:ln>
         </p:spPr>
+        <p:txBody>
+          <a:bodyPr/>
+          <a:lstStyle/>
+          <a:p>
+            <a:endParaRPr lang="en-GB"/>
+          </a:p>
+        </p:txBody>
       </p:sp>
       <p:sp>
         <p:nvSpPr>
@@ -5971,7 +5489,7 @@
           <a:bodyPr wrap="square" lIns="0" tIns="0" rIns="0" bIns="0" rtlCol="0" anchor="t"/>
           <a:lstStyle/>
           <a:p>
-            <a:pPr indent="0" marL="0">
+            <a:pPr marL="0" indent="0">
               <a:buNone/>
             </a:pPr>
             <a:r>
@@ -6015,6 +5533,13 @@
             <a:prstDash val="solid"/>
           </a:ln>
         </p:spPr>
+        <p:txBody>
+          <a:bodyPr/>
+          <a:lstStyle/>
+          <a:p>
+            <a:endParaRPr lang="en-GB"/>
+          </a:p>
+        </p:txBody>
       </p:sp>
       <p:sp>
         <p:nvSpPr>
@@ -6037,7 +5562,7 @@
           <a:bodyPr wrap="square" lIns="0" tIns="0" rIns="0" bIns="0" rtlCol="0" anchor="t"/>
           <a:lstStyle/>
           <a:p>
-            <a:pPr indent="0" marL="0">
+            <a:pPr marL="0" indent="0">
               <a:buNone/>
             </a:pPr>
             <a:r>
@@ -6081,6 +5606,13 @@
             <a:prstDash val="solid"/>
           </a:ln>
         </p:spPr>
+        <p:txBody>
+          <a:bodyPr/>
+          <a:lstStyle/>
+          <a:p>
+            <a:endParaRPr lang="en-GB"/>
+          </a:p>
+        </p:txBody>
       </p:sp>
       <p:sp>
         <p:nvSpPr>
@@ -6103,7 +5635,7 @@
           <a:bodyPr wrap="square" lIns="0" tIns="0" rIns="0" bIns="0" rtlCol="0" anchor="t"/>
           <a:lstStyle/>
           <a:p>
-            <a:pPr indent="0" marL="0">
+            <a:pPr marL="0" indent="0">
               <a:buNone/>
             </a:pPr>
             <a:r>
@@ -6147,6 +5679,13 @@
             <a:prstDash val="solid"/>
           </a:ln>
         </p:spPr>
+        <p:txBody>
+          <a:bodyPr/>
+          <a:lstStyle/>
+          <a:p>
+            <a:endParaRPr lang="en-GB"/>
+          </a:p>
+        </p:txBody>
       </p:sp>
       <p:sp>
         <p:nvSpPr>
@@ -6169,7 +5708,7 @@
           <a:bodyPr wrap="square" lIns="50800" tIns="50800" rIns="50800" bIns="50800" rtlCol="0" anchor="ctr"/>
           <a:lstStyle/>
           <a:p>
-            <a:pPr indent="0" marL="0">
+            <a:pPr marL="0" indent="0">
               <a:buNone/>
             </a:pPr>
             <a:r>
@@ -6195,7 +5734,7 @@
 </p:sld>
 </file>
 
-<file path=ppt/slides/slide14.xml><?xml version="1.0" encoding="utf-8"?>
+<file path=ppt/slides/slide13.xml><?xml version="1.0" encoding="utf-8"?>
 <p:sld xmlns:a="http://schemas.openxmlformats.org/drawingml/2006/main" xmlns:r="http://schemas.openxmlformats.org/officeDocument/2006/relationships" xmlns:p="http://schemas.openxmlformats.org/presentationml/2006/main">
   <p:cSld name="Slide 14">
     <p:bg>
@@ -6203,6 +5742,7 @@
         <a:solidFill>
           <a:srgbClr val="FFFFFF"/>
         </a:solidFill>
+        <a:effectLst/>
       </p:bgPr>
     </p:bg>
     <p:spTree>
@@ -6240,7 +5780,7 @@
           <a:bodyPr wrap="square" lIns="0" tIns="0" rIns="0" bIns="0" rtlCol="0" anchor="ctr"/>
           <a:lstStyle/>
           <a:p>
-            <a:pPr indent="0" marL="0">
+            <a:pPr marL="0" indent="0">
               <a:buNone/>
             </a:pPr>
             <a:r>
@@ -6279,7 +5819,7 @@
           <a:bodyPr wrap="square" lIns="0" tIns="0" rIns="0" bIns="0" rtlCol="0" anchor="ctr"/>
           <a:lstStyle/>
           <a:p>
-            <a:pPr indent="0" marL="0">
+            <a:pPr marL="0" indent="0">
               <a:buNone/>
             </a:pPr>
             <a:r>
@@ -6318,7 +5858,7 @@
           <a:bodyPr wrap="square" lIns="0" tIns="0" rIns="0" bIns="0" rtlCol="0" anchor="ctr"/>
           <a:lstStyle/>
           <a:p>
-            <a:pPr algn="r" indent="0" marL="0">
+            <a:pPr marL="0" indent="0" algn="r">
               <a:buNone/>
             </a:pPr>
             <a:r>
@@ -6362,6 +5902,13 @@
             <a:prstDash val="solid"/>
           </a:ln>
         </p:spPr>
+        <p:txBody>
+          <a:bodyPr/>
+          <a:lstStyle/>
+          <a:p>
+            <a:endParaRPr lang="en-GB"/>
+          </a:p>
+        </p:txBody>
       </p:sp>
       <p:sp>
         <p:nvSpPr>
@@ -6384,7 +5931,7 @@
           <a:bodyPr wrap="square" lIns="25400" tIns="25400" rIns="25400" bIns="25400" rtlCol="0" anchor="ctr"/>
           <a:lstStyle/>
           <a:p>
-            <a:pPr algn="ctr" indent="0" marL="0">
+            <a:pPr marL="0" indent="0" algn="ctr">
               <a:buNone/>
             </a:pPr>
             <a:r>
@@ -6423,7 +5970,7 @@
           <a:bodyPr wrap="square" lIns="0" tIns="0" rIns="0" bIns="0" rtlCol="0" anchor="ctr"/>
           <a:lstStyle/>
           <a:p>
-            <a:pPr indent="0" marL="0">
+            <a:pPr marL="0" indent="0">
               <a:buNone/>
             </a:pPr>
             <a:r>
@@ -6467,6 +6014,13 @@
             <a:prstDash val="solid"/>
           </a:ln>
         </p:spPr>
+        <p:txBody>
+          <a:bodyPr/>
+          <a:lstStyle/>
+          <a:p>
+            <a:endParaRPr lang="en-GB"/>
+          </a:p>
+        </p:txBody>
       </p:sp>
       <p:sp>
         <p:nvSpPr>
@@ -6489,7 +6043,7 @@
           <a:bodyPr wrap="square" lIns="25400" tIns="25400" rIns="25400" bIns="25400" rtlCol="0" anchor="ctr"/>
           <a:lstStyle/>
           <a:p>
-            <a:pPr algn="ctr" indent="0" marL="0">
+            <a:pPr marL="0" indent="0" algn="ctr">
               <a:buNone/>
             </a:pPr>
             <a:r>
@@ -6528,7 +6082,7 @@
           <a:bodyPr wrap="square" lIns="0" tIns="0" rIns="0" bIns="0" rtlCol="0" anchor="ctr"/>
           <a:lstStyle/>
           <a:p>
-            <a:pPr indent="0" marL="0">
+            <a:pPr marL="0" indent="0">
               <a:buNone/>
             </a:pPr>
             <a:r>
@@ -6572,6 +6126,13 @@
             <a:prstDash val="solid"/>
           </a:ln>
         </p:spPr>
+        <p:txBody>
+          <a:bodyPr/>
+          <a:lstStyle/>
+          <a:p>
+            <a:endParaRPr lang="en-GB"/>
+          </a:p>
+        </p:txBody>
       </p:sp>
       <p:sp>
         <p:nvSpPr>
@@ -6594,7 +6155,7 @@
           <a:bodyPr wrap="square" lIns="25400" tIns="25400" rIns="25400" bIns="25400" rtlCol="0" anchor="ctr"/>
           <a:lstStyle/>
           <a:p>
-            <a:pPr algn="ctr" indent="0" marL="0">
+            <a:pPr marL="0" indent="0" algn="ctr">
               <a:buNone/>
             </a:pPr>
             <a:r>
@@ -6633,7 +6194,7 @@
           <a:bodyPr wrap="square" lIns="0" tIns="0" rIns="0" bIns="0" rtlCol="0" anchor="ctr"/>
           <a:lstStyle/>
           <a:p>
-            <a:pPr indent="0" marL="0">
+            <a:pPr marL="0" indent="0">
               <a:buNone/>
             </a:pPr>
             <a:r>
@@ -6677,6 +6238,13 @@
             <a:prstDash val="solid"/>
           </a:ln>
         </p:spPr>
+        <p:txBody>
+          <a:bodyPr/>
+          <a:lstStyle/>
+          <a:p>
+            <a:endParaRPr lang="en-GB"/>
+          </a:p>
+        </p:txBody>
       </p:sp>
       <p:sp>
         <p:nvSpPr>
@@ -6699,7 +6267,7 @@
           <a:bodyPr wrap="square" lIns="25400" tIns="25400" rIns="25400" bIns="25400" rtlCol="0" anchor="ctr"/>
           <a:lstStyle/>
           <a:p>
-            <a:pPr algn="ctr" indent="0" marL="0">
+            <a:pPr marL="0" indent="0" algn="ctr">
               <a:buNone/>
             </a:pPr>
             <a:r>
@@ -6738,7 +6306,7 @@
           <a:bodyPr wrap="square" lIns="0" tIns="0" rIns="0" bIns="0" rtlCol="0" anchor="ctr"/>
           <a:lstStyle/>
           <a:p>
-            <a:pPr indent="0" marL="0">
+            <a:pPr marL="0" indent="0">
               <a:buNone/>
             </a:pPr>
             <a:r>
@@ -6772,6 +6340,7 @@
         <a:solidFill>
           <a:srgbClr val="FFFFFF"/>
         </a:solidFill>
+        <a:effectLst/>
       </p:bgPr>
     </p:bg>
     <p:spTree>
@@ -6809,7 +6378,7 @@
           <a:bodyPr wrap="square" lIns="0" tIns="0" rIns="0" bIns="0" rtlCol="0" anchor="ctr"/>
           <a:lstStyle/>
           <a:p>
-            <a:pPr indent="0" marL="0">
+            <a:pPr marL="0" indent="0">
               <a:buNone/>
             </a:pPr>
             <a:r>
@@ -6848,7 +6417,7 @@
           <a:bodyPr wrap="square" lIns="0" tIns="0" rIns="0" bIns="0" rtlCol="0" anchor="ctr"/>
           <a:lstStyle/>
           <a:p>
-            <a:pPr indent="0" marL="0">
+            <a:pPr marL="0" indent="0">
               <a:buNone/>
             </a:pPr>
             <a:r>
@@ -6887,7 +6456,7 @@
           <a:bodyPr wrap="square" lIns="0" tIns="0" rIns="0" bIns="0" rtlCol="0" anchor="ctr"/>
           <a:lstStyle/>
           <a:p>
-            <a:pPr algn="r" indent="0" marL="0">
+            <a:pPr marL="0" indent="0" algn="r">
               <a:buNone/>
             </a:pPr>
             <a:r>
@@ -6931,6 +6500,13 @@
             <a:prstDash val="solid"/>
           </a:ln>
         </p:spPr>
+        <p:txBody>
+          <a:bodyPr/>
+          <a:lstStyle/>
+          <a:p>
+            <a:endParaRPr lang="en-GB"/>
+          </a:p>
+        </p:txBody>
       </p:sp>
       <p:sp>
         <p:nvSpPr>
@@ -6953,7 +6529,7 @@
           <a:bodyPr wrap="square" lIns="25400" tIns="25400" rIns="25400" bIns="25400" rtlCol="0" anchor="ctr"/>
           <a:lstStyle/>
           <a:p>
-            <a:pPr algn="ctr" indent="0" marL="0">
+            <a:pPr marL="0" indent="0" algn="ctr">
               <a:buNone/>
             </a:pPr>
             <a:r>
@@ -6995,6 +6571,13 @@
             <a:prstDash val="solid"/>
           </a:ln>
         </p:spPr>
+        <p:txBody>
+          <a:bodyPr/>
+          <a:lstStyle/>
+          <a:p>
+            <a:endParaRPr lang="en-GB"/>
+          </a:p>
+        </p:txBody>
       </p:sp>
       <p:sp>
         <p:nvSpPr>
@@ -7022,6 +6605,13 @@
             <a:prstDash val="solid"/>
           </a:ln>
         </p:spPr>
+        <p:txBody>
+          <a:bodyPr/>
+          <a:lstStyle/>
+          <a:p>
+            <a:endParaRPr lang="en-GB"/>
+          </a:p>
+        </p:txBody>
       </p:sp>
       <p:sp>
         <p:nvSpPr>
@@ -7044,7 +6634,7 @@
           <a:bodyPr wrap="square" lIns="25400" tIns="25400" rIns="25400" bIns="25400" rtlCol="0" anchor="ctr"/>
           <a:lstStyle/>
           <a:p>
-            <a:pPr algn="ctr" indent="0" marL="0">
+            <a:pPr marL="0" indent="0" algn="ctr">
               <a:buNone/>
             </a:pPr>
             <a:r>
@@ -7086,6 +6676,13 @@
             <a:prstDash val="solid"/>
           </a:ln>
         </p:spPr>
+        <p:txBody>
+          <a:bodyPr/>
+          <a:lstStyle/>
+          <a:p>
+            <a:endParaRPr lang="en-GB"/>
+          </a:p>
+        </p:txBody>
       </p:sp>
       <p:sp>
         <p:nvSpPr>
@@ -7108,7 +6705,7 @@
           <a:bodyPr wrap="square" lIns="0" tIns="0" rIns="0" bIns="0" rtlCol="0" anchor="ctr"/>
           <a:lstStyle/>
           <a:p>
-            <a:pPr algn="ctr" indent="0" marL="0">
+            <a:pPr marL="0" indent="0" algn="ctr">
               <a:buNone/>
             </a:pPr>
             <a:r>
@@ -7152,6 +6749,13 @@
             <a:prstDash val="solid"/>
           </a:ln>
         </p:spPr>
+        <p:txBody>
+          <a:bodyPr/>
+          <a:lstStyle/>
+          <a:p>
+            <a:endParaRPr lang="en-GB"/>
+          </a:p>
+        </p:txBody>
       </p:sp>
       <p:sp>
         <p:nvSpPr>
@@ -7174,7 +6778,7 @@
           <a:bodyPr wrap="square" lIns="25400" tIns="25400" rIns="25400" bIns="25400" rtlCol="0" anchor="ctr"/>
           <a:lstStyle/>
           <a:p>
-            <a:pPr algn="ctr" indent="0" marL="0">
+            <a:pPr marL="0" indent="0" algn="ctr">
               <a:buNone/>
             </a:pPr>
             <a:r>
@@ -7191,7 +6795,7 @@
             <a:endParaRPr lang="en-US" sz="1300" dirty="0"/>
           </a:p>
           <a:p>
-            <a:pPr algn="ctr" indent="0" marL="0">
+            <a:pPr marL="0" indent="0" algn="ctr">
               <a:buNone/>
             </a:pPr>
             <a:r>
@@ -7233,6 +6837,13 @@
             <a:prstDash val="solid"/>
           </a:ln>
         </p:spPr>
+        <p:txBody>
+          <a:bodyPr/>
+          <a:lstStyle/>
+          <a:p>
+            <a:endParaRPr lang="en-GB"/>
+          </a:p>
+        </p:txBody>
       </p:sp>
       <p:sp>
         <p:nvSpPr>
@@ -7255,7 +6866,7 @@
           <a:bodyPr wrap="square" lIns="0" tIns="0" rIns="0" bIns="0" rtlCol="0" anchor="ctr"/>
           <a:lstStyle/>
           <a:p>
-            <a:pPr algn="ctr" indent="0" marL="0">
+            <a:pPr marL="0" indent="0" algn="ctr">
               <a:buNone/>
             </a:pPr>
             <a:r>
@@ -7299,6 +6910,13 @@
             <a:prstDash val="solid"/>
           </a:ln>
         </p:spPr>
+        <p:txBody>
+          <a:bodyPr/>
+          <a:lstStyle/>
+          <a:p>
+            <a:endParaRPr lang="en-GB"/>
+          </a:p>
+        </p:txBody>
       </p:sp>
       <p:sp>
         <p:nvSpPr>
@@ -7321,7 +6939,7 @@
           <a:bodyPr wrap="square" lIns="25400" tIns="25400" rIns="25400" bIns="25400" rtlCol="0" anchor="ctr"/>
           <a:lstStyle/>
           <a:p>
-            <a:pPr algn="ctr" indent="0" marL="0">
+            <a:pPr marL="0" indent="0" algn="ctr">
               <a:buNone/>
             </a:pPr>
             <a:r>
@@ -7338,7 +6956,7 @@
             <a:endParaRPr lang="en-US" sz="1300" dirty="0"/>
           </a:p>
           <a:p>
-            <a:pPr algn="ctr" indent="0" marL="0">
+            <a:pPr marL="0" indent="0" algn="ctr">
               <a:buNone/>
             </a:pPr>
             <a:r>
@@ -7377,7 +6995,7 @@
           <a:bodyPr wrap="square" lIns="0" tIns="0" rIns="0" bIns="0" rtlCol="0" anchor="ctr"/>
           <a:lstStyle/>
           <a:p>
-            <a:pPr algn="ctr" indent="0" marL="0">
+            <a:pPr marL="0" indent="0" algn="ctr">
               <a:buNone/>
             </a:pPr>
             <a:r>
@@ -7419,6 +7037,13 @@
             <a:prstDash val="solid"/>
           </a:ln>
         </p:spPr>
+        <p:txBody>
+          <a:bodyPr/>
+          <a:lstStyle/>
+          <a:p>
+            <a:endParaRPr lang="en-GB"/>
+          </a:p>
+        </p:txBody>
       </p:sp>
       <p:sp>
         <p:nvSpPr>
@@ -7444,6 +7069,13 @@
             <a:prstDash val="solid"/>
           </a:ln>
         </p:spPr>
+        <p:txBody>
+          <a:bodyPr/>
+          <a:lstStyle/>
+          <a:p>
+            <a:endParaRPr lang="en-GB"/>
+          </a:p>
+        </p:txBody>
       </p:sp>
       <p:sp>
         <p:nvSpPr>
@@ -7469,6 +7101,13 @@
             <a:prstDash val="solid"/>
           </a:ln>
         </p:spPr>
+        <p:txBody>
+          <a:bodyPr/>
+          <a:lstStyle/>
+          <a:p>
+            <a:endParaRPr lang="en-GB"/>
+          </a:p>
+        </p:txBody>
       </p:sp>
       <p:sp>
         <p:nvSpPr>
@@ -7494,6 +7133,13 @@
             <a:prstDash val="solid"/>
           </a:ln>
         </p:spPr>
+        <p:txBody>
+          <a:bodyPr/>
+          <a:lstStyle/>
+          <a:p>
+            <a:endParaRPr lang="en-GB"/>
+          </a:p>
+        </p:txBody>
       </p:sp>
       <p:sp>
         <p:nvSpPr>
@@ -7519,6 +7165,13 @@
             <a:prstDash val="solid"/>
           </a:ln>
         </p:spPr>
+        <p:txBody>
+          <a:bodyPr/>
+          <a:lstStyle/>
+          <a:p>
+            <a:endParaRPr lang="en-GB"/>
+          </a:p>
+        </p:txBody>
       </p:sp>
       <p:sp>
         <p:nvSpPr>
@@ -7544,6 +7197,13 @@
             <a:prstDash val="solid"/>
           </a:ln>
         </p:spPr>
+        <p:txBody>
+          <a:bodyPr/>
+          <a:lstStyle/>
+          <a:p>
+            <a:endParaRPr lang="en-GB"/>
+          </a:p>
+        </p:txBody>
       </p:sp>
       <p:sp>
         <p:nvSpPr>
@@ -7569,6 +7229,13 @@
             <a:prstDash val="solid"/>
           </a:ln>
         </p:spPr>
+        <p:txBody>
+          <a:bodyPr/>
+          <a:lstStyle/>
+          <a:p>
+            <a:endParaRPr lang="en-GB"/>
+          </a:p>
+        </p:txBody>
       </p:sp>
       <p:sp>
         <p:nvSpPr>
@@ -7594,6 +7261,13 @@
             <a:prstDash val="solid"/>
           </a:ln>
         </p:spPr>
+        <p:txBody>
+          <a:bodyPr/>
+          <a:lstStyle/>
+          <a:p>
+            <a:endParaRPr lang="en-GB"/>
+          </a:p>
+        </p:txBody>
       </p:sp>
       <p:sp>
         <p:nvSpPr>
@@ -7619,6 +7293,13 @@
             <a:prstDash val="solid"/>
           </a:ln>
         </p:spPr>
+        <p:txBody>
+          <a:bodyPr/>
+          <a:lstStyle/>
+          <a:p>
+            <a:endParaRPr lang="en-GB"/>
+          </a:p>
+        </p:txBody>
       </p:sp>
       <p:sp>
         <p:nvSpPr>
@@ -7644,6 +7325,13 @@
             <a:prstDash val="solid"/>
           </a:ln>
         </p:spPr>
+        <p:txBody>
+          <a:bodyPr/>
+          <a:lstStyle/>
+          <a:p>
+            <a:endParaRPr lang="en-GB"/>
+          </a:p>
+        </p:txBody>
       </p:sp>
       <p:sp>
         <p:nvSpPr>
@@ -7669,6 +7357,13 @@
             <a:prstDash val="solid"/>
           </a:ln>
         </p:spPr>
+        <p:txBody>
+          <a:bodyPr/>
+          <a:lstStyle/>
+          <a:p>
+            <a:endParaRPr lang="en-GB"/>
+          </a:p>
+        </p:txBody>
       </p:sp>
       <p:sp>
         <p:nvSpPr>
@@ -7694,6 +7389,13 @@
             <a:prstDash val="solid"/>
           </a:ln>
         </p:spPr>
+        <p:txBody>
+          <a:bodyPr/>
+          <a:lstStyle/>
+          <a:p>
+            <a:endParaRPr lang="en-GB"/>
+          </a:p>
+        </p:txBody>
       </p:sp>
       <p:sp>
         <p:nvSpPr>
@@ -7719,6 +7421,13 @@
             <a:prstDash val="solid"/>
           </a:ln>
         </p:spPr>
+        <p:txBody>
+          <a:bodyPr/>
+          <a:lstStyle/>
+          <a:p>
+            <a:endParaRPr lang="en-GB"/>
+          </a:p>
+        </p:txBody>
       </p:sp>
       <p:sp>
         <p:nvSpPr>
@@ -7741,7 +7450,7 @@
           <a:bodyPr wrap="square" lIns="0" tIns="0" rIns="0" bIns="0" rtlCol="0" anchor="ctr"/>
           <a:lstStyle/>
           <a:p>
-            <a:pPr indent="0" marL="0">
+            <a:pPr marL="0" indent="0">
               <a:buNone/>
             </a:pPr>
             <a:r>
@@ -7785,6 +7494,13 @@
             <a:prstDash val="solid"/>
           </a:ln>
         </p:spPr>
+        <p:txBody>
+          <a:bodyPr/>
+          <a:lstStyle/>
+          <a:p>
+            <a:endParaRPr lang="en-GB"/>
+          </a:p>
+        </p:txBody>
       </p:sp>
       <p:sp>
         <p:nvSpPr>
@@ -7807,7 +7523,7 @@
           <a:bodyPr wrap="square" lIns="0" tIns="0" rIns="0" bIns="0" rtlCol="0" anchor="ctr"/>
           <a:lstStyle/>
           <a:p>
-            <a:pPr indent="0" marL="0">
+            <a:pPr marL="0" indent="0">
               <a:buNone/>
             </a:pPr>
             <a:r>
@@ -7846,7 +7562,7 @@
           <a:bodyPr wrap="square" lIns="0" tIns="0" rIns="0" bIns="0" rtlCol="0" anchor="t"/>
           <a:lstStyle/>
           <a:p>
-            <a:pPr indent="0" marL="0">
+            <a:pPr marL="0" indent="0">
               <a:buNone/>
             </a:pPr>
             <a:r>
@@ -7890,6 +7606,13 @@
             <a:prstDash val="solid"/>
           </a:ln>
         </p:spPr>
+        <p:txBody>
+          <a:bodyPr/>
+          <a:lstStyle/>
+          <a:p>
+            <a:endParaRPr lang="en-GB"/>
+          </a:p>
+        </p:txBody>
       </p:sp>
       <p:sp>
         <p:nvSpPr>
@@ -7912,7 +7635,7 @@
           <a:bodyPr wrap="square" lIns="0" tIns="0" rIns="0" bIns="0" rtlCol="0" anchor="ctr"/>
           <a:lstStyle/>
           <a:p>
-            <a:pPr indent="0" marL="0">
+            <a:pPr marL="0" indent="0">
               <a:buNone/>
             </a:pPr>
             <a:r>
@@ -7951,7 +7674,7 @@
           <a:bodyPr wrap="square" lIns="0" tIns="0" rIns="0" bIns="0" rtlCol="0" anchor="t"/>
           <a:lstStyle/>
           <a:p>
-            <a:pPr indent="0" marL="0">
+            <a:pPr marL="0" indent="0">
               <a:buNone/>
             </a:pPr>
             <a:r>
@@ -7985,6 +7708,7 @@
         <a:solidFill>
           <a:srgbClr val="FFFFFF"/>
         </a:solidFill>
+        <a:effectLst/>
       </p:bgPr>
     </p:bg>
     <p:spTree>
@@ -8022,7 +7746,7 @@
           <a:bodyPr wrap="square" lIns="0" tIns="0" rIns="0" bIns="0" rtlCol="0" anchor="ctr"/>
           <a:lstStyle/>
           <a:p>
-            <a:pPr indent="0" marL="0">
+            <a:pPr marL="0" indent="0">
               <a:buNone/>
             </a:pPr>
             <a:r>
@@ -8061,7 +7785,7 @@
           <a:bodyPr wrap="square" lIns="0" tIns="0" rIns="0" bIns="0" rtlCol="0" anchor="ctr"/>
           <a:lstStyle/>
           <a:p>
-            <a:pPr indent="0" marL="0">
+            <a:pPr marL="0" indent="0">
               <a:buNone/>
             </a:pPr>
             <a:r>
@@ -8100,7 +7824,7 @@
           <a:bodyPr wrap="square" lIns="0" tIns="0" rIns="0" bIns="0" rtlCol="0" anchor="ctr"/>
           <a:lstStyle/>
           <a:p>
-            <a:pPr algn="r" indent="0" marL="0">
+            <a:pPr marL="0" indent="0" algn="r">
               <a:buNone/>
             </a:pPr>
             <a:r>
@@ -8120,7 +7844,7 @@
       </p:sp>
       <p:graphicFrame>
         <p:nvGraphicFramePr>
-          <p:cNvPr id="4" name="Table 0"/>
+          <p:cNvPr id="5" name="Table 0"/>
           <p:cNvGraphicFramePr>
             <a:graphicFrameLocks noGrp="1"/>
           </p:cNvGraphicFramePr>
@@ -8134,18 +7858,48 @@
         </p:nvGraphicFramePr>
         <p:xfrm>
           <a:off x="548640" y="1371600"/>
-          <a:ext cx="11091672" cy="914400"/>
+          <a:ext cx="11091672" cy="3029712"/>
         </p:xfrm>
         <a:graphic>
           <a:graphicData uri="http://schemas.openxmlformats.org/drawingml/2006/table">
             <a:tbl>
               <a:tblPr/>
               <a:tblGrid>
-                <a:gridCol w="1554480"/>
-                <a:gridCol w="3657600"/>
-                <a:gridCol w="1188720"/>
-                <a:gridCol w="1371600"/>
-                <a:gridCol w="3319272"/>
+                <a:gridCol w="1554480">
+                  <a:extLst>
+                    <a:ext uri="{9D8B030D-6E8A-4147-A177-3AD203B41FA5}">
+                      <a16:colId xmlns:a16="http://schemas.microsoft.com/office/drawing/2014/main" val="20000"/>
+                    </a:ext>
+                  </a:extLst>
+                </a:gridCol>
+                <a:gridCol w="3657600">
+                  <a:extLst>
+                    <a:ext uri="{9D8B030D-6E8A-4147-A177-3AD203B41FA5}">
+                      <a16:colId xmlns:a16="http://schemas.microsoft.com/office/drawing/2014/main" val="20001"/>
+                    </a:ext>
+                  </a:extLst>
+                </a:gridCol>
+                <a:gridCol w="1188720">
+                  <a:extLst>
+                    <a:ext uri="{9D8B030D-6E8A-4147-A177-3AD203B41FA5}">
+                      <a16:colId xmlns:a16="http://schemas.microsoft.com/office/drawing/2014/main" val="20002"/>
+                    </a:ext>
+                  </a:extLst>
+                </a:gridCol>
+                <a:gridCol w="1371600">
+                  <a:extLst>
+                    <a:ext uri="{9D8B030D-6E8A-4147-A177-3AD203B41FA5}">
+                      <a16:colId xmlns:a16="http://schemas.microsoft.com/office/drawing/2014/main" val="20003"/>
+                    </a:ext>
+                  </a:extLst>
+                </a:gridCol>
+                <a:gridCol w="3319272">
+                  <a:extLst>
+                    <a:ext uri="{9D8B030D-6E8A-4147-A177-3AD203B41FA5}">
+                      <a16:colId xmlns:a16="http://schemas.microsoft.com/office/drawing/2014/main" val="20004"/>
+                    </a:ext>
+                  </a:extLst>
+                </a:gridCol>
               </a:tblGrid>
               <a:tr h="502920">
                 <a:tc>
@@ -8153,7 +7907,7 @@
                     <a:bodyPr/>
                     <a:lstStyle/>
                     <a:p>
-                      <a:pPr indent="0" marL="0">
+                      <a:pPr marL="0" indent="0">
                         <a:buNone/>
                       </a:pPr>
                       <a:r>
@@ -8221,7 +7975,7 @@
                     <a:bodyPr/>
                     <a:lstStyle/>
                     <a:p>
-                      <a:pPr indent="0" marL="0">
+                      <a:pPr marL="0" indent="0">
                         <a:buNone/>
                       </a:pPr>
                       <a:r>
@@ -8289,7 +8043,7 @@
                     <a:bodyPr/>
                     <a:lstStyle/>
                     <a:p>
-                      <a:pPr indent="0" marL="0">
+                      <a:pPr marL="0" indent="0">
                         <a:buNone/>
                       </a:pPr>
                       <a:r>
@@ -8357,7 +8111,7 @@
                     <a:bodyPr/>
                     <a:lstStyle/>
                     <a:p>
-                      <a:pPr indent="0" marL="0">
+                      <a:pPr marL="0" indent="0">
                         <a:buNone/>
                       </a:pPr>
                       <a:r>
@@ -8425,7 +8179,7 @@
                     <a:bodyPr/>
                     <a:lstStyle/>
                     <a:p>
-                      <a:pPr indent="0" marL="0">
+                      <a:pPr marL="0" indent="0">
                         <a:buNone/>
                       </a:pPr>
                       <a:r>
@@ -8488,6 +8242,11 @@
                     </a:solidFill>
                   </a:tcPr>
                 </a:tc>
+                <a:extLst>
+                  <a:ext uri="{0D108BD9-81ED-4DB2-BD59-A6C34878D82A}">
+                    <a16:rowId xmlns:a16="http://schemas.microsoft.com/office/drawing/2014/main" val="10000"/>
+                  </a:ext>
+                </a:extLst>
               </a:tr>
               <a:tr h="502920">
                 <a:tc>
@@ -8495,7 +8254,7 @@
                     <a:bodyPr/>
                     <a:lstStyle/>
                     <a:p>
-                      <a:pPr indent="0" marL="0">
+                      <a:pPr marL="0" indent="0">
                         <a:buNone/>
                       </a:pPr>
                       <a:r>
@@ -8563,7 +8322,7 @@
                     <a:bodyPr/>
                     <a:lstStyle/>
                     <a:p>
-                      <a:pPr indent="0" marL="0">
+                      <a:pPr marL="0" indent="0">
                         <a:buNone/>
                       </a:pPr>
                       <a:r>
@@ -8631,7 +8390,7 @@
                     <a:bodyPr/>
                     <a:lstStyle/>
                     <a:p>
-                      <a:pPr indent="0" marL="0">
+                      <a:pPr marL="0" indent="0">
                         <a:buNone/>
                       </a:pPr>
                       <a:r>
@@ -8699,7 +8458,7 @@
                     <a:bodyPr/>
                     <a:lstStyle/>
                     <a:p>
-                      <a:pPr indent="0" marL="0">
+                      <a:pPr marL="0" indent="0">
                         <a:buNone/>
                       </a:pPr>
                       <a:r>
@@ -8767,7 +8526,7 @@
                     <a:bodyPr/>
                     <a:lstStyle/>
                     <a:p>
-                      <a:pPr indent="0" marL="0">
+                      <a:pPr marL="0" indent="0">
                         <a:buNone/>
                       </a:pPr>
                       <a:r>
@@ -8830,6 +8589,11 @@
                     </a:solidFill>
                   </a:tcPr>
                 </a:tc>
+                <a:extLst>
+                  <a:ext uri="{0D108BD9-81ED-4DB2-BD59-A6C34878D82A}">
+                    <a16:rowId xmlns:a16="http://schemas.microsoft.com/office/drawing/2014/main" val="10001"/>
+                  </a:ext>
+                </a:extLst>
               </a:tr>
               <a:tr h="502920">
                 <a:tc>
@@ -8837,7 +8601,7 @@
                     <a:bodyPr/>
                     <a:lstStyle/>
                     <a:p>
-                      <a:pPr indent="0" marL="0">
+                      <a:pPr marL="0" indent="0">
                         <a:buNone/>
                       </a:pPr>
                       <a:r>
@@ -8905,7 +8669,7 @@
                     <a:bodyPr/>
                     <a:lstStyle/>
                     <a:p>
-                      <a:pPr indent="0" marL="0">
+                      <a:pPr marL="0" indent="0">
                         <a:buNone/>
                       </a:pPr>
                       <a:r>
@@ -8973,7 +8737,7 @@
                     <a:bodyPr/>
                     <a:lstStyle/>
                     <a:p>
-                      <a:pPr indent="0" marL="0">
+                      <a:pPr marL="0" indent="0">
                         <a:buNone/>
                       </a:pPr>
                       <a:r>
@@ -9041,7 +8805,7 @@
                     <a:bodyPr/>
                     <a:lstStyle/>
                     <a:p>
-                      <a:pPr indent="0" marL="0">
+                      <a:pPr marL="0" indent="0">
                         <a:buNone/>
                       </a:pPr>
                       <a:r>
@@ -9109,7 +8873,7 @@
                     <a:bodyPr/>
                     <a:lstStyle/>
                     <a:p>
-                      <a:pPr indent="0" marL="0">
+                      <a:pPr marL="0" indent="0">
                         <a:buNone/>
                       </a:pPr>
                       <a:r>
@@ -9172,6 +8936,11 @@
                     </a:solidFill>
                   </a:tcPr>
                 </a:tc>
+                <a:extLst>
+                  <a:ext uri="{0D108BD9-81ED-4DB2-BD59-A6C34878D82A}">
+                    <a16:rowId xmlns:a16="http://schemas.microsoft.com/office/drawing/2014/main" val="10002"/>
+                  </a:ext>
+                </a:extLst>
               </a:tr>
               <a:tr h="502920">
                 <a:tc>
@@ -9179,7 +8948,7 @@
                     <a:bodyPr/>
                     <a:lstStyle/>
                     <a:p>
-                      <a:pPr indent="0" marL="0">
+                      <a:pPr marL="0" indent="0">
                         <a:buNone/>
                       </a:pPr>
                       <a:r>
@@ -9247,7 +9016,7 @@
                     <a:bodyPr/>
                     <a:lstStyle/>
                     <a:p>
-                      <a:pPr indent="0" marL="0">
+                      <a:pPr marL="0" indent="0">
                         <a:buNone/>
                       </a:pPr>
                       <a:r>
@@ -9315,7 +9084,7 @@
                     <a:bodyPr/>
                     <a:lstStyle/>
                     <a:p>
-                      <a:pPr indent="0" marL="0">
+                      <a:pPr marL="0" indent="0">
                         <a:buNone/>
                       </a:pPr>
                       <a:r>
@@ -9383,7 +9152,7 @@
                     <a:bodyPr/>
                     <a:lstStyle/>
                     <a:p>
-                      <a:pPr indent="0" marL="0">
+                      <a:pPr marL="0" indent="0">
                         <a:buNone/>
                       </a:pPr>
                       <a:r>
@@ -9451,7 +9220,7 @@
                     <a:bodyPr/>
                     <a:lstStyle/>
                     <a:p>
-                      <a:pPr indent="0" marL="0">
+                      <a:pPr marL="0" indent="0">
                         <a:buNone/>
                       </a:pPr>
                       <a:r>
@@ -9514,6 +9283,11 @@
                     </a:solidFill>
                   </a:tcPr>
                 </a:tc>
+                <a:extLst>
+                  <a:ext uri="{0D108BD9-81ED-4DB2-BD59-A6C34878D82A}">
+                    <a16:rowId xmlns:a16="http://schemas.microsoft.com/office/drawing/2014/main" val="10003"/>
+                  </a:ext>
+                </a:extLst>
               </a:tr>
               <a:tr h="502920">
                 <a:tc>
@@ -9521,7 +9295,7 @@
                     <a:bodyPr/>
                     <a:lstStyle/>
                     <a:p>
-                      <a:pPr indent="0" marL="0">
+                      <a:pPr marL="0" indent="0">
                         <a:buNone/>
                       </a:pPr>
                       <a:r>
@@ -9589,7 +9363,7 @@
                     <a:bodyPr/>
                     <a:lstStyle/>
                     <a:p>
-                      <a:pPr indent="0" marL="0">
+                      <a:pPr marL="0" indent="0">
                         <a:buNone/>
                       </a:pPr>
                       <a:r>
@@ -9657,7 +9431,7 @@
                     <a:bodyPr/>
                     <a:lstStyle/>
                     <a:p>
-                      <a:pPr indent="0" marL="0">
+                      <a:pPr marL="0" indent="0">
                         <a:buNone/>
                       </a:pPr>
                       <a:r>
@@ -9725,7 +9499,7 @@
                     <a:bodyPr/>
                     <a:lstStyle/>
                     <a:p>
-                      <a:pPr indent="0" marL="0">
+                      <a:pPr marL="0" indent="0">
                         <a:buNone/>
                       </a:pPr>
                       <a:r>
@@ -9793,7 +9567,7 @@
                     <a:bodyPr/>
                     <a:lstStyle/>
                     <a:p>
-                      <a:pPr indent="0" marL="0">
+                      <a:pPr marL="0" indent="0">
                         <a:buNone/>
                       </a:pPr>
                       <a:r>
@@ -9856,6 +9630,11 @@
                     </a:solidFill>
                   </a:tcPr>
                 </a:tc>
+                <a:extLst>
+                  <a:ext uri="{0D108BD9-81ED-4DB2-BD59-A6C34878D82A}">
+                    <a16:rowId xmlns:a16="http://schemas.microsoft.com/office/drawing/2014/main" val="10004"/>
+                  </a:ext>
+                </a:extLst>
               </a:tr>
               <a:tr h="502920">
                 <a:tc>
@@ -9863,7 +9642,7 @@
                     <a:bodyPr/>
                     <a:lstStyle/>
                     <a:p>
-                      <a:pPr indent="0" marL="0">
+                      <a:pPr marL="0" indent="0">
                         <a:buNone/>
                       </a:pPr>
                       <a:r>
@@ -9931,7 +9710,7 @@
                     <a:bodyPr/>
                     <a:lstStyle/>
                     <a:p>
-                      <a:pPr indent="0" marL="0">
+                      <a:pPr marL="0" indent="0">
                         <a:buNone/>
                       </a:pPr>
                       <a:r>
@@ -9999,7 +9778,7 @@
                     <a:bodyPr/>
                     <a:lstStyle/>
                     <a:p>
-                      <a:pPr indent="0" marL="0">
+                      <a:pPr marL="0" indent="0">
                         <a:buNone/>
                       </a:pPr>
                       <a:r>
@@ -10067,7 +9846,7 @@
                     <a:bodyPr/>
                     <a:lstStyle/>
                     <a:p>
-                      <a:pPr indent="0" marL="0">
+                      <a:pPr marL="0" indent="0">
                         <a:buNone/>
                       </a:pPr>
                       <a:r>
@@ -10135,7 +9914,7 @@
                     <a:bodyPr/>
                     <a:lstStyle/>
                     <a:p>
-                      <a:pPr indent="0" marL="0">
+                      <a:pPr marL="0" indent="0">
                         <a:buNone/>
                       </a:pPr>
                       <a:r>
@@ -10198,6 +9977,11 @@
                     </a:solidFill>
                   </a:tcPr>
                 </a:tc>
+                <a:extLst>
+                  <a:ext uri="{0D108BD9-81ED-4DB2-BD59-A6C34878D82A}">
+                    <a16:rowId xmlns:a16="http://schemas.microsoft.com/office/drawing/2014/main" val="10005"/>
+                  </a:ext>
+                </a:extLst>
               </a:tr>
             </a:tbl>
           </a:graphicData>
@@ -10229,6 +10013,13 @@
             <a:prstDash val="solid"/>
           </a:ln>
         </p:spPr>
+        <p:txBody>
+          <a:bodyPr/>
+          <a:lstStyle/>
+          <a:p>
+            <a:endParaRPr lang="en-GB"/>
+          </a:p>
+        </p:txBody>
       </p:sp>
       <p:sp>
         <p:nvSpPr>
@@ -10251,7 +10042,7 @@
           <a:bodyPr wrap="square" lIns="0" tIns="0" rIns="0" bIns="0" rtlCol="0" anchor="ctr"/>
           <a:lstStyle/>
           <a:p>
-            <a:pPr indent="0" marL="0">
+            <a:pPr marL="0" indent="0">
               <a:buNone/>
             </a:pPr>
             <a:r>
@@ -10295,6 +10086,13 @@
             <a:prstDash val="solid"/>
           </a:ln>
         </p:spPr>
+        <p:txBody>
+          <a:bodyPr/>
+          <a:lstStyle/>
+          <a:p>
+            <a:endParaRPr lang="en-GB"/>
+          </a:p>
+        </p:txBody>
       </p:sp>
       <p:sp>
         <p:nvSpPr>
@@ -10317,7 +10115,7 @@
           <a:bodyPr wrap="square" lIns="50800" tIns="50800" rIns="50800" bIns="50800" rtlCol="0" anchor="ctr"/>
           <a:lstStyle/>
           <a:p>
-            <a:pPr indent="0" marL="0">
+            <a:pPr marL="0" indent="0">
               <a:buNone/>
             </a:pPr>
             <a:r>
@@ -10351,6 +10149,7 @@
         <a:solidFill>
           <a:srgbClr val="FFFFFF"/>
         </a:solidFill>
+        <a:effectLst/>
       </p:bgPr>
     </p:bg>
     <p:spTree>
@@ -10388,7 +10187,7 @@
           <a:bodyPr wrap="square" lIns="0" tIns="0" rIns="0" bIns="0" rtlCol="0" anchor="ctr"/>
           <a:lstStyle/>
           <a:p>
-            <a:pPr indent="0" marL="0">
+            <a:pPr marL="0" indent="0">
               <a:buNone/>
             </a:pPr>
             <a:r>
@@ -10427,7 +10226,7 @@
           <a:bodyPr wrap="square" lIns="0" tIns="0" rIns="0" bIns="0" rtlCol="0" anchor="ctr"/>
           <a:lstStyle/>
           <a:p>
-            <a:pPr indent="0" marL="0">
+            <a:pPr marL="0" indent="0">
               <a:buNone/>
             </a:pPr>
             <a:r>
@@ -10466,7 +10265,7 @@
           <a:bodyPr wrap="square" lIns="0" tIns="0" rIns="0" bIns="0" rtlCol="0" anchor="ctr"/>
           <a:lstStyle/>
           <a:p>
-            <a:pPr algn="r" indent="0" marL="0">
+            <a:pPr marL="0" indent="0" algn="r">
               <a:buNone/>
             </a:pPr>
             <a:r>
@@ -10486,7 +10285,7 @@
       </p:sp>
       <p:graphicFrame>
         <p:nvGraphicFramePr>
-          <p:cNvPr id="5" name="Chart 0" descr=""/>
+          <p:cNvPr id="5" name="Chart 0"/>
           <p:cNvGraphicFramePr/>
           <p:nvPr/>
         </p:nvGraphicFramePr>
@@ -10494,15 +10293,15 @@
           <a:off x="548640" y="1371600"/>
           <a:ext cx="5394960" cy="4206240"/>
         </p:xfrm>
-        <a:graphic xmlns:a="http://schemas.openxmlformats.org/drawingml/2006/main">
+        <a:graphic>
           <a:graphicData uri="http://schemas.openxmlformats.org/drawingml/2006/chart">
-            <c:chart xmlns:c="http://schemas.openxmlformats.org/drawingml/2006/chart" r:id="rId1"/>
+            <c:chart xmlns:c="http://schemas.openxmlformats.org/drawingml/2006/chart" xmlns:r="http://schemas.openxmlformats.org/officeDocument/2006/relationships" r:id="rId3"/>
           </a:graphicData>
         </a:graphic>
       </p:graphicFrame>
       <p:graphicFrame>
         <p:nvGraphicFramePr>
-          <p:cNvPr id="6" name="Chart 1" descr=""/>
+          <p:cNvPr id="6" name="Chart 1"/>
           <p:cNvGraphicFramePr/>
           <p:nvPr/>
         </p:nvGraphicFramePr>
@@ -10510,9 +10309,9 @@
           <a:off x="6217920" y="1371600"/>
           <a:ext cx="5394960" cy="4206240"/>
         </p:xfrm>
-        <a:graphic xmlns:a="http://schemas.openxmlformats.org/drawingml/2006/main">
+        <a:graphic>
           <a:graphicData uri="http://schemas.openxmlformats.org/drawingml/2006/chart">
-            <c:chart xmlns:c="http://schemas.openxmlformats.org/drawingml/2006/chart" r:id="rId2"/>
+            <c:chart xmlns:c="http://schemas.openxmlformats.org/drawingml/2006/chart" xmlns:r="http://schemas.openxmlformats.org/officeDocument/2006/relationships" r:id="rId4"/>
           </a:graphicData>
         </a:graphic>
       </p:graphicFrame>
@@ -10542,6 +10341,13 @@
             <a:prstDash val="solid"/>
           </a:ln>
         </p:spPr>
+        <p:txBody>
+          <a:bodyPr/>
+          <a:lstStyle/>
+          <a:p>
+            <a:endParaRPr lang="en-GB"/>
+          </a:p>
+        </p:txBody>
       </p:sp>
       <p:sp>
         <p:nvSpPr>
@@ -10564,7 +10370,7 @@
           <a:bodyPr wrap="square" lIns="50800" tIns="50800" rIns="50800" bIns="50800" rtlCol="0" anchor="ctr"/>
           <a:lstStyle/>
           <a:p>
-            <a:pPr indent="0" marL="0">
+            <a:pPr marL="0" indent="0">
               <a:buNone/>
             </a:pPr>
             <a:r>
@@ -10598,6 +10404,7 @@
         <a:solidFill>
           <a:srgbClr val="FFFFFF"/>
         </a:solidFill>
+        <a:effectLst/>
       </p:bgPr>
     </p:bg>
     <p:spTree>
@@ -10635,7 +10442,7 @@
           <a:bodyPr wrap="square" lIns="0" tIns="0" rIns="0" bIns="0" rtlCol="0" anchor="ctr"/>
           <a:lstStyle/>
           <a:p>
-            <a:pPr indent="0" marL="0">
+            <a:pPr marL="0" indent="0">
               <a:buNone/>
             </a:pPr>
             <a:r>
@@ -10674,7 +10481,7 @@
           <a:bodyPr wrap="square" lIns="0" tIns="0" rIns="0" bIns="0" rtlCol="0" anchor="ctr"/>
           <a:lstStyle/>
           <a:p>
-            <a:pPr indent="0" marL="0">
+            <a:pPr marL="0" indent="0">
               <a:buNone/>
             </a:pPr>
             <a:r>
@@ -10713,7 +10520,7 @@
           <a:bodyPr wrap="square" lIns="0" tIns="0" rIns="0" bIns="0" rtlCol="0" anchor="ctr"/>
           <a:lstStyle/>
           <a:p>
-            <a:pPr algn="r" indent="0" marL="0">
+            <a:pPr marL="0" indent="0" algn="r">
               <a:buNone/>
             </a:pPr>
             <a:r>
@@ -10757,6 +10564,13 @@
             <a:prstDash val="solid"/>
           </a:ln>
         </p:spPr>
+        <p:txBody>
+          <a:bodyPr/>
+          <a:lstStyle/>
+          <a:p>
+            <a:endParaRPr lang="en-GB"/>
+          </a:p>
+        </p:txBody>
       </p:sp>
       <p:sp>
         <p:nvSpPr>
@@ -10779,7 +10593,7 @@
           <a:bodyPr wrap="square" lIns="25400" tIns="25400" rIns="25400" bIns="25400" rtlCol="0" anchor="ctr"/>
           <a:lstStyle/>
           <a:p>
-            <a:pPr algn="ctr" indent="0" marL="0">
+            <a:pPr marL="0" indent="0" algn="ctr">
               <a:buNone/>
             </a:pPr>
             <a:r>
@@ -10821,6 +10635,13 @@
             <a:prstDash val="solid"/>
           </a:ln>
         </p:spPr>
+        <p:txBody>
+          <a:bodyPr/>
+          <a:lstStyle/>
+          <a:p>
+            <a:endParaRPr lang="en-GB"/>
+          </a:p>
+        </p:txBody>
       </p:sp>
       <p:sp>
         <p:nvSpPr>
@@ -10848,6 +10669,13 @@
             <a:prstDash val="solid"/>
           </a:ln>
         </p:spPr>
+        <p:txBody>
+          <a:bodyPr/>
+          <a:lstStyle/>
+          <a:p>
+            <a:endParaRPr lang="en-GB"/>
+          </a:p>
+        </p:txBody>
       </p:sp>
       <p:sp>
         <p:nvSpPr>
@@ -10870,7 +10698,7 @@
           <a:bodyPr wrap="square" lIns="25400" tIns="25400" rIns="25400" bIns="25400" rtlCol="0" anchor="ctr"/>
           <a:lstStyle/>
           <a:p>
-            <a:pPr algn="ctr" indent="0" marL="0">
+            <a:pPr marL="0" indent="0" algn="ctr">
               <a:buNone/>
             </a:pPr>
             <a:r>
@@ -10912,6 +10740,13 @@
             <a:prstDash val="solid"/>
           </a:ln>
         </p:spPr>
+        <p:txBody>
+          <a:bodyPr/>
+          <a:lstStyle/>
+          <a:p>
+            <a:endParaRPr lang="en-GB"/>
+          </a:p>
+        </p:txBody>
       </p:sp>
       <p:sp>
         <p:nvSpPr>
@@ -10934,7 +10769,7 @@
           <a:bodyPr wrap="square" lIns="0" tIns="0" rIns="0" bIns="0" rtlCol="0" anchor="ctr"/>
           <a:lstStyle/>
           <a:p>
-            <a:pPr algn="ctr" indent="0" marL="0">
+            <a:pPr marL="0" indent="0" algn="ctr">
               <a:buNone/>
             </a:pPr>
             <a:r>
@@ -10978,6 +10813,13 @@
             <a:prstDash val="solid"/>
           </a:ln>
         </p:spPr>
+        <p:txBody>
+          <a:bodyPr/>
+          <a:lstStyle/>
+          <a:p>
+            <a:endParaRPr lang="en-GB"/>
+          </a:p>
+        </p:txBody>
       </p:sp>
       <p:sp>
         <p:nvSpPr>
@@ -11000,7 +10842,7 @@
           <a:bodyPr wrap="square" lIns="25400" tIns="25400" rIns="25400" bIns="25400" rtlCol="0" anchor="ctr"/>
           <a:lstStyle/>
           <a:p>
-            <a:pPr algn="ctr" indent="0" marL="0">
+            <a:pPr marL="0" indent="0" algn="ctr">
               <a:buNone/>
             </a:pPr>
             <a:r>
@@ -11017,7 +10859,7 @@
             <a:endParaRPr lang="en-US" sz="1300" dirty="0"/>
           </a:p>
           <a:p>
-            <a:pPr algn="ctr" indent="0" marL="0">
+            <a:pPr marL="0" indent="0" algn="ctr">
               <a:buNone/>
             </a:pPr>
             <a:r>
@@ -11059,6 +10901,13 @@
             <a:prstDash val="solid"/>
           </a:ln>
         </p:spPr>
+        <p:txBody>
+          <a:bodyPr/>
+          <a:lstStyle/>
+          <a:p>
+            <a:endParaRPr lang="en-GB"/>
+          </a:p>
+        </p:txBody>
       </p:sp>
       <p:sp>
         <p:nvSpPr>
@@ -11081,7 +10930,7 @@
           <a:bodyPr wrap="square" lIns="0" tIns="0" rIns="0" bIns="0" rtlCol="0" anchor="ctr"/>
           <a:lstStyle/>
           <a:p>
-            <a:pPr algn="ctr" indent="0" marL="0">
+            <a:pPr marL="0" indent="0" algn="ctr">
               <a:buNone/>
             </a:pPr>
             <a:r>
@@ -11125,6 +10974,13 @@
             <a:prstDash val="solid"/>
           </a:ln>
         </p:spPr>
+        <p:txBody>
+          <a:bodyPr/>
+          <a:lstStyle/>
+          <a:p>
+            <a:endParaRPr lang="en-GB"/>
+          </a:p>
+        </p:txBody>
       </p:sp>
       <p:sp>
         <p:nvSpPr>
@@ -11147,7 +11003,7 @@
           <a:bodyPr wrap="square" lIns="25400" tIns="25400" rIns="25400" bIns="25400" rtlCol="0" anchor="ctr"/>
           <a:lstStyle/>
           <a:p>
-            <a:pPr algn="ctr" indent="0" marL="0">
+            <a:pPr marL="0" indent="0" algn="ctr">
               <a:buNone/>
             </a:pPr>
             <a:r>
@@ -11164,7 +11020,7 @@
             <a:endParaRPr lang="en-US" sz="1300" dirty="0"/>
           </a:p>
           <a:p>
-            <a:pPr algn="ctr" indent="0" marL="0">
+            <a:pPr marL="0" indent="0" algn="ctr">
               <a:buNone/>
             </a:pPr>
             <a:r>
@@ -11203,7 +11059,7 @@
           <a:bodyPr wrap="square" lIns="0" tIns="0" rIns="0" bIns="0" rtlCol="0" anchor="ctr"/>
           <a:lstStyle/>
           <a:p>
-            <a:pPr algn="ctr" indent="0" marL="0">
+            <a:pPr marL="0" indent="0" algn="ctr">
               <a:buNone/>
             </a:pPr>
             <a:r>
@@ -11242,7 +11098,7 @@
           <a:bodyPr wrap="square" lIns="0" tIns="0" rIns="0" bIns="0" rtlCol="0" anchor="ctr"/>
           <a:lstStyle/>
           <a:p>
-            <a:pPr algn="ctr" indent="0" marL="0">
+            <a:pPr marL="0" indent="0" algn="ctr">
               <a:buNone/>
             </a:pPr>
             <a:r>
@@ -11286,6 +11142,13 @@
             <a:prstDash val="solid"/>
           </a:ln>
         </p:spPr>
+        <p:txBody>
+          <a:bodyPr/>
+          <a:lstStyle/>
+          <a:p>
+            <a:endParaRPr lang="en-GB"/>
+          </a:p>
+        </p:txBody>
       </p:sp>
       <p:sp>
         <p:nvSpPr>
@@ -11308,7 +11171,7 @@
           <a:bodyPr wrap="square" lIns="50800" tIns="50800" rIns="50800" bIns="50800" rtlCol="0" anchor="ctr"/>
           <a:lstStyle/>
           <a:p>
-            <a:pPr indent="0" marL="0">
+            <a:pPr marL="0" indent="0">
               <a:buNone/>
             </a:pPr>
             <a:r>
@@ -11342,6 +11205,7 @@
         <a:solidFill>
           <a:srgbClr val="FFFFFF"/>
         </a:solidFill>
+        <a:effectLst/>
       </p:bgPr>
     </p:bg>
     <p:spTree>
@@ -11379,7 +11243,7 @@
           <a:bodyPr wrap="square" lIns="0" tIns="0" rIns="0" bIns="0" rtlCol="0" anchor="ctr"/>
           <a:lstStyle/>
           <a:p>
-            <a:pPr indent="0" marL="0">
+            <a:pPr marL="0" indent="0">
               <a:buNone/>
             </a:pPr>
             <a:r>
@@ -11418,7 +11282,7 @@
           <a:bodyPr wrap="square" lIns="0" tIns="0" rIns="0" bIns="0" rtlCol="0" anchor="ctr"/>
           <a:lstStyle/>
           <a:p>
-            <a:pPr indent="0" marL="0">
+            <a:pPr marL="0" indent="0">
               <a:buNone/>
             </a:pPr>
             <a:r>
@@ -11457,7 +11321,7 @@
           <a:bodyPr wrap="square" lIns="0" tIns="0" rIns="0" bIns="0" rtlCol="0" anchor="ctr"/>
           <a:lstStyle/>
           <a:p>
-            <a:pPr algn="r" indent="0" marL="0">
+            <a:pPr marL="0" indent="0" algn="r">
               <a:buNone/>
             </a:pPr>
             <a:r>
@@ -11499,6 +11363,13 @@
             <a:prstDash val="solid"/>
           </a:ln>
         </p:spPr>
+        <p:txBody>
+          <a:bodyPr/>
+          <a:lstStyle/>
+          <a:p>
+            <a:endParaRPr lang="en-GB"/>
+          </a:p>
+        </p:txBody>
       </p:sp>
       <p:sp>
         <p:nvSpPr>
@@ -11524,6 +11395,13 @@
             <a:prstDash val="solid"/>
           </a:ln>
         </p:spPr>
+        <p:txBody>
+          <a:bodyPr/>
+          <a:lstStyle/>
+          <a:p>
+            <a:endParaRPr lang="en-GB"/>
+          </a:p>
+        </p:txBody>
       </p:sp>
       <p:sp>
         <p:nvSpPr>
@@ -11549,6 +11427,13 @@
             <a:prstDash val="solid"/>
           </a:ln>
         </p:spPr>
+        <p:txBody>
+          <a:bodyPr/>
+          <a:lstStyle/>
+          <a:p>
+            <a:endParaRPr lang="en-GB"/>
+          </a:p>
+        </p:txBody>
       </p:sp>
       <p:sp>
         <p:nvSpPr>
@@ -11574,6 +11459,13 @@
             <a:prstDash val="solid"/>
           </a:ln>
         </p:spPr>
+        <p:txBody>
+          <a:bodyPr/>
+          <a:lstStyle/>
+          <a:p>
+            <a:endParaRPr lang="en-GB"/>
+          </a:p>
+        </p:txBody>
       </p:sp>
       <p:sp>
         <p:nvSpPr>
@@ -11599,6 +11491,13 @@
             <a:prstDash val="solid"/>
           </a:ln>
         </p:spPr>
+        <p:txBody>
+          <a:bodyPr/>
+          <a:lstStyle/>
+          <a:p>
+            <a:endParaRPr lang="en-GB"/>
+          </a:p>
+        </p:txBody>
       </p:sp>
       <p:sp>
         <p:nvSpPr>
@@ -11624,6 +11523,13 @@
             <a:prstDash val="solid"/>
           </a:ln>
         </p:spPr>
+        <p:txBody>
+          <a:bodyPr/>
+          <a:lstStyle/>
+          <a:p>
+            <a:endParaRPr lang="en-GB"/>
+          </a:p>
+        </p:txBody>
       </p:sp>
       <p:sp>
         <p:nvSpPr>
@@ -11649,6 +11555,13 @@
             <a:prstDash val="solid"/>
           </a:ln>
         </p:spPr>
+        <p:txBody>
+          <a:bodyPr/>
+          <a:lstStyle/>
+          <a:p>
+            <a:endParaRPr lang="en-GB"/>
+          </a:p>
+        </p:txBody>
       </p:sp>
       <p:sp>
         <p:nvSpPr>
@@ -11674,6 +11587,13 @@
             <a:prstDash val="solid"/>
           </a:ln>
         </p:spPr>
+        <p:txBody>
+          <a:bodyPr/>
+          <a:lstStyle/>
+          <a:p>
+            <a:endParaRPr lang="en-GB"/>
+          </a:p>
+        </p:txBody>
       </p:sp>
       <p:sp>
         <p:nvSpPr>
@@ -11699,6 +11619,13 @@
             <a:prstDash val="solid"/>
           </a:ln>
         </p:spPr>
+        <p:txBody>
+          <a:bodyPr/>
+          <a:lstStyle/>
+          <a:p>
+            <a:endParaRPr lang="en-GB"/>
+          </a:p>
+        </p:txBody>
       </p:sp>
       <p:sp>
         <p:nvSpPr>
@@ -11724,6 +11651,13 @@
             <a:prstDash val="solid"/>
           </a:ln>
         </p:spPr>
+        <p:txBody>
+          <a:bodyPr/>
+          <a:lstStyle/>
+          <a:p>
+            <a:endParaRPr lang="en-GB"/>
+          </a:p>
+        </p:txBody>
       </p:sp>
       <p:sp>
         <p:nvSpPr>
@@ -11749,6 +11683,13 @@
             <a:prstDash val="solid"/>
           </a:ln>
         </p:spPr>
+        <p:txBody>
+          <a:bodyPr/>
+          <a:lstStyle/>
+          <a:p>
+            <a:endParaRPr lang="en-GB"/>
+          </a:p>
+        </p:txBody>
       </p:sp>
       <p:sp>
         <p:nvSpPr>
@@ -11774,6 +11715,13 @@
             <a:prstDash val="solid"/>
           </a:ln>
         </p:spPr>
+        <p:txBody>
+          <a:bodyPr/>
+          <a:lstStyle/>
+          <a:p>
+            <a:endParaRPr lang="en-GB"/>
+          </a:p>
+        </p:txBody>
       </p:sp>
       <p:sp>
         <p:nvSpPr>
@@ -11799,6 +11747,13 @@
             <a:prstDash val="solid"/>
           </a:ln>
         </p:spPr>
+        <p:txBody>
+          <a:bodyPr/>
+          <a:lstStyle/>
+          <a:p>
+            <a:endParaRPr lang="en-GB"/>
+          </a:p>
+        </p:txBody>
       </p:sp>
       <p:sp>
         <p:nvSpPr>
@@ -11824,6 +11779,13 @@
             <a:prstDash val="solid"/>
           </a:ln>
         </p:spPr>
+        <p:txBody>
+          <a:bodyPr/>
+          <a:lstStyle/>
+          <a:p>
+            <a:endParaRPr lang="en-GB"/>
+          </a:p>
+        </p:txBody>
       </p:sp>
       <p:sp>
         <p:nvSpPr>
@@ -11849,6 +11811,13 @@
             <a:prstDash val="solid"/>
           </a:ln>
         </p:spPr>
+        <p:txBody>
+          <a:bodyPr/>
+          <a:lstStyle/>
+          <a:p>
+            <a:endParaRPr lang="en-GB"/>
+          </a:p>
+        </p:txBody>
       </p:sp>
       <p:sp>
         <p:nvSpPr>
@@ -11874,6 +11843,13 @@
             <a:prstDash val="solid"/>
           </a:ln>
         </p:spPr>
+        <p:txBody>
+          <a:bodyPr/>
+          <a:lstStyle/>
+          <a:p>
+            <a:endParaRPr lang="en-GB"/>
+          </a:p>
+        </p:txBody>
       </p:sp>
       <p:sp>
         <p:nvSpPr>
@@ -11899,6 +11875,13 @@
             <a:prstDash val="solid"/>
           </a:ln>
         </p:spPr>
+        <p:txBody>
+          <a:bodyPr/>
+          <a:lstStyle/>
+          <a:p>
+            <a:endParaRPr lang="en-GB"/>
+          </a:p>
+        </p:txBody>
       </p:sp>
       <p:sp>
         <p:nvSpPr>
@@ -11924,6 +11907,13 @@
             <a:prstDash val="solid"/>
           </a:ln>
         </p:spPr>
+        <p:txBody>
+          <a:bodyPr/>
+          <a:lstStyle/>
+          <a:p>
+            <a:endParaRPr lang="en-GB"/>
+          </a:p>
+        </p:txBody>
       </p:sp>
       <p:sp>
         <p:nvSpPr>
@@ -11949,6 +11939,13 @@
             <a:prstDash val="solid"/>
           </a:ln>
         </p:spPr>
+        <p:txBody>
+          <a:bodyPr/>
+          <a:lstStyle/>
+          <a:p>
+            <a:endParaRPr lang="en-GB"/>
+          </a:p>
+        </p:txBody>
       </p:sp>
       <p:sp>
         <p:nvSpPr>
@@ -11974,6 +11971,13 @@
             <a:prstDash val="solid"/>
           </a:ln>
         </p:spPr>
+        <p:txBody>
+          <a:bodyPr/>
+          <a:lstStyle/>
+          <a:p>
+            <a:endParaRPr lang="en-GB"/>
+          </a:p>
+        </p:txBody>
       </p:sp>
       <p:sp>
         <p:nvSpPr>
@@ -11999,6 +12003,13 @@
             <a:prstDash val="solid"/>
           </a:ln>
         </p:spPr>
+        <p:txBody>
+          <a:bodyPr/>
+          <a:lstStyle/>
+          <a:p>
+            <a:endParaRPr lang="en-GB"/>
+          </a:p>
+        </p:txBody>
       </p:sp>
       <p:sp>
         <p:nvSpPr>
@@ -12024,6 +12035,13 @@
             <a:prstDash val="solid"/>
           </a:ln>
         </p:spPr>
+        <p:txBody>
+          <a:bodyPr/>
+          <a:lstStyle/>
+          <a:p>
+            <a:endParaRPr lang="en-GB"/>
+          </a:p>
+        </p:txBody>
       </p:sp>
       <p:sp>
         <p:nvSpPr>
@@ -12049,6 +12067,13 @@
             <a:prstDash val="solid"/>
           </a:ln>
         </p:spPr>
+        <p:txBody>
+          <a:bodyPr/>
+          <a:lstStyle/>
+          <a:p>
+            <a:endParaRPr lang="en-GB"/>
+          </a:p>
+        </p:txBody>
       </p:sp>
       <p:sp>
         <p:nvSpPr>
@@ -12074,6 +12099,13 @@
             <a:prstDash val="solid"/>
           </a:ln>
         </p:spPr>
+        <p:txBody>
+          <a:bodyPr/>
+          <a:lstStyle/>
+          <a:p>
+            <a:endParaRPr lang="en-GB"/>
+          </a:p>
+        </p:txBody>
       </p:sp>
       <p:sp>
         <p:nvSpPr>
@@ -12099,6 +12131,13 @@
             <a:prstDash val="solid"/>
           </a:ln>
         </p:spPr>
+        <p:txBody>
+          <a:bodyPr/>
+          <a:lstStyle/>
+          <a:p>
+            <a:endParaRPr lang="en-GB"/>
+          </a:p>
+        </p:txBody>
       </p:sp>
       <p:sp>
         <p:nvSpPr>
@@ -12124,6 +12163,13 @@
             <a:prstDash val="solid"/>
           </a:ln>
         </p:spPr>
+        <p:txBody>
+          <a:bodyPr/>
+          <a:lstStyle/>
+          <a:p>
+            <a:endParaRPr lang="en-GB"/>
+          </a:p>
+        </p:txBody>
       </p:sp>
       <p:sp>
         <p:nvSpPr>
@@ -12149,6 +12195,13 @@
             <a:prstDash val="solid"/>
           </a:ln>
         </p:spPr>
+        <p:txBody>
+          <a:bodyPr/>
+          <a:lstStyle/>
+          <a:p>
+            <a:endParaRPr lang="en-GB"/>
+          </a:p>
+        </p:txBody>
       </p:sp>
       <p:sp>
         <p:nvSpPr>
@@ -12174,6 +12227,13 @@
             <a:prstDash val="solid"/>
           </a:ln>
         </p:spPr>
+        <p:txBody>
+          <a:bodyPr/>
+          <a:lstStyle/>
+          <a:p>
+            <a:endParaRPr lang="en-GB"/>
+          </a:p>
+        </p:txBody>
       </p:sp>
       <p:sp>
         <p:nvSpPr>
@@ -12199,6 +12259,13 @@
             <a:prstDash val="solid"/>
           </a:ln>
         </p:spPr>
+        <p:txBody>
+          <a:bodyPr/>
+          <a:lstStyle/>
+          <a:p>
+            <a:endParaRPr lang="en-GB"/>
+          </a:p>
+        </p:txBody>
       </p:sp>
       <p:sp>
         <p:nvSpPr>
@@ -12224,6 +12291,13 @@
             <a:prstDash val="solid"/>
           </a:ln>
         </p:spPr>
+        <p:txBody>
+          <a:bodyPr/>
+          <a:lstStyle/>
+          <a:p>
+            <a:endParaRPr lang="en-GB"/>
+          </a:p>
+        </p:txBody>
       </p:sp>
       <p:sp>
         <p:nvSpPr>
@@ -12249,6 +12323,13 @@
             <a:prstDash val="solid"/>
           </a:ln>
         </p:spPr>
+        <p:txBody>
+          <a:bodyPr/>
+          <a:lstStyle/>
+          <a:p>
+            <a:endParaRPr lang="en-GB"/>
+          </a:p>
+        </p:txBody>
       </p:sp>
       <p:sp>
         <p:nvSpPr>
@@ -12274,6 +12355,13 @@
             <a:prstDash val="solid"/>
           </a:ln>
         </p:spPr>
+        <p:txBody>
+          <a:bodyPr/>
+          <a:lstStyle/>
+          <a:p>
+            <a:endParaRPr lang="en-GB"/>
+          </a:p>
+        </p:txBody>
       </p:sp>
       <p:sp>
         <p:nvSpPr>
@@ -12299,6 +12387,13 @@
             <a:prstDash val="solid"/>
           </a:ln>
         </p:spPr>
+        <p:txBody>
+          <a:bodyPr/>
+          <a:lstStyle/>
+          <a:p>
+            <a:endParaRPr lang="en-GB"/>
+          </a:p>
+        </p:txBody>
       </p:sp>
       <p:sp>
         <p:nvSpPr>
@@ -12324,6 +12419,13 @@
             <a:prstDash val="solid"/>
           </a:ln>
         </p:spPr>
+        <p:txBody>
+          <a:bodyPr/>
+          <a:lstStyle/>
+          <a:p>
+            <a:endParaRPr lang="en-GB"/>
+          </a:p>
+        </p:txBody>
       </p:sp>
       <p:sp>
         <p:nvSpPr>
@@ -12349,6 +12451,13 @@
             <a:prstDash val="solid"/>
           </a:ln>
         </p:spPr>
+        <p:txBody>
+          <a:bodyPr/>
+          <a:lstStyle/>
+          <a:p>
+            <a:endParaRPr lang="en-GB"/>
+          </a:p>
+        </p:txBody>
       </p:sp>
       <p:sp>
         <p:nvSpPr>
@@ -12374,6 +12483,13 @@
             <a:prstDash val="solid"/>
           </a:ln>
         </p:spPr>
+        <p:txBody>
+          <a:bodyPr/>
+          <a:lstStyle/>
+          <a:p>
+            <a:endParaRPr lang="en-GB"/>
+          </a:p>
+        </p:txBody>
       </p:sp>
       <p:sp>
         <p:nvSpPr>
@@ -12399,6 +12515,13 @@
             <a:prstDash val="solid"/>
           </a:ln>
         </p:spPr>
+        <p:txBody>
+          <a:bodyPr/>
+          <a:lstStyle/>
+          <a:p>
+            <a:endParaRPr lang="en-GB"/>
+          </a:p>
+        </p:txBody>
       </p:sp>
       <p:sp>
         <p:nvSpPr>
@@ -12424,6 +12547,13 @@
             <a:prstDash val="solid"/>
           </a:ln>
         </p:spPr>
+        <p:txBody>
+          <a:bodyPr/>
+          <a:lstStyle/>
+          <a:p>
+            <a:endParaRPr lang="en-GB"/>
+          </a:p>
+        </p:txBody>
       </p:sp>
       <p:sp>
         <p:nvSpPr>
@@ -12449,6 +12579,13 @@
             <a:prstDash val="solid"/>
           </a:ln>
         </p:spPr>
+        <p:txBody>
+          <a:bodyPr/>
+          <a:lstStyle/>
+          <a:p>
+            <a:endParaRPr lang="en-GB"/>
+          </a:p>
+        </p:txBody>
       </p:sp>
       <p:sp>
         <p:nvSpPr>
@@ -12474,6 +12611,13 @@
             <a:prstDash val="solid"/>
           </a:ln>
         </p:spPr>
+        <p:txBody>
+          <a:bodyPr/>
+          <a:lstStyle/>
+          <a:p>
+            <a:endParaRPr lang="en-GB"/>
+          </a:p>
+        </p:txBody>
       </p:sp>
       <p:sp>
         <p:nvSpPr>
@@ -12499,6 +12643,13 @@
             <a:prstDash val="solid"/>
           </a:ln>
         </p:spPr>
+        <p:txBody>
+          <a:bodyPr/>
+          <a:lstStyle/>
+          <a:p>
+            <a:endParaRPr lang="en-GB"/>
+          </a:p>
+        </p:txBody>
       </p:sp>
       <p:sp>
         <p:nvSpPr>
@@ -12524,6 +12675,13 @@
             <a:prstDash val="solid"/>
           </a:ln>
         </p:spPr>
+        <p:txBody>
+          <a:bodyPr/>
+          <a:lstStyle/>
+          <a:p>
+            <a:endParaRPr lang="en-GB"/>
+          </a:p>
+        </p:txBody>
       </p:sp>
       <p:sp>
         <p:nvSpPr>
@@ -12549,6 +12707,13 @@
             <a:prstDash val="solid"/>
           </a:ln>
         </p:spPr>
+        <p:txBody>
+          <a:bodyPr/>
+          <a:lstStyle/>
+          <a:p>
+            <a:endParaRPr lang="en-GB"/>
+          </a:p>
+        </p:txBody>
       </p:sp>
       <p:sp>
         <p:nvSpPr>
@@ -12574,6 +12739,13 @@
             <a:prstDash val="solid"/>
           </a:ln>
         </p:spPr>
+        <p:txBody>
+          <a:bodyPr/>
+          <a:lstStyle/>
+          <a:p>
+            <a:endParaRPr lang="en-GB"/>
+          </a:p>
+        </p:txBody>
       </p:sp>
       <p:sp>
         <p:nvSpPr>
@@ -12599,6 +12771,13 @@
             <a:prstDash val="solid"/>
           </a:ln>
         </p:spPr>
+        <p:txBody>
+          <a:bodyPr/>
+          <a:lstStyle/>
+          <a:p>
+            <a:endParaRPr lang="en-GB"/>
+          </a:p>
+        </p:txBody>
       </p:sp>
       <p:sp>
         <p:nvSpPr>
@@ -12624,6 +12803,13 @@
             <a:prstDash val="solid"/>
           </a:ln>
         </p:spPr>
+        <p:txBody>
+          <a:bodyPr/>
+          <a:lstStyle/>
+          <a:p>
+            <a:endParaRPr lang="en-GB"/>
+          </a:p>
+        </p:txBody>
       </p:sp>
       <p:sp>
         <p:nvSpPr>
@@ -12649,6 +12835,13 @@
             <a:prstDash val="solid"/>
           </a:ln>
         </p:spPr>
+        <p:txBody>
+          <a:bodyPr/>
+          <a:lstStyle/>
+          <a:p>
+            <a:endParaRPr lang="en-GB"/>
+          </a:p>
+        </p:txBody>
       </p:sp>
       <p:sp>
         <p:nvSpPr>
@@ -12674,6 +12867,13 @@
             <a:prstDash val="solid"/>
           </a:ln>
         </p:spPr>
+        <p:txBody>
+          <a:bodyPr/>
+          <a:lstStyle/>
+          <a:p>
+            <a:endParaRPr lang="en-GB"/>
+          </a:p>
+        </p:txBody>
       </p:sp>
       <p:sp>
         <p:nvSpPr>
@@ -12699,6 +12899,13 @@
             <a:prstDash val="solid"/>
           </a:ln>
         </p:spPr>
+        <p:txBody>
+          <a:bodyPr/>
+          <a:lstStyle/>
+          <a:p>
+            <a:endParaRPr lang="en-GB"/>
+          </a:p>
+        </p:txBody>
       </p:sp>
       <p:sp>
         <p:nvSpPr>
@@ -12724,6 +12931,13 @@
             <a:prstDash val="solid"/>
           </a:ln>
         </p:spPr>
+        <p:txBody>
+          <a:bodyPr/>
+          <a:lstStyle/>
+          <a:p>
+            <a:endParaRPr lang="en-GB"/>
+          </a:p>
+        </p:txBody>
       </p:sp>
       <p:sp>
         <p:nvSpPr>
@@ -12749,6 +12963,13 @@
             <a:prstDash val="solid"/>
           </a:ln>
         </p:spPr>
+        <p:txBody>
+          <a:bodyPr/>
+          <a:lstStyle/>
+          <a:p>
+            <a:endParaRPr lang="en-GB"/>
+          </a:p>
+        </p:txBody>
       </p:sp>
       <p:sp>
         <p:nvSpPr>
@@ -12774,6 +12995,13 @@
             <a:prstDash val="solid"/>
           </a:ln>
         </p:spPr>
+        <p:txBody>
+          <a:bodyPr/>
+          <a:lstStyle/>
+          <a:p>
+            <a:endParaRPr lang="en-GB"/>
+          </a:p>
+        </p:txBody>
       </p:sp>
       <p:sp>
         <p:nvSpPr>
@@ -12799,6 +13027,13 @@
             <a:prstDash val="solid"/>
           </a:ln>
         </p:spPr>
+        <p:txBody>
+          <a:bodyPr/>
+          <a:lstStyle/>
+          <a:p>
+            <a:endParaRPr lang="en-GB"/>
+          </a:p>
+        </p:txBody>
       </p:sp>
       <p:sp>
         <p:nvSpPr>
@@ -12824,6 +13059,13 @@
             <a:prstDash val="solid"/>
           </a:ln>
         </p:spPr>
+        <p:txBody>
+          <a:bodyPr/>
+          <a:lstStyle/>
+          <a:p>
+            <a:endParaRPr lang="en-GB"/>
+          </a:p>
+        </p:txBody>
       </p:sp>
       <p:sp>
         <p:nvSpPr>
@@ -12849,6 +13091,13 @@
             <a:prstDash val="solid"/>
           </a:ln>
         </p:spPr>
+        <p:txBody>
+          <a:bodyPr/>
+          <a:lstStyle/>
+          <a:p>
+            <a:endParaRPr lang="en-GB"/>
+          </a:p>
+        </p:txBody>
       </p:sp>
       <p:sp>
         <p:nvSpPr>
@@ -12874,6 +13123,13 @@
             <a:prstDash val="solid"/>
           </a:ln>
         </p:spPr>
+        <p:txBody>
+          <a:bodyPr/>
+          <a:lstStyle/>
+          <a:p>
+            <a:endParaRPr lang="en-GB"/>
+          </a:p>
+        </p:txBody>
       </p:sp>
       <p:sp>
         <p:nvSpPr>
@@ -12899,6 +13155,13 @@
             <a:prstDash val="solid"/>
           </a:ln>
         </p:spPr>
+        <p:txBody>
+          <a:bodyPr/>
+          <a:lstStyle/>
+          <a:p>
+            <a:endParaRPr lang="en-GB"/>
+          </a:p>
+        </p:txBody>
       </p:sp>
       <p:sp>
         <p:nvSpPr>
@@ -12924,6 +13187,13 @@
             <a:prstDash val="solid"/>
           </a:ln>
         </p:spPr>
+        <p:txBody>
+          <a:bodyPr/>
+          <a:lstStyle/>
+          <a:p>
+            <a:endParaRPr lang="en-GB"/>
+          </a:p>
+        </p:txBody>
       </p:sp>
       <p:sp>
         <p:nvSpPr>
@@ -12949,6 +13219,13 @@
             <a:prstDash val="solid"/>
           </a:ln>
         </p:spPr>
+        <p:txBody>
+          <a:bodyPr/>
+          <a:lstStyle/>
+          <a:p>
+            <a:endParaRPr lang="en-GB"/>
+          </a:p>
+        </p:txBody>
       </p:sp>
       <p:sp>
         <p:nvSpPr>
@@ -12974,6 +13251,13 @@
             <a:prstDash val="solid"/>
           </a:ln>
         </p:spPr>
+        <p:txBody>
+          <a:bodyPr/>
+          <a:lstStyle/>
+          <a:p>
+            <a:endParaRPr lang="en-GB"/>
+          </a:p>
+        </p:txBody>
       </p:sp>
       <p:sp>
         <p:nvSpPr>
@@ -12999,6 +13283,13 @@
             <a:prstDash val="solid"/>
           </a:ln>
         </p:spPr>
+        <p:txBody>
+          <a:bodyPr/>
+          <a:lstStyle/>
+          <a:p>
+            <a:endParaRPr lang="en-GB"/>
+          </a:p>
+        </p:txBody>
       </p:sp>
       <p:sp>
         <p:nvSpPr>
@@ -13024,6 +13315,13 @@
             <a:prstDash val="solid"/>
           </a:ln>
         </p:spPr>
+        <p:txBody>
+          <a:bodyPr/>
+          <a:lstStyle/>
+          <a:p>
+            <a:endParaRPr lang="en-GB"/>
+          </a:p>
+        </p:txBody>
       </p:sp>
       <p:sp>
         <p:nvSpPr>
@@ -13049,6 +13347,13 @@
             <a:prstDash val="solid"/>
           </a:ln>
         </p:spPr>
+        <p:txBody>
+          <a:bodyPr/>
+          <a:lstStyle/>
+          <a:p>
+            <a:endParaRPr lang="en-GB"/>
+          </a:p>
+        </p:txBody>
       </p:sp>
       <p:sp>
         <p:nvSpPr>
@@ -13074,6 +13379,13 @@
             <a:prstDash val="solid"/>
           </a:ln>
         </p:spPr>
+        <p:txBody>
+          <a:bodyPr/>
+          <a:lstStyle/>
+          <a:p>
+            <a:endParaRPr lang="en-GB"/>
+          </a:p>
+        </p:txBody>
       </p:sp>
       <p:sp>
         <p:nvSpPr>
@@ -13099,6 +13411,13 @@
             <a:prstDash val="solid"/>
           </a:ln>
         </p:spPr>
+        <p:txBody>
+          <a:bodyPr/>
+          <a:lstStyle/>
+          <a:p>
+            <a:endParaRPr lang="en-GB"/>
+          </a:p>
+        </p:txBody>
       </p:sp>
       <p:sp>
         <p:nvSpPr>
@@ -13124,6 +13443,13 @@
             <a:prstDash val="solid"/>
           </a:ln>
         </p:spPr>
+        <p:txBody>
+          <a:bodyPr/>
+          <a:lstStyle/>
+          <a:p>
+            <a:endParaRPr lang="en-GB"/>
+          </a:p>
+        </p:txBody>
       </p:sp>
       <p:sp>
         <p:nvSpPr>
@@ -13149,6 +13475,13 @@
             <a:prstDash val="solid"/>
           </a:ln>
         </p:spPr>
+        <p:txBody>
+          <a:bodyPr/>
+          <a:lstStyle/>
+          <a:p>
+            <a:endParaRPr lang="en-GB"/>
+          </a:p>
+        </p:txBody>
       </p:sp>
       <p:sp>
         <p:nvSpPr>
@@ -13174,6 +13507,13 @@
             <a:prstDash val="solid"/>
           </a:ln>
         </p:spPr>
+        <p:txBody>
+          <a:bodyPr/>
+          <a:lstStyle/>
+          <a:p>
+            <a:endParaRPr lang="en-GB"/>
+          </a:p>
+        </p:txBody>
       </p:sp>
       <p:sp>
         <p:nvSpPr>
@@ -13199,6 +13539,13 @@
             <a:prstDash val="solid"/>
           </a:ln>
         </p:spPr>
+        <p:txBody>
+          <a:bodyPr/>
+          <a:lstStyle/>
+          <a:p>
+            <a:endParaRPr lang="en-GB"/>
+          </a:p>
+        </p:txBody>
       </p:sp>
       <p:sp>
         <p:nvSpPr>
@@ -13224,6 +13571,13 @@
             <a:prstDash val="solid"/>
           </a:ln>
         </p:spPr>
+        <p:txBody>
+          <a:bodyPr/>
+          <a:lstStyle/>
+          <a:p>
+            <a:endParaRPr lang="en-GB"/>
+          </a:p>
+        </p:txBody>
       </p:sp>
       <p:sp>
         <p:nvSpPr>
@@ -13249,6 +13603,13 @@
             <a:prstDash val="solid"/>
           </a:ln>
         </p:spPr>
+        <p:txBody>
+          <a:bodyPr/>
+          <a:lstStyle/>
+          <a:p>
+            <a:endParaRPr lang="en-GB"/>
+          </a:p>
+        </p:txBody>
       </p:sp>
       <p:sp>
         <p:nvSpPr>
@@ -13274,6 +13635,13 @@
             <a:prstDash val="solid"/>
           </a:ln>
         </p:spPr>
+        <p:txBody>
+          <a:bodyPr/>
+          <a:lstStyle/>
+          <a:p>
+            <a:endParaRPr lang="en-GB"/>
+          </a:p>
+        </p:txBody>
       </p:sp>
       <p:sp>
         <p:nvSpPr>
@@ -13299,6 +13667,13 @@
             <a:prstDash val="solid"/>
           </a:ln>
         </p:spPr>
+        <p:txBody>
+          <a:bodyPr/>
+          <a:lstStyle/>
+          <a:p>
+            <a:endParaRPr lang="en-GB"/>
+          </a:p>
+        </p:txBody>
       </p:sp>
       <p:sp>
         <p:nvSpPr>
@@ -13324,6 +13699,13 @@
             <a:prstDash val="solid"/>
           </a:ln>
         </p:spPr>
+        <p:txBody>
+          <a:bodyPr/>
+          <a:lstStyle/>
+          <a:p>
+            <a:endParaRPr lang="en-GB"/>
+          </a:p>
+        </p:txBody>
       </p:sp>
       <p:sp>
         <p:nvSpPr>
@@ -13349,6 +13731,13 @@
             <a:prstDash val="solid"/>
           </a:ln>
         </p:spPr>
+        <p:txBody>
+          <a:bodyPr/>
+          <a:lstStyle/>
+          <a:p>
+            <a:endParaRPr lang="en-GB"/>
+          </a:p>
+        </p:txBody>
       </p:sp>
       <p:sp>
         <p:nvSpPr>
@@ -13374,6 +13763,13 @@
             <a:prstDash val="solid"/>
           </a:ln>
         </p:spPr>
+        <p:txBody>
+          <a:bodyPr/>
+          <a:lstStyle/>
+          <a:p>
+            <a:endParaRPr lang="en-GB"/>
+          </a:p>
+        </p:txBody>
       </p:sp>
       <p:sp>
         <p:nvSpPr>
@@ -13399,6 +13795,13 @@
             <a:prstDash val="solid"/>
           </a:ln>
         </p:spPr>
+        <p:txBody>
+          <a:bodyPr/>
+          <a:lstStyle/>
+          <a:p>
+            <a:endParaRPr lang="en-GB"/>
+          </a:p>
+        </p:txBody>
       </p:sp>
       <p:sp>
         <p:nvSpPr>
@@ -13424,6 +13827,13 @@
             <a:prstDash val="solid"/>
           </a:ln>
         </p:spPr>
+        <p:txBody>
+          <a:bodyPr/>
+          <a:lstStyle/>
+          <a:p>
+            <a:endParaRPr lang="en-GB"/>
+          </a:p>
+        </p:txBody>
       </p:sp>
       <p:sp>
         <p:nvSpPr>
@@ -13446,7 +13856,7 @@
           <a:bodyPr wrap="square" lIns="0" tIns="0" rIns="0" bIns="0" rtlCol="0" anchor="ctr"/>
           <a:lstStyle/>
           <a:p>
-            <a:pPr indent="0" marL="0">
+            <a:pPr marL="0" indent="0">
               <a:buNone/>
             </a:pPr>
             <a:r>
@@ -13485,7 +13895,7 @@
           <a:bodyPr wrap="square" lIns="0" tIns="0" rIns="0" bIns="0" rtlCol="0" anchor="ctr"/>
           <a:lstStyle/>
           <a:p>
-            <a:pPr indent="0" marL="0">
+            <a:pPr marL="0" indent="0">
               <a:buNone/>
             </a:pPr>
             <a:r>
@@ -13524,7 +13934,7 @@
           <a:bodyPr wrap="square" lIns="0" tIns="0" rIns="0" bIns="0" rtlCol="0" anchor="t"/>
           <a:lstStyle/>
           <a:p>
-            <a:pPr indent="0" marL="0">
+            <a:pPr marL="0" indent="0">
               <a:buNone/>
             </a:pPr>
             <a:r>
@@ -13563,7 +13973,7 @@
           <a:bodyPr wrap="square" lIns="0" tIns="0" rIns="0" bIns="0" rtlCol="0" anchor="t"/>
           <a:lstStyle/>
           <a:p>
-            <a:pPr indent="0" marL="0">
+            <a:pPr marL="0" indent="0">
               <a:buNone/>
             </a:pPr>
             <a:r>
@@ -13607,6 +14017,13 @@
             <a:prstDash val="solid"/>
           </a:ln>
         </p:spPr>
+        <p:txBody>
+          <a:bodyPr/>
+          <a:lstStyle/>
+          <a:p>
+            <a:endParaRPr lang="en-GB"/>
+          </a:p>
+        </p:txBody>
       </p:sp>
       <p:sp>
         <p:nvSpPr>
@@ -13629,7 +14046,7 @@
           <a:bodyPr wrap="square" lIns="50800" tIns="50800" rIns="50800" bIns="50800" rtlCol="0" anchor="ctr"/>
           <a:lstStyle/>
           <a:p>
-            <a:pPr indent="0" marL="0">
+            <a:pPr marL="0" indent="0">
               <a:buNone/>
             </a:pPr>
             <a:r>
@@ -13663,6 +14080,7 @@
         <a:solidFill>
           <a:srgbClr val="FFFFFF"/>
         </a:solidFill>
+        <a:effectLst/>
       </p:bgPr>
     </p:bg>
     <p:spTree>
@@ -13700,7 +14118,7 @@
           <a:bodyPr wrap="square" lIns="0" tIns="0" rIns="0" bIns="0" rtlCol="0" anchor="ctr"/>
           <a:lstStyle/>
           <a:p>
-            <a:pPr indent="0" marL="0">
+            <a:pPr marL="0" indent="0">
               <a:buNone/>
             </a:pPr>
             <a:r>
@@ -13739,7 +14157,7 @@
           <a:bodyPr wrap="square" lIns="0" tIns="0" rIns="0" bIns="0" rtlCol="0" anchor="ctr"/>
           <a:lstStyle/>
           <a:p>
-            <a:pPr indent="0" marL="0">
+            <a:pPr marL="0" indent="0">
               <a:buNone/>
             </a:pPr>
             <a:r>
@@ -13778,7 +14196,7 @@
           <a:bodyPr wrap="square" lIns="0" tIns="0" rIns="0" bIns="0" rtlCol="0" anchor="ctr"/>
           <a:lstStyle/>
           <a:p>
-            <a:pPr algn="r" indent="0" marL="0">
+            <a:pPr marL="0" indent="0" algn="r">
               <a:buNone/>
             </a:pPr>
             <a:r>
@@ -13812,18 +14230,48 @@
         </p:nvGraphicFramePr>
         <p:xfrm>
           <a:off x="548640" y="1554480"/>
-          <a:ext cx="4572000" cy="914400"/>
+          <a:ext cx="4572000" cy="1463040"/>
         </p:xfrm>
         <a:graphic>
           <a:graphicData uri="http://schemas.openxmlformats.org/drawingml/2006/table">
             <a:tbl>
               <a:tblPr/>
               <a:tblGrid>
-                <a:gridCol w="1097280"/>
-                <a:gridCol w="868680"/>
-                <a:gridCol w="868680"/>
-                <a:gridCol w="868680"/>
-                <a:gridCol w="868680"/>
+                <a:gridCol w="1097280">
+                  <a:extLst>
+                    <a:ext uri="{9D8B030D-6E8A-4147-A177-3AD203B41FA5}">
+                      <a16:colId xmlns:a16="http://schemas.microsoft.com/office/drawing/2014/main" val="20000"/>
+                    </a:ext>
+                  </a:extLst>
+                </a:gridCol>
+                <a:gridCol w="868680">
+                  <a:extLst>
+                    <a:ext uri="{9D8B030D-6E8A-4147-A177-3AD203B41FA5}">
+                      <a16:colId xmlns:a16="http://schemas.microsoft.com/office/drawing/2014/main" val="20001"/>
+                    </a:ext>
+                  </a:extLst>
+                </a:gridCol>
+                <a:gridCol w="868680">
+                  <a:extLst>
+                    <a:ext uri="{9D8B030D-6E8A-4147-A177-3AD203B41FA5}">
+                      <a16:colId xmlns:a16="http://schemas.microsoft.com/office/drawing/2014/main" val="20002"/>
+                    </a:ext>
+                  </a:extLst>
+                </a:gridCol>
+                <a:gridCol w="868680">
+                  <a:extLst>
+                    <a:ext uri="{9D8B030D-6E8A-4147-A177-3AD203B41FA5}">
+                      <a16:colId xmlns:a16="http://schemas.microsoft.com/office/drawing/2014/main" val="20003"/>
+                    </a:ext>
+                  </a:extLst>
+                </a:gridCol>
+                <a:gridCol w="868680">
+                  <a:extLst>
+                    <a:ext uri="{9D8B030D-6E8A-4147-A177-3AD203B41FA5}">
+                      <a16:colId xmlns:a16="http://schemas.microsoft.com/office/drawing/2014/main" val="20004"/>
+                    </a:ext>
+                  </a:extLst>
+                </a:gridCol>
               </a:tblGrid>
               <a:tr h="365760">
                 <a:tc>
@@ -13831,7 +14279,7 @@
                     <a:bodyPr/>
                     <a:lstStyle/>
                     <a:p>
-                      <a:pPr indent="0" marL="0">
+                      <a:pPr marL="0" indent="0">
                         <a:buNone/>
                       </a:pPr>
                       <a:endParaRPr lang="en-US" sz="1300" dirty="0">
@@ -13888,7 +14336,7 @@
                     <a:bodyPr/>
                     <a:lstStyle/>
                     <a:p>
-                      <a:pPr indent="0" marL="0">
+                      <a:pPr marL="0" indent="0">
                         <a:buNone/>
                       </a:pPr>
                       <a:r>
@@ -13956,7 +14404,7 @@
                     <a:bodyPr/>
                     <a:lstStyle/>
                     <a:p>
-                      <a:pPr indent="0" marL="0">
+                      <a:pPr marL="0" indent="0">
                         <a:buNone/>
                       </a:pPr>
                       <a:r>
@@ -14024,7 +14472,7 @@
                     <a:bodyPr/>
                     <a:lstStyle/>
                     <a:p>
-                      <a:pPr indent="0" marL="0">
+                      <a:pPr marL="0" indent="0">
                         <a:buNone/>
                       </a:pPr>
                       <a:r>
@@ -14092,7 +14540,7 @@
                     <a:bodyPr/>
                     <a:lstStyle/>
                     <a:p>
-                      <a:pPr indent="0" marL="0">
+                      <a:pPr marL="0" indent="0">
                         <a:buNone/>
                       </a:pPr>
                       <a:r>
@@ -14155,6 +14603,11 @@
                     </a:solidFill>
                   </a:tcPr>
                 </a:tc>
+                <a:extLst>
+                  <a:ext uri="{0D108BD9-81ED-4DB2-BD59-A6C34878D82A}">
+                    <a16:rowId xmlns:a16="http://schemas.microsoft.com/office/drawing/2014/main" val="10000"/>
+                  </a:ext>
+                </a:extLst>
               </a:tr>
               <a:tr h="365760">
                 <a:tc>
@@ -14162,7 +14615,7 @@
                     <a:bodyPr/>
                     <a:lstStyle/>
                     <a:p>
-                      <a:pPr indent="0" marL="0">
+                      <a:pPr marL="0" indent="0">
                         <a:buNone/>
                       </a:pPr>
                       <a:r>
@@ -14230,7 +14683,7 @@
                     <a:bodyPr/>
                     <a:lstStyle/>
                     <a:p>
-                      <a:pPr indent="0" marL="0">
+                      <a:pPr marL="0" indent="0">
                         <a:buNone/>
                       </a:pPr>
                       <a:r>
@@ -14298,7 +14751,7 @@
                     <a:bodyPr/>
                     <a:lstStyle/>
                     <a:p>
-                      <a:pPr indent="0" marL="0">
+                      <a:pPr marL="0" indent="0">
                         <a:buNone/>
                       </a:pPr>
                       <a:r>
@@ -14366,7 +14819,7 @@
                     <a:bodyPr/>
                     <a:lstStyle/>
                     <a:p>
-                      <a:pPr indent="0" marL="0">
+                      <a:pPr marL="0" indent="0">
                         <a:buNone/>
                       </a:pPr>
                       <a:r>
@@ -14434,7 +14887,7 @@
                     <a:bodyPr/>
                     <a:lstStyle/>
                     <a:p>
-                      <a:pPr indent="0" marL="0">
+                      <a:pPr marL="0" indent="0">
                         <a:buNone/>
                       </a:pPr>
                       <a:r>
@@ -14497,6 +14950,11 @@
                     </a:solidFill>
                   </a:tcPr>
                 </a:tc>
+                <a:extLst>
+                  <a:ext uri="{0D108BD9-81ED-4DB2-BD59-A6C34878D82A}">
+                    <a16:rowId xmlns:a16="http://schemas.microsoft.com/office/drawing/2014/main" val="10001"/>
+                  </a:ext>
+                </a:extLst>
               </a:tr>
               <a:tr h="365760">
                 <a:tc>
@@ -14504,7 +14962,7 @@
                     <a:bodyPr/>
                     <a:lstStyle/>
                     <a:p>
-                      <a:pPr indent="0" marL="0">
+                      <a:pPr marL="0" indent="0">
                         <a:buNone/>
                       </a:pPr>
                       <a:r>
@@ -14572,7 +15030,7 @@
                     <a:bodyPr/>
                     <a:lstStyle/>
                     <a:p>
-                      <a:pPr indent="0" marL="0">
+                      <a:pPr marL="0" indent="0">
                         <a:buNone/>
                       </a:pPr>
                       <a:r>
@@ -14640,7 +15098,7 @@
                     <a:bodyPr/>
                     <a:lstStyle/>
                     <a:p>
-                      <a:pPr indent="0" marL="0">
+                      <a:pPr marL="0" indent="0">
                         <a:buNone/>
                       </a:pPr>
                       <a:r>
@@ -14708,7 +15166,7 @@
                     <a:bodyPr/>
                     <a:lstStyle/>
                     <a:p>
-                      <a:pPr indent="0" marL="0">
+                      <a:pPr marL="0" indent="0">
                         <a:buNone/>
                       </a:pPr>
                       <a:r>
@@ -14776,7 +15234,7 @@
                     <a:bodyPr/>
                     <a:lstStyle/>
                     <a:p>
-                      <a:pPr indent="0" marL="0">
+                      <a:pPr marL="0" indent="0">
                         <a:buNone/>
                       </a:pPr>
                       <a:r>
@@ -14839,6 +15297,11 @@
                     </a:solidFill>
                   </a:tcPr>
                 </a:tc>
+                <a:extLst>
+                  <a:ext uri="{0D108BD9-81ED-4DB2-BD59-A6C34878D82A}">
+                    <a16:rowId xmlns:a16="http://schemas.microsoft.com/office/drawing/2014/main" val="10002"/>
+                  </a:ext>
+                </a:extLst>
               </a:tr>
               <a:tr h="365760">
                 <a:tc>
@@ -14846,7 +15309,7 @@
                     <a:bodyPr/>
                     <a:lstStyle/>
                     <a:p>
-                      <a:pPr indent="0" marL="0">
+                      <a:pPr marL="0" indent="0">
                         <a:buNone/>
                       </a:pPr>
                       <a:r>
@@ -14914,7 +15377,7 @@
                     <a:bodyPr/>
                     <a:lstStyle/>
                     <a:p>
-                      <a:pPr indent="0" marL="0">
+                      <a:pPr marL="0" indent="0">
                         <a:buNone/>
                       </a:pPr>
                       <a:r>
@@ -14982,7 +15445,7 @@
                     <a:bodyPr/>
                     <a:lstStyle/>
                     <a:p>
-                      <a:pPr indent="0" marL="0">
+                      <a:pPr marL="0" indent="0">
                         <a:buNone/>
                       </a:pPr>
                       <a:r>
@@ -15050,7 +15513,7 @@
                     <a:bodyPr/>
                     <a:lstStyle/>
                     <a:p>
-                      <a:pPr indent="0" marL="0">
+                      <a:pPr marL="0" indent="0">
                         <a:buNone/>
                       </a:pPr>
                       <a:r>
@@ -15118,7 +15581,7 @@
                     <a:bodyPr/>
                     <a:lstStyle/>
                     <a:p>
-                      <a:pPr indent="0" marL="0">
+                      <a:pPr marL="0" indent="0">
                         <a:buNone/>
                       </a:pPr>
                       <a:r>
@@ -15181,6 +15644,11 @@
                     </a:solidFill>
                   </a:tcPr>
                 </a:tc>
+                <a:extLst>
+                  <a:ext uri="{0D108BD9-81ED-4DB2-BD59-A6C34878D82A}">
+                    <a16:rowId xmlns:a16="http://schemas.microsoft.com/office/drawing/2014/main" val="10003"/>
+                  </a:ext>
+                </a:extLst>
               </a:tr>
             </a:tbl>
           </a:graphicData>
@@ -15207,7 +15675,7 @@
           <a:bodyPr wrap="square" lIns="0" tIns="0" rIns="0" bIns="0" rtlCol="0" anchor="ctr"/>
           <a:lstStyle/>
           <a:p>
-            <a:pPr indent="0" marL="0">
+            <a:pPr marL="0" indent="0">
               <a:buNone/>
             </a:pPr>
             <a:r>
@@ -15241,17 +15709,41 @@
         </p:nvGraphicFramePr>
         <p:xfrm>
           <a:off x="6675120" y="1554480"/>
-          <a:ext cx="4937760" cy="914400"/>
+          <a:ext cx="4937760" cy="1828800"/>
         </p:xfrm>
         <a:graphic>
           <a:graphicData uri="http://schemas.openxmlformats.org/drawingml/2006/table">
             <a:tbl>
               <a:tblPr/>
               <a:tblGrid>
-                <a:gridCol w="1645920"/>
-                <a:gridCol w="1097280"/>
-                <a:gridCol w="1097280"/>
-                <a:gridCol w="1097280"/>
+                <a:gridCol w="1645920">
+                  <a:extLst>
+                    <a:ext uri="{9D8B030D-6E8A-4147-A177-3AD203B41FA5}">
+                      <a16:colId xmlns:a16="http://schemas.microsoft.com/office/drawing/2014/main" val="20000"/>
+                    </a:ext>
+                  </a:extLst>
+                </a:gridCol>
+                <a:gridCol w="1097280">
+                  <a:extLst>
+                    <a:ext uri="{9D8B030D-6E8A-4147-A177-3AD203B41FA5}">
+                      <a16:colId xmlns:a16="http://schemas.microsoft.com/office/drawing/2014/main" val="20001"/>
+                    </a:ext>
+                  </a:extLst>
+                </a:gridCol>
+                <a:gridCol w="1097280">
+                  <a:extLst>
+                    <a:ext uri="{9D8B030D-6E8A-4147-A177-3AD203B41FA5}">
+                      <a16:colId xmlns:a16="http://schemas.microsoft.com/office/drawing/2014/main" val="20002"/>
+                    </a:ext>
+                  </a:extLst>
+                </a:gridCol>
+                <a:gridCol w="1097280">
+                  <a:extLst>
+                    <a:ext uri="{9D8B030D-6E8A-4147-A177-3AD203B41FA5}">
+                      <a16:colId xmlns:a16="http://schemas.microsoft.com/office/drawing/2014/main" val="20003"/>
+                    </a:ext>
+                  </a:extLst>
+                </a:gridCol>
               </a:tblGrid>
               <a:tr h="365760">
                 <a:tc>
@@ -15259,7 +15751,7 @@
                     <a:bodyPr/>
                     <a:lstStyle/>
                     <a:p>
-                      <a:pPr indent="0" marL="0">
+                      <a:pPr marL="0" indent="0">
                         <a:buNone/>
                       </a:pPr>
                       <a:endParaRPr lang="en-US" sz="1300" dirty="0">
@@ -15316,7 +15808,7 @@
                     <a:bodyPr/>
                     <a:lstStyle/>
                     <a:p>
-                      <a:pPr indent="0" marL="0">
+                      <a:pPr marL="0" indent="0">
                         <a:buNone/>
                       </a:pPr>
                       <a:r>
@@ -15384,7 +15876,7 @@
                     <a:bodyPr/>
                     <a:lstStyle/>
                     <a:p>
-                      <a:pPr indent="0" marL="0">
+                      <a:pPr marL="0" indent="0">
                         <a:buNone/>
                       </a:pPr>
                       <a:r>
@@ -15452,7 +15944,7 @@
                     <a:bodyPr/>
                     <a:lstStyle/>
                     <a:p>
-                      <a:pPr indent="0" marL="0">
+                      <a:pPr marL="0" indent="0">
                         <a:buNone/>
                       </a:pPr>
                       <a:r>
@@ -15515,6 +16007,11 @@
                     </a:solidFill>
                   </a:tcPr>
                 </a:tc>
+                <a:extLst>
+                  <a:ext uri="{0D108BD9-81ED-4DB2-BD59-A6C34878D82A}">
+                    <a16:rowId xmlns:a16="http://schemas.microsoft.com/office/drawing/2014/main" val="10000"/>
+                  </a:ext>
+                </a:extLst>
               </a:tr>
               <a:tr h="365760">
                 <a:tc>
@@ -15522,7 +16019,7 @@
                     <a:bodyPr/>
                     <a:lstStyle/>
                     <a:p>
-                      <a:pPr indent="0" marL="0">
+                      <a:pPr marL="0" indent="0">
                         <a:buNone/>
                       </a:pPr>
                       <a:r>
@@ -15590,7 +16087,7 @@
                     <a:bodyPr/>
                     <a:lstStyle/>
                     <a:p>
-                      <a:pPr indent="0" marL="0">
+                      <a:pPr marL="0" indent="0">
                         <a:buNone/>
                       </a:pPr>
                       <a:r>
@@ -15658,7 +16155,7 @@
                     <a:bodyPr/>
                     <a:lstStyle/>
                     <a:p>
-                      <a:pPr indent="0" marL="0">
+                      <a:pPr marL="0" indent="0">
                         <a:buNone/>
                       </a:pPr>
                       <a:r>
@@ -15726,7 +16223,7 @@
                     <a:bodyPr/>
                     <a:lstStyle/>
                     <a:p>
-                      <a:pPr indent="0" marL="0">
+                      <a:pPr marL="0" indent="0">
                         <a:buNone/>
                       </a:pPr>
                       <a:r>
@@ -15789,6 +16286,11 @@
                     </a:solidFill>
                   </a:tcPr>
                 </a:tc>
+                <a:extLst>
+                  <a:ext uri="{0D108BD9-81ED-4DB2-BD59-A6C34878D82A}">
+                    <a16:rowId xmlns:a16="http://schemas.microsoft.com/office/drawing/2014/main" val="10001"/>
+                  </a:ext>
+                </a:extLst>
               </a:tr>
               <a:tr h="365760">
                 <a:tc>
@@ -15796,7 +16298,7 @@
                     <a:bodyPr/>
                     <a:lstStyle/>
                     <a:p>
-                      <a:pPr indent="0" marL="0">
+                      <a:pPr marL="0" indent="0">
                         <a:buNone/>
                       </a:pPr>
                       <a:r>
@@ -15864,7 +16366,7 @@
                     <a:bodyPr/>
                     <a:lstStyle/>
                     <a:p>
-                      <a:pPr indent="0" marL="0">
+                      <a:pPr marL="0" indent="0">
                         <a:buNone/>
                       </a:pPr>
                       <a:r>
@@ -15932,7 +16434,7 @@
                     <a:bodyPr/>
                     <a:lstStyle/>
                     <a:p>
-                      <a:pPr indent="0" marL="0">
+                      <a:pPr marL="0" indent="0">
                         <a:buNone/>
                       </a:pPr>
                       <a:r>
@@ -16000,7 +16502,7 @@
                     <a:bodyPr/>
                     <a:lstStyle/>
                     <a:p>
-                      <a:pPr indent="0" marL="0">
+                      <a:pPr marL="0" indent="0">
                         <a:buNone/>
                       </a:pPr>
                       <a:r>
@@ -16063,6 +16565,11 @@
                     </a:solidFill>
                   </a:tcPr>
                 </a:tc>
+                <a:extLst>
+                  <a:ext uri="{0D108BD9-81ED-4DB2-BD59-A6C34878D82A}">
+                    <a16:rowId xmlns:a16="http://schemas.microsoft.com/office/drawing/2014/main" val="10002"/>
+                  </a:ext>
+                </a:extLst>
               </a:tr>
               <a:tr h="365760">
                 <a:tc>
@@ -16070,7 +16577,7 @@
                     <a:bodyPr/>
                     <a:lstStyle/>
                     <a:p>
-                      <a:pPr indent="0" marL="0">
+                      <a:pPr marL="0" indent="0">
                         <a:buNone/>
                       </a:pPr>
                       <a:r>
@@ -16138,7 +16645,7 @@
                     <a:bodyPr/>
                     <a:lstStyle/>
                     <a:p>
-                      <a:pPr indent="0" marL="0">
+                      <a:pPr marL="0" indent="0">
                         <a:buNone/>
                       </a:pPr>
                       <a:r>
@@ -16206,7 +16713,7 @@
                     <a:bodyPr/>
                     <a:lstStyle/>
                     <a:p>
-                      <a:pPr indent="0" marL="0">
+                      <a:pPr marL="0" indent="0">
                         <a:buNone/>
                       </a:pPr>
                       <a:r>
@@ -16274,7 +16781,7 @@
                     <a:bodyPr/>
                     <a:lstStyle/>
                     <a:p>
-                      <a:pPr indent="0" marL="0">
+                      <a:pPr marL="0" indent="0">
                         <a:buNone/>
                       </a:pPr>
                       <a:r>
@@ -16337,6 +16844,11 @@
                     </a:solidFill>
                   </a:tcPr>
                 </a:tc>
+                <a:extLst>
+                  <a:ext uri="{0D108BD9-81ED-4DB2-BD59-A6C34878D82A}">
+                    <a16:rowId xmlns:a16="http://schemas.microsoft.com/office/drawing/2014/main" val="10003"/>
+                  </a:ext>
+                </a:extLst>
               </a:tr>
               <a:tr h="365760">
                 <a:tc>
@@ -16344,7 +16856,7 @@
                     <a:bodyPr/>
                     <a:lstStyle/>
                     <a:p>
-                      <a:pPr indent="0" marL="0">
+                      <a:pPr marL="0" indent="0">
                         <a:buNone/>
                       </a:pPr>
                       <a:r>
@@ -16412,7 +16924,7 @@
                     <a:bodyPr/>
                     <a:lstStyle/>
                     <a:p>
-                      <a:pPr indent="0" marL="0">
+                      <a:pPr marL="0" indent="0">
                         <a:buNone/>
                       </a:pPr>
                       <a:r>
@@ -16480,7 +16992,7 @@
                     <a:bodyPr/>
                     <a:lstStyle/>
                     <a:p>
-                      <a:pPr indent="0" marL="0">
+                      <a:pPr marL="0" indent="0">
                         <a:buNone/>
                       </a:pPr>
                       <a:r>
@@ -16548,7 +17060,7 @@
                     <a:bodyPr/>
                     <a:lstStyle/>
                     <a:p>
-                      <a:pPr indent="0" marL="0">
+                      <a:pPr marL="0" indent="0">
                         <a:buNone/>
                       </a:pPr>
                       <a:r>
@@ -16611,6 +17123,11 @@
                     </a:solidFill>
                   </a:tcPr>
                 </a:tc>
+                <a:extLst>
+                  <a:ext uri="{0D108BD9-81ED-4DB2-BD59-A6C34878D82A}">
+                    <a16:rowId xmlns:a16="http://schemas.microsoft.com/office/drawing/2014/main" val="10004"/>
+                  </a:ext>
+                </a:extLst>
               </a:tr>
             </a:tbl>
           </a:graphicData>
@@ -16618,7 +17135,7 @@
       </p:graphicFrame>
       <p:sp>
         <p:nvSpPr>
-          <p:cNvPr id="8" name="Text 4"/>
+          <p:cNvPr id="5" name="Text 4"/>
           <p:cNvSpPr txBox="1"/>
           <p:nvPr/>
         </p:nvSpPr>
@@ -16637,7 +17154,7 @@
           <a:bodyPr wrap="square" lIns="0" tIns="0" rIns="0" bIns="0" rtlCol="0" anchor="ctr"/>
           <a:lstStyle/>
           <a:p>
-            <a:pPr indent="0" marL="0">
+            <a:pPr marL="0" indent="0">
               <a:buNone/>
             </a:pPr>
             <a:r>
@@ -16756,6 +17273,7 @@
         <a:solidFill>
           <a:srgbClr val="FFFFFF"/>
         </a:solidFill>
+        <a:effectLst/>
       </p:bgPr>
     </p:bg>
     <p:spTree>
@@ -16793,7 +17311,7 @@
           <a:bodyPr wrap="square" lIns="0" tIns="0" rIns="0" bIns="0" rtlCol="0" anchor="ctr"/>
           <a:lstStyle/>
           <a:p>
-            <a:pPr indent="0" marL="0">
+            <a:pPr marL="0" indent="0">
               <a:buNone/>
             </a:pPr>
             <a:r>
@@ -16832,7 +17350,7 @@
           <a:bodyPr wrap="square" lIns="0" tIns="0" rIns="0" bIns="0" rtlCol="0" anchor="ctr"/>
           <a:lstStyle/>
           <a:p>
-            <a:pPr indent="0" marL="0">
+            <a:pPr marL="0" indent="0">
               <a:buNone/>
             </a:pPr>
             <a:r>
@@ -16871,7 +17389,7 @@
           <a:bodyPr wrap="square" lIns="0" tIns="0" rIns="0" bIns="0" rtlCol="0" anchor="ctr"/>
           <a:lstStyle/>
           <a:p>
-            <a:pPr algn="r" indent="0" marL="0">
+            <a:pPr marL="0" indent="0" algn="r">
               <a:buNone/>
             </a:pPr>
             <a:r>
@@ -16910,7 +17428,7 @@
           <a:bodyPr wrap="square" lIns="0" tIns="0" rIns="0" bIns="0" rtlCol="0" anchor="ctr"/>
           <a:lstStyle/>
           <a:p>
-            <a:pPr indent="0" marL="0">
+            <a:pPr marL="0" indent="0">
               <a:buNone/>
             </a:pPr>
             <a:r>
@@ -16930,7 +17448,7 @@
       </p:sp>
       <p:graphicFrame>
         <p:nvGraphicFramePr>
-          <p:cNvPr id="6" name="Chart 0" descr=""/>
+          <p:cNvPr id="6" name="Chart 0"/>
           <p:cNvGraphicFramePr/>
           <p:nvPr/>
         </p:nvGraphicFramePr>
@@ -16938,9 +17456,9 @@
           <a:off x="548640" y="2103120"/>
           <a:ext cx="6035040" cy="3840480"/>
         </p:xfrm>
-        <a:graphic xmlns:a="http://schemas.openxmlformats.org/drawingml/2006/main">
+        <a:graphic>
           <a:graphicData uri="http://schemas.openxmlformats.org/drawingml/2006/chart">
-            <c:chart xmlns:c="http://schemas.openxmlformats.org/drawingml/2006/chart" r:id="rId1"/>
+            <c:chart xmlns:c="http://schemas.openxmlformats.org/drawingml/2006/chart" xmlns:r="http://schemas.openxmlformats.org/officeDocument/2006/relationships" r:id="rId3"/>
           </a:graphicData>
         </a:graphic>
       </p:graphicFrame>
@@ -16966,6 +17484,13 @@
             <a:prstDash val="dash"/>
           </a:ln>
         </p:spPr>
+        <p:txBody>
+          <a:bodyPr/>
+          <a:lstStyle/>
+          <a:p>
+            <a:endParaRPr lang="en-GB"/>
+          </a:p>
+        </p:txBody>
       </p:sp>
       <p:sp>
         <p:nvSpPr>
@@ -16988,7 +17513,7 @@
           <a:bodyPr wrap="square" lIns="0" tIns="0" rIns="0" bIns="0" rtlCol="0" anchor="ctr"/>
           <a:lstStyle/>
           <a:p>
-            <a:pPr indent="0" marL="0">
+            <a:pPr marL="0" indent="0">
               <a:buNone/>
             </a:pPr>
             <a:r>
@@ -17107,6 +17632,7 @@
         <a:solidFill>
           <a:srgbClr val="FFFFFF"/>
         </a:solidFill>
+        <a:effectLst/>
       </p:bgPr>
     </p:bg>
     <p:spTree>
@@ -17144,7 +17670,7 @@
           <a:bodyPr wrap="square" lIns="0" tIns="0" rIns="0" bIns="0" rtlCol="0" anchor="ctr"/>
           <a:lstStyle/>
           <a:p>
-            <a:pPr indent="0" marL="0">
+            <a:pPr marL="0" indent="0">
               <a:buNone/>
             </a:pPr>
             <a:r>
@@ -17183,7 +17709,7 @@
           <a:bodyPr wrap="square" lIns="0" tIns="0" rIns="0" bIns="0" rtlCol="0" anchor="ctr"/>
           <a:lstStyle/>
           <a:p>
-            <a:pPr indent="0" marL="0">
+            <a:pPr marL="0" indent="0">
               <a:buNone/>
             </a:pPr>
             <a:r>
@@ -17222,7 +17748,7 @@
           <a:bodyPr wrap="square" lIns="0" tIns="0" rIns="0" bIns="0" rtlCol="0" anchor="ctr"/>
           <a:lstStyle/>
           <a:p>
-            <a:pPr algn="r" indent="0" marL="0">
+            <a:pPr marL="0" indent="0" algn="r">
               <a:buNone/>
             </a:pPr>
             <a:r>
@@ -17237,87 +17763,6 @@
               <a:t>28</a:t>
             </a:r>
             <a:endParaRPr lang="en-US" sz="1000" dirty="0"/>
-          </a:p>
-        </p:txBody>
-      </p:sp>
-      <p:sp>
-        <p:nvSpPr>
-          <p:cNvPr id="5" name="Shape 3"/>
-          <p:cNvSpPr/>
-          <p:nvPr/>
-        </p:nvSpPr>
-        <p:spPr>
-          <a:xfrm>
-            <a:off x="548640" y="1371600"/>
-            <a:ext cx="6035040" cy="4389120"/>
-          </a:xfrm>
-          <a:prstGeom prst="rect">
-            <a:avLst/>
-          </a:prstGeom>
-          <a:solidFill>
-            <a:srgbClr val="F3F4F6"/>
-          </a:solidFill>
-          <a:ln w="12700">
-            <a:solidFill>
-              <a:srgbClr val="BBBBBB"/>
-            </a:solidFill>
-            <a:prstDash val="dash"/>
-          </a:ln>
-        </p:spPr>
-      </p:sp>
-      <p:sp>
-        <p:nvSpPr>
-          <p:cNvPr id="6" name="Text 4"/>
-          <p:cNvSpPr txBox="1"/>
-          <p:nvPr/>
-        </p:nvSpPr>
-        <p:spPr>
-          <a:xfrm>
-            <a:off x="731520" y="1371600"/>
-            <a:ext cx="5669280" cy="4389120"/>
-          </a:xfrm>
-          <a:prstGeom prst="rect">
-            <a:avLst/>
-          </a:prstGeom>
-          <a:noFill/>
-          <a:ln/>
-        </p:spPr>
-        <p:txBody>
-          <a:bodyPr wrap="square" rtlCol="0" anchor="ctr"/>
-          <a:lstStyle/>
-          <a:p>
-            <a:pPr algn="ctr" indent="0" marL="0">
-              <a:buNone/>
-            </a:pPr>
-            <a:r>
-              <a:rPr lang="en-US" sz="1200" i="1" dirty="0">
-                <a:solidFill>
-                  <a:srgbClr val="6B6B6B"/>
-                </a:solidFill>
-                <a:latin typeface="Calibri" pitchFamily="34" charset="0"/>
-                <a:ea typeface="Calibri" pitchFamily="34" charset="-122"/>
-                <a:cs typeface="Calibri" pitchFamily="34" charset="-120"/>
-              </a:rPr>
-              <a:t>[Figure to insert]</a:t>
-            </a:r>
-            <a:endParaRPr lang="en-US" sz="1200" dirty="0"/>
-          </a:p>
-          <a:p>
-            <a:pPr algn="ctr" indent="0" marL="0">
-              <a:buNone/>
-            </a:pPr>
-            <a:r>
-              <a:rPr lang="en-US" sz="1200" i="1" dirty="0">
-                <a:solidFill>
-                  <a:srgbClr val="6B6B6B"/>
-                </a:solidFill>
-                <a:latin typeface="Calibri" pitchFamily="34" charset="0"/>
-                <a:ea typeface="Calibri" pitchFamily="34" charset="-122"/>
-                <a:cs typeface="Calibri" pitchFamily="34" charset="-120"/>
-              </a:rPr>
-              <a:t>Boxplots of SES-FRic by biogeographic realm with ±1.96 lines (exam figure or Group C output: GroupC_SES.png)</a:t>
-            </a:r>
-            <a:endParaRPr lang="en-US" sz="1200" dirty="0"/>
           </a:p>
         </p:txBody>
       </p:sp>
@@ -17337,16 +17782,34 @@
         </p:nvGraphicFramePr>
         <p:xfrm>
           <a:off x="6858000" y="1371600"/>
-          <a:ext cx="4782312" cy="914400"/>
+          <a:ext cx="4782312" cy="2194560"/>
         </p:xfrm>
         <a:graphic>
           <a:graphicData uri="http://schemas.openxmlformats.org/drawingml/2006/table">
             <a:tbl>
               <a:tblPr/>
               <a:tblGrid>
-                <a:gridCol w="1188720"/>
-                <a:gridCol w="1188720"/>
-                <a:gridCol w="2404872"/>
+                <a:gridCol w="1188720">
+                  <a:extLst>
+                    <a:ext uri="{9D8B030D-6E8A-4147-A177-3AD203B41FA5}">
+                      <a16:colId xmlns:a16="http://schemas.microsoft.com/office/drawing/2014/main" val="20000"/>
+                    </a:ext>
+                  </a:extLst>
+                </a:gridCol>
+                <a:gridCol w="1188720">
+                  <a:extLst>
+                    <a:ext uri="{9D8B030D-6E8A-4147-A177-3AD203B41FA5}">
+                      <a16:colId xmlns:a16="http://schemas.microsoft.com/office/drawing/2014/main" val="20001"/>
+                    </a:ext>
+                  </a:extLst>
+                </a:gridCol>
+                <a:gridCol w="2404872">
+                  <a:extLst>
+                    <a:ext uri="{9D8B030D-6E8A-4147-A177-3AD203B41FA5}">
+                      <a16:colId xmlns:a16="http://schemas.microsoft.com/office/drawing/2014/main" val="20002"/>
+                    </a:ext>
+                  </a:extLst>
+                </a:gridCol>
               </a:tblGrid>
               <a:tr h="548640">
                 <a:tc>
@@ -17354,7 +17817,7 @@
                     <a:bodyPr/>
                     <a:lstStyle/>
                     <a:p>
-                      <a:pPr indent="0" marL="0">
+                      <a:pPr marL="0" indent="0">
                         <a:buNone/>
                       </a:pPr>
                       <a:r>
@@ -17422,7 +17885,7 @@
                     <a:bodyPr/>
                     <a:lstStyle/>
                     <a:p>
-                      <a:pPr indent="0" marL="0">
+                      <a:pPr marL="0" indent="0">
                         <a:buNone/>
                       </a:pPr>
                       <a:r>
@@ -17490,7 +17953,7 @@
                     <a:bodyPr/>
                     <a:lstStyle/>
                     <a:p>
-                      <a:pPr indent="0" marL="0">
+                      <a:pPr marL="0" indent="0">
                         <a:buNone/>
                       </a:pPr>
                       <a:r>
@@ -17553,6 +18016,11 @@
                     </a:solidFill>
                   </a:tcPr>
                 </a:tc>
+                <a:extLst>
+                  <a:ext uri="{0D108BD9-81ED-4DB2-BD59-A6C34878D82A}">
+                    <a16:rowId xmlns:a16="http://schemas.microsoft.com/office/drawing/2014/main" val="10000"/>
+                  </a:ext>
+                </a:extLst>
               </a:tr>
               <a:tr h="548640">
                 <a:tc>
@@ -17560,7 +18028,7 @@
                     <a:bodyPr/>
                     <a:lstStyle/>
                     <a:p>
-                      <a:pPr indent="0" marL="0">
+                      <a:pPr marL="0" indent="0">
                         <a:buNone/>
                       </a:pPr>
                       <a:r>
@@ -17628,7 +18096,7 @@
                     <a:bodyPr/>
                     <a:lstStyle/>
                     <a:p>
-                      <a:pPr indent="0" marL="0">
+                      <a:pPr marL="0" indent="0">
                         <a:buNone/>
                       </a:pPr>
                       <a:r>
@@ -17696,7 +18164,7 @@
                     <a:bodyPr/>
                     <a:lstStyle/>
                     <a:p>
-                      <a:pPr indent="0" marL="0">
+                      <a:pPr marL="0" indent="0">
                         <a:buNone/>
                       </a:pPr>
                       <a:r>
@@ -17759,6 +18227,11 @@
                     </a:solidFill>
                   </a:tcPr>
                 </a:tc>
+                <a:extLst>
+                  <a:ext uri="{0D108BD9-81ED-4DB2-BD59-A6C34878D82A}">
+                    <a16:rowId xmlns:a16="http://schemas.microsoft.com/office/drawing/2014/main" val="10001"/>
+                  </a:ext>
+                </a:extLst>
               </a:tr>
               <a:tr h="548640">
                 <a:tc>
@@ -17766,7 +18239,7 @@
                     <a:bodyPr/>
                     <a:lstStyle/>
                     <a:p>
-                      <a:pPr indent="0" marL="0">
+                      <a:pPr marL="0" indent="0">
                         <a:buNone/>
                       </a:pPr>
                       <a:r>
@@ -17834,7 +18307,7 @@
                     <a:bodyPr/>
                     <a:lstStyle/>
                     <a:p>
-                      <a:pPr indent="0" marL="0">
+                      <a:pPr marL="0" indent="0">
                         <a:buNone/>
                       </a:pPr>
                       <a:r>
@@ -17902,7 +18375,7 @@
                     <a:bodyPr/>
                     <a:lstStyle/>
                     <a:p>
-                      <a:pPr indent="0" marL="0">
+                      <a:pPr marL="0" indent="0">
                         <a:buNone/>
                       </a:pPr>
                       <a:r>
@@ -17965,6 +18438,11 @@
                     </a:solidFill>
                   </a:tcPr>
                 </a:tc>
+                <a:extLst>
+                  <a:ext uri="{0D108BD9-81ED-4DB2-BD59-A6C34878D82A}">
+                    <a16:rowId xmlns:a16="http://schemas.microsoft.com/office/drawing/2014/main" val="10002"/>
+                  </a:ext>
+                </a:extLst>
               </a:tr>
               <a:tr h="548640">
                 <a:tc>
@@ -17972,7 +18450,7 @@
                     <a:bodyPr/>
                     <a:lstStyle/>
                     <a:p>
-                      <a:pPr indent="0" marL="0">
+                      <a:pPr marL="0" indent="0">
                         <a:buNone/>
                       </a:pPr>
                       <a:r>
@@ -18040,7 +18518,7 @@
                     <a:bodyPr/>
                     <a:lstStyle/>
                     <a:p>
-                      <a:pPr indent="0" marL="0">
+                      <a:pPr marL="0" indent="0">
                         <a:buNone/>
                       </a:pPr>
                       <a:r>
@@ -18108,7 +18586,7 @@
                     <a:bodyPr/>
                     <a:lstStyle/>
                     <a:p>
-                      <a:pPr indent="0" marL="0">
+                      <a:pPr marL="0" indent="0">
                         <a:buNone/>
                       </a:pPr>
                       <a:r>
@@ -18171,6 +18649,11 @@
                     </a:solidFill>
                   </a:tcPr>
                 </a:tc>
+                <a:extLst>
+                  <a:ext uri="{0D108BD9-81ED-4DB2-BD59-A6C34878D82A}">
+                    <a16:rowId xmlns:a16="http://schemas.microsoft.com/office/drawing/2014/main" val="10003"/>
+                  </a:ext>
+                </a:extLst>
               </a:tr>
             </a:tbl>
           </a:graphicData>
@@ -18240,6 +18723,34 @@
           </a:p>
         </p:txBody>
       </p:sp>
+      <p:graphicFrame>
+        <p:nvGraphicFramePr>
+          <p:cNvPr id="7" name="Chart 0">
+            <a:extLst>
+              <a:ext uri="{FF2B5EF4-FFF2-40B4-BE49-F238E27FC236}">
+                <a16:creationId xmlns:a16="http://schemas.microsoft.com/office/drawing/2014/main" id="{2E473855-B1F5-2EFD-55EB-687002F49569}"/>
+              </a:ext>
+            </a:extLst>
+          </p:cNvPr>
+          <p:cNvGraphicFramePr/>
+          <p:nvPr>
+            <p:extLst>
+              <p:ext uri="{D42A27DB-BD31-4B8C-83A1-F6EECF244321}">
+                <p14:modId xmlns:p14="http://schemas.microsoft.com/office/powerpoint/2010/main" val="664819279"/>
+              </p:ext>
+            </p:extLst>
+          </p:nvPr>
+        </p:nvGraphicFramePr>
+        <p:xfrm>
+          <a:off x="548640" y="1645920"/>
+          <a:ext cx="6035040" cy="3840480"/>
+        </p:xfrm>
+        <a:graphic>
+          <a:graphicData uri="http://schemas.openxmlformats.org/drawingml/2006/chart">
+            <c:chart xmlns:c="http://schemas.openxmlformats.org/drawingml/2006/chart" xmlns:r="http://schemas.openxmlformats.org/officeDocument/2006/relationships" r:id="rId3"/>
+          </a:graphicData>
+        </a:graphic>
+      </p:graphicFrame>
     </p:spTree>
   </p:cSld>
   <p:clrMapOvr>
@@ -18541,4 +19052,319 @@
     </a:ext>
   </a:extLst>
 </a:theme>
+</file>
+
+<file path=ppt/theme/theme2.xml><?xml version="1.0" encoding="utf-8"?>
+<a:theme xmlns:a="http://schemas.openxmlformats.org/drawingml/2006/main" name="Thème Office">
+  <a:themeElements>
+    <a:clrScheme name="Office">
+      <a:dk1>
+        <a:sysClr val="windowText" lastClr="000000"/>
+      </a:dk1>
+      <a:lt1>
+        <a:sysClr val="window" lastClr="FFFFFF"/>
+      </a:lt1>
+      <a:dk2>
+        <a:srgbClr val="0E2841"/>
+      </a:dk2>
+      <a:lt2>
+        <a:srgbClr val="E8E8E8"/>
+      </a:lt2>
+      <a:accent1>
+        <a:srgbClr val="156082"/>
+      </a:accent1>
+      <a:accent2>
+        <a:srgbClr val="E97132"/>
+      </a:accent2>
+      <a:accent3>
+        <a:srgbClr val="196B24"/>
+      </a:accent3>
+      <a:accent4>
+        <a:srgbClr val="0F9ED5"/>
+      </a:accent4>
+      <a:accent5>
+        <a:srgbClr val="A02B93"/>
+      </a:accent5>
+      <a:accent6>
+        <a:srgbClr val="4EA72E"/>
+      </a:accent6>
+      <a:hlink>
+        <a:srgbClr val="467886"/>
+      </a:hlink>
+      <a:folHlink>
+        <a:srgbClr val="96607D"/>
+      </a:folHlink>
+    </a:clrScheme>
+    <a:fontScheme name="Office">
+      <a:majorFont>
+        <a:latin typeface="Aptos Display" panose="02110004020202020204"/>
+        <a:ea typeface=""/>
+        <a:cs typeface=""/>
+        <a:font script="Jpan" typeface="游ゴシック Light"/>
+        <a:font script="Hang" typeface="맑은 고딕"/>
+        <a:font script="Hans" typeface="等线 Light"/>
+        <a:font script="Hant" typeface="新細明體"/>
+        <a:font script="Arab" typeface="Times New Roman"/>
+        <a:font script="Hebr" typeface="Times New Roman"/>
+        <a:font script="Thai" typeface="Angsana New"/>
+        <a:font script="Ethi" typeface="Nyala"/>
+        <a:font script="Beng" typeface="Vrinda"/>
+        <a:font script="Gujr" typeface="Shruti"/>
+        <a:font script="Khmr" typeface="MoolBoran"/>
+        <a:font script="Knda" typeface="Tunga"/>
+        <a:font script="Guru" typeface="Raavi"/>
+        <a:font script="Cans" typeface="Euphemia"/>
+        <a:font script="Cher" typeface="Plantagenet Cherokee"/>
+        <a:font script="Yiii" typeface="Microsoft Yi Baiti"/>
+        <a:font script="Tibt" typeface="Microsoft Himalaya"/>
+        <a:font script="Thaa" typeface="MV Boli"/>
+        <a:font script="Deva" typeface="Mangal"/>
+        <a:font script="Telu" typeface="Gautami"/>
+        <a:font script="Taml" typeface="Latha"/>
+        <a:font script="Syrc" typeface="Estrangelo Edessa"/>
+        <a:font script="Orya" typeface="Kalinga"/>
+        <a:font script="Mlym" typeface="Kartika"/>
+        <a:font script="Laoo" typeface="DokChampa"/>
+        <a:font script="Sinh" typeface="Iskoola Pota"/>
+        <a:font script="Mong" typeface="Mongolian Baiti"/>
+        <a:font script="Viet" typeface="Times New Roman"/>
+        <a:font script="Uigh" typeface="Microsoft Uighur"/>
+        <a:font script="Geor" typeface="Sylfaen"/>
+        <a:font script="Armn" typeface="Arial"/>
+        <a:font script="Bugi" typeface="Leelawadee UI"/>
+        <a:font script="Bopo" typeface="Microsoft JhengHei"/>
+        <a:font script="Java" typeface="Javanese Text"/>
+        <a:font script="Lisu" typeface="Segoe UI"/>
+        <a:font script="Mymr" typeface="Myanmar Text"/>
+        <a:font script="Nkoo" typeface="Ebrima"/>
+        <a:font script="Olck" typeface="Nirmala UI"/>
+        <a:font script="Osma" typeface="Ebrima"/>
+        <a:font script="Phag" typeface="Phagspa"/>
+        <a:font script="Syrn" typeface="Estrangelo Edessa"/>
+        <a:font script="Syrj" typeface="Estrangelo Edessa"/>
+        <a:font script="Syre" typeface="Estrangelo Edessa"/>
+        <a:font script="Sora" typeface="Nirmala UI"/>
+        <a:font script="Tale" typeface="Microsoft Tai Le"/>
+        <a:font script="Talu" typeface="Microsoft New Tai Lue"/>
+        <a:font script="Tfng" typeface="Ebrima"/>
+      </a:majorFont>
+      <a:minorFont>
+        <a:latin typeface="Aptos" panose="02110004020202020204"/>
+        <a:ea typeface=""/>
+        <a:cs typeface=""/>
+        <a:font script="Jpan" typeface="游ゴシック"/>
+        <a:font script="Hang" typeface="맑은 고딕"/>
+        <a:font script="Hans" typeface="等线"/>
+        <a:font script="Hant" typeface="新細明體"/>
+        <a:font script="Arab" typeface="Arial"/>
+        <a:font script="Hebr" typeface="Arial"/>
+        <a:font script="Thai" typeface="Cordia New"/>
+        <a:font script="Ethi" typeface="Nyala"/>
+        <a:font script="Beng" typeface="Vrinda"/>
+        <a:font script="Gujr" typeface="Shruti"/>
+        <a:font script="Khmr" typeface="DaunPenh"/>
+        <a:font script="Knda" typeface="Tunga"/>
+        <a:font script="Guru" typeface="Raavi"/>
+        <a:font script="Cans" typeface="Euphemia"/>
+        <a:font script="Cher" typeface="Plantagenet Cherokee"/>
+        <a:font script="Yiii" typeface="Microsoft Yi Baiti"/>
+        <a:font script="Tibt" typeface="Microsoft Himalaya"/>
+        <a:font script="Thaa" typeface="MV Boli"/>
+        <a:font script="Deva" typeface="Mangal"/>
+        <a:font script="Telu" typeface="Gautami"/>
+        <a:font script="Taml" typeface="Latha"/>
+        <a:font script="Syrc" typeface="Estrangelo Edessa"/>
+        <a:font script="Orya" typeface="Kalinga"/>
+        <a:font script="Mlym" typeface="Kartika"/>
+        <a:font script="Laoo" typeface="DokChampa"/>
+        <a:font script="Sinh" typeface="Iskoola Pota"/>
+        <a:font script="Mong" typeface="Mongolian Baiti"/>
+        <a:font script="Viet" typeface="Arial"/>
+        <a:font script="Uigh" typeface="Microsoft Uighur"/>
+        <a:font script="Geor" typeface="Sylfaen"/>
+        <a:font script="Armn" typeface="Arial"/>
+        <a:font script="Bugi" typeface="Leelawadee UI"/>
+        <a:font script="Bopo" typeface="Microsoft JhengHei"/>
+        <a:font script="Java" typeface="Javanese Text"/>
+        <a:font script="Lisu" typeface="Segoe UI"/>
+        <a:font script="Mymr" typeface="Myanmar Text"/>
+        <a:font script="Nkoo" typeface="Ebrima"/>
+        <a:font script="Olck" typeface="Nirmala UI"/>
+        <a:font script="Osma" typeface="Ebrima"/>
+        <a:font script="Phag" typeface="Phagspa"/>
+        <a:font script="Syrn" typeface="Estrangelo Edessa"/>
+        <a:font script="Syrj" typeface="Estrangelo Edessa"/>
+        <a:font script="Syre" typeface="Estrangelo Edessa"/>
+        <a:font script="Sora" typeface="Nirmala UI"/>
+        <a:font script="Tale" typeface="Microsoft Tai Le"/>
+        <a:font script="Talu" typeface="Microsoft New Tai Lue"/>
+        <a:font script="Tfng" typeface="Ebrima"/>
+      </a:minorFont>
+    </a:fontScheme>
+    <a:fmtScheme name="Office">
+      <a:fillStyleLst>
+        <a:solidFill>
+          <a:schemeClr val="phClr"/>
+        </a:solidFill>
+        <a:gradFill rotWithShape="1">
+          <a:gsLst>
+            <a:gs pos="0">
+              <a:schemeClr val="phClr">
+                <a:lumMod val="110000"/>
+                <a:satMod val="105000"/>
+                <a:tint val="67000"/>
+              </a:schemeClr>
+            </a:gs>
+            <a:gs pos="50000">
+              <a:schemeClr val="phClr">
+                <a:lumMod val="105000"/>
+                <a:satMod val="103000"/>
+                <a:tint val="73000"/>
+              </a:schemeClr>
+            </a:gs>
+            <a:gs pos="100000">
+              <a:schemeClr val="phClr">
+                <a:lumMod val="105000"/>
+                <a:satMod val="109000"/>
+                <a:tint val="81000"/>
+              </a:schemeClr>
+            </a:gs>
+          </a:gsLst>
+          <a:lin ang="5400000" scaled="0"/>
+        </a:gradFill>
+        <a:gradFill rotWithShape="1">
+          <a:gsLst>
+            <a:gs pos="0">
+              <a:schemeClr val="phClr">
+                <a:satMod val="103000"/>
+                <a:lumMod val="102000"/>
+                <a:tint val="94000"/>
+              </a:schemeClr>
+            </a:gs>
+            <a:gs pos="50000">
+              <a:schemeClr val="phClr">
+                <a:satMod val="110000"/>
+                <a:lumMod val="100000"/>
+                <a:shade val="100000"/>
+              </a:schemeClr>
+            </a:gs>
+            <a:gs pos="100000">
+              <a:schemeClr val="phClr">
+                <a:lumMod val="99000"/>
+                <a:satMod val="120000"/>
+                <a:shade val="78000"/>
+              </a:schemeClr>
+            </a:gs>
+          </a:gsLst>
+          <a:lin ang="5400000" scaled="0"/>
+        </a:gradFill>
+      </a:fillStyleLst>
+      <a:lnStyleLst>
+        <a:ln w="12700" cap="flat" cmpd="sng" algn="ctr">
+          <a:solidFill>
+            <a:schemeClr val="phClr"/>
+          </a:solidFill>
+          <a:prstDash val="solid"/>
+          <a:miter lim="800000"/>
+        </a:ln>
+        <a:ln w="19050" cap="flat" cmpd="sng" algn="ctr">
+          <a:solidFill>
+            <a:schemeClr val="phClr"/>
+          </a:solidFill>
+          <a:prstDash val="solid"/>
+          <a:miter lim="800000"/>
+        </a:ln>
+        <a:ln w="25400" cap="flat" cmpd="sng" algn="ctr">
+          <a:solidFill>
+            <a:schemeClr val="phClr"/>
+          </a:solidFill>
+          <a:prstDash val="solid"/>
+          <a:miter lim="800000"/>
+        </a:ln>
+      </a:lnStyleLst>
+      <a:effectStyleLst>
+        <a:effectStyle>
+          <a:effectLst/>
+        </a:effectStyle>
+        <a:effectStyle>
+          <a:effectLst/>
+        </a:effectStyle>
+        <a:effectStyle>
+          <a:effectLst>
+            <a:outerShdw blurRad="57150" dist="19050" dir="5400000" algn="ctr" rotWithShape="0">
+              <a:srgbClr val="000000">
+                <a:alpha val="63000"/>
+              </a:srgbClr>
+            </a:outerShdw>
+          </a:effectLst>
+        </a:effectStyle>
+      </a:effectStyleLst>
+      <a:bgFillStyleLst>
+        <a:solidFill>
+          <a:schemeClr val="phClr"/>
+        </a:solidFill>
+        <a:solidFill>
+          <a:schemeClr val="phClr">
+            <a:tint val="95000"/>
+            <a:satMod val="170000"/>
+          </a:schemeClr>
+        </a:solidFill>
+        <a:gradFill rotWithShape="1">
+          <a:gsLst>
+            <a:gs pos="0">
+              <a:schemeClr val="phClr">
+                <a:tint val="93000"/>
+                <a:satMod val="150000"/>
+                <a:shade val="98000"/>
+                <a:lumMod val="102000"/>
+              </a:schemeClr>
+            </a:gs>
+            <a:gs pos="50000">
+              <a:schemeClr val="phClr">
+                <a:tint val="98000"/>
+                <a:satMod val="130000"/>
+                <a:shade val="90000"/>
+                <a:lumMod val="103000"/>
+              </a:schemeClr>
+            </a:gs>
+            <a:gs pos="100000">
+              <a:schemeClr val="phClr">
+                <a:shade val="63000"/>
+                <a:satMod val="120000"/>
+              </a:schemeClr>
+            </a:gs>
+          </a:gsLst>
+          <a:lin ang="5400000" scaled="0"/>
+        </a:gradFill>
+      </a:bgFillStyleLst>
+    </a:fmtScheme>
+  </a:themeElements>
+  <a:objectDefaults>
+    <a:lnDef>
+      <a:spPr/>
+      <a:bodyPr/>
+      <a:lstStyle/>
+      <a:style>
+        <a:lnRef idx="2">
+          <a:schemeClr val="accent1"/>
+        </a:lnRef>
+        <a:fillRef idx="0">
+          <a:schemeClr val="accent1"/>
+        </a:fillRef>
+        <a:effectRef idx="1">
+          <a:schemeClr val="accent1"/>
+        </a:effectRef>
+        <a:fontRef idx="minor">
+          <a:schemeClr val="tx1"/>
+        </a:fontRef>
+      </a:style>
+    </a:lnDef>
+  </a:objectDefaults>
+  <a:extraClrSchemeLst/>
+  <a:extLst>
+    <a:ext uri="{05A4C25C-085E-4340-85A3-A5531E510DB2}">
+      <thm15:themeFamily xmlns:thm15="http://schemas.microsoft.com/office/thememl/2012/main" name="Office Theme" id="{2E142A2C-CD16-42D6-873A-C26D2A0506FA}" vid="{1BDDFF52-6CD6-40A5-AB3C-68EB2F1E4D0A}"/>
+    </a:ext>
+  </a:extLst>
+</a:theme>
 </file>